--- a/Drupal AI Factchecker.pptx
+++ b/Drupal AI Factchecker.pptx
@@ -2,41 +2,41 @@
 <file path=ppt/presentation.xml><?xml version="1.0" encoding="utf-8"?>
 <p:presentation xmlns:a="http://schemas.openxmlformats.org/drawingml/2006/main" xmlns:r="http://schemas.openxmlformats.org/officeDocument/2006/relationships" xmlns:mc="http://schemas.openxmlformats.org/markup-compatibility/2006" xmlns:mv="urn:schemas-microsoft-com:mac:vml" xmlns:p="http://schemas.openxmlformats.org/presentationml/2006/main" xmlns:c="http://schemas.openxmlformats.org/drawingml/2006/chart" xmlns:dgm="http://schemas.openxmlformats.org/drawingml/2006/diagram" xmlns:o="urn:schemas-microsoft-com:office:office" xmlns:v="urn:schemas-microsoft-com:vml" xmlns:pvml="urn:schemas-microsoft-com:office:powerpoint" xmlns:com="http://schemas.openxmlformats.org/drawingml/2006/compatibility" xmlns:p14="http://schemas.microsoft.com/office/powerpoint/2010/main" xmlns:p15="http://schemas.microsoft.com/office/powerpoint/2012/main" xmlns:ahyp="http://schemas.microsoft.com/office/drawing/2018/hyperlinkcolor" autoCompressPictures="0" embedTrueTypeFonts="1" strictFirstAndLastChars="0" saveSubsetFonts="1">
   <p:sldMasterIdLst>
-    <p:sldMasterId id="2147483659" r:id="rId4"/>
+    <p:sldMasterId id="2147483659" r:id="rId5"/>
   </p:sldMasterIdLst>
   <p:notesMasterIdLst>
-    <p:notesMasterId r:id="rId5"/>
+    <p:notesMasterId r:id="rId6"/>
   </p:notesMasterIdLst>
   <p:sldIdLst>
-    <p:sldId id="256" r:id="rId6"/>
-    <p:sldId id="257" r:id="rId7"/>
-    <p:sldId id="258" r:id="rId8"/>
-    <p:sldId id="259" r:id="rId9"/>
-    <p:sldId id="260" r:id="rId10"/>
-    <p:sldId id="261" r:id="rId11"/>
-    <p:sldId id="262" r:id="rId12"/>
-    <p:sldId id="263" r:id="rId13"/>
-    <p:sldId id="264" r:id="rId14"/>
-    <p:sldId id="265" r:id="rId15"/>
-    <p:sldId id="266" r:id="rId16"/>
-    <p:sldId id="267" r:id="rId17"/>
+    <p:sldId id="256" r:id="rId7"/>
+    <p:sldId id="257" r:id="rId8"/>
+    <p:sldId id="258" r:id="rId9"/>
+    <p:sldId id="259" r:id="rId10"/>
+    <p:sldId id="260" r:id="rId11"/>
+    <p:sldId id="261" r:id="rId12"/>
+    <p:sldId id="262" r:id="rId13"/>
+    <p:sldId id="263" r:id="rId14"/>
+    <p:sldId id="264" r:id="rId15"/>
+    <p:sldId id="265" r:id="rId16"/>
+    <p:sldId id="266" r:id="rId17"/>
+    <p:sldId id="267" r:id="rId18"/>
   </p:sldIdLst>
   <p:sldSz cy="6858000" cx="12192000"/>
   <p:notesSz cx="6858000" cy="9144000"/>
   <p:embeddedFontLst>
     <p:embeddedFont>
       <p:font typeface="Urbanist SemiBold"/>
-      <p:regular r:id="rId18"/>
-      <p:bold r:id="rId19"/>
-      <p:italic r:id="rId20"/>
-      <p:boldItalic r:id="rId21"/>
+      <p:regular r:id="rId19"/>
+      <p:bold r:id="rId20"/>
+      <p:italic r:id="rId21"/>
+      <p:boldItalic r:id="rId22"/>
     </p:embeddedFont>
     <p:embeddedFont>
       <p:font typeface="Urbanist"/>
-      <p:regular r:id="rId22"/>
-      <p:bold r:id="rId23"/>
-      <p:italic r:id="rId24"/>
-      <p:boldItalic r:id="rId25"/>
+      <p:regular r:id="rId23"/>
+      <p:bold r:id="rId24"/>
+      <p:italic r:id="rId25"/>
+      <p:boldItalic r:id="rId26"/>
     </p:embeddedFont>
   </p:embeddedFontLst>
   <p:defaultTextStyle>
@@ -285,6 +285,40 @@
     </p:ext>
   </p:extLst>
 </p:presentation>
+</file>
+
+<file path=ppt/commentAuthors.xml><?xml version="1.0" encoding="utf-8"?>
+<p:cmAuthorLst xmlns:a="http://schemas.openxmlformats.org/drawingml/2006/main" xmlns:r="http://schemas.openxmlformats.org/officeDocument/2006/relationships" xmlns:mc="http://schemas.openxmlformats.org/markup-compatibility/2006" xmlns:mv="urn:schemas-microsoft-com:mac:vml" xmlns:p="http://schemas.openxmlformats.org/presentationml/2006/main" xmlns:c="http://schemas.openxmlformats.org/drawingml/2006/chart" xmlns:dgm="http://schemas.openxmlformats.org/drawingml/2006/diagram" xmlns:o="urn:schemas-microsoft-com:office:office" xmlns:v="urn:schemas-microsoft-com:vml" xmlns:pvml="urn:schemas-microsoft-com:office:powerpoint" xmlns:com="http://schemas.openxmlformats.org/drawingml/2006/compatibility" xmlns:p14="http://schemas.microsoft.com/office/powerpoint/2010/main" xmlns:p15="http://schemas.microsoft.com/office/powerpoint/2012/main" xmlns:ahyp="http://schemas.microsoft.com/office/drawing/2018/hyperlinkcolor">
+  <p:cmAuthor clrIdx="0" id="0" initials="" lastIdx="2" name="Sebastian Fishman"/>
+  <p:cmAuthor clrIdx="1" id="1" initials="" lastIdx="2" name="Leo Fishman"/>
+</p:cmAuthorLst>
+</file>
+
+<file path=ppt/comments/comment1.xml><?xml version="1.0" encoding="utf-8"?>
+<p:cmLst xmlns:a="http://schemas.openxmlformats.org/drawingml/2006/main" xmlns:r="http://schemas.openxmlformats.org/officeDocument/2006/relationships" xmlns:mc="http://schemas.openxmlformats.org/markup-compatibility/2006" xmlns:mv="urn:schemas-microsoft-com:mac:vml" xmlns:p="http://schemas.openxmlformats.org/presentationml/2006/main" xmlns:c="http://schemas.openxmlformats.org/drawingml/2006/chart" xmlns:dgm="http://schemas.openxmlformats.org/drawingml/2006/diagram" xmlns:o="urn:schemas-microsoft-com:office:office" xmlns:v="urn:schemas-microsoft-com:vml" xmlns:pvml="urn:schemas-microsoft-com:office:powerpoint" xmlns:com="http://schemas.openxmlformats.org/drawingml/2006/compatibility" xmlns:p14="http://schemas.microsoft.com/office/powerpoint/2010/main" xmlns:p15="http://schemas.microsoft.com/office/powerpoint/2012/main" xmlns:ahyp="http://schemas.microsoft.com/office/drawing/2018/hyperlinkcolor">
+  <p:cm authorId="0" idx="1" dt="2026-07-06T22:24:33.815">
+    <p:pos x="654" y="2053"/>
+    <p:text>Este es el language comun? corpus?
+La cambie la coma al final por un punto.</p:text>
+  </p:cm>
+  <p:cm authorId="1" idx="1" dt="2026-07-06T22:24:33.815">
+    <p:pos x="654" y="2053"/>
+    <p:text>si, el corpus de informacion, creo que es asi, no vi la coma.</p:text>
+  </p:cm>
+</p:cmLst>
+</file>
+
+<file path=ppt/comments/comment2.xml><?xml version="1.0" encoding="utf-8"?>
+<p:cmLst xmlns:a="http://schemas.openxmlformats.org/drawingml/2006/main" xmlns:r="http://schemas.openxmlformats.org/officeDocument/2006/relationships" xmlns:mc="http://schemas.openxmlformats.org/markup-compatibility/2006" xmlns:mv="urn:schemas-microsoft-com:mac:vml" xmlns:p="http://schemas.openxmlformats.org/presentationml/2006/main" xmlns:c="http://schemas.openxmlformats.org/drawingml/2006/chart" xmlns:dgm="http://schemas.openxmlformats.org/drawingml/2006/diagram" xmlns:o="urn:schemas-microsoft-com:office:office" xmlns:v="urn:schemas-microsoft-com:vml" xmlns:pvml="urn:schemas-microsoft-com:office:powerpoint" xmlns:com="http://schemas.openxmlformats.org/drawingml/2006/compatibility" xmlns:p14="http://schemas.microsoft.com/office/powerpoint/2010/main" xmlns:p15="http://schemas.microsoft.com/office/powerpoint/2012/main" xmlns:ahyp="http://schemas.microsoft.com/office/drawing/2018/hyperlinkcolor">
+  <p:cm authorId="0" idx="2" dt="2026-07-06T22:27:09.428">
+    <p:pos x="2988" y="2550"/>
+    <p:text>Honestly framed? es una expression tecnica?</p:text>
+  </p:cm>
+  <p:cm authorId="1" idx="2" dt="2026-07-06T22:27:09.428">
+    <p:pos x="2988" y="2550"/>
+    <p:text>segun google, parece que si:Sí, la expresión "honestly framed" es perfectamente correcta, precisa y muy recomendada en ese contexto.En el ámbito del software y la inteligencia artificial, se utiliza "framed" (de framing o encuadre) para definir cómo se le presentan las expectativas al usuario para que no malinterprete los resultados.</p:text>
+  </p:cm>
+</p:cmLst>
 </file>
 
 <file path=ppt/notesMasters/notesMaster1.xml><?xml version="1.0" encoding="utf-8"?>
@@ -11521,7 +11555,7 @@
           <p:nvPr/>
         </p:nvPicPr>
         <p:blipFill rotWithShape="1">
-          <a:blip r:embed="rId3">
+          <a:blip r:embed="rId4">
             <a:alphaModFix/>
           </a:blip>
           <a:srcRect b="0" l="0" r="0" t="0"/>
@@ -11548,7 +11582,7 @@
           <p:nvPr/>
         </p:nvPicPr>
         <p:blipFill rotWithShape="1">
-          <a:blip r:embed="rId4">
+          <a:blip r:embed="rId5">
             <a:alphaModFix/>
           </a:blip>
           <a:srcRect b="0" l="0" r="0" t="0"/>
@@ -11653,7 +11687,7 @@
         <p:spPr>
           <a:xfrm>
             <a:off x="1038225" y="3260377"/>
-            <a:ext cx="10572750" cy="853380"/>
+            <a:ext cx="10572900" cy="840300"/>
           </a:xfrm>
           <a:prstGeom prst="rect">
             <a:avLst/>
@@ -11691,7 +11725,31 @@
                 <a:cs typeface="Urbanist"/>
                 <a:sym typeface="Urbanist"/>
               </a:rPr>
-              <a:t>Claim-level verification on your own corpus,</a:t>
+              <a:t>Claim-level verification on your own </a:t>
+            </a:r>
+            <a:r>
+              <a:rPr b="0" i="0" lang="en-US" sz="2100" u="none" cap="none" strike="noStrike">
+                <a:solidFill>
+                  <a:srgbClr val="A3A3A3"/>
+                </a:solidFill>
+                <a:latin typeface="Urbanist"/>
+                <a:ea typeface="Urbanist"/>
+                <a:cs typeface="Urbanist"/>
+                <a:sym typeface="Urbanist"/>
+              </a:rPr>
+              <a:t>corpus</a:t>
+            </a:r>
+            <a:r>
+              <a:rPr lang="en-US" sz="2100">
+                <a:solidFill>
+                  <a:srgbClr val="A3A3A3"/>
+                </a:solidFill>
+                <a:latin typeface="Urbanist"/>
+                <a:ea typeface="Urbanist"/>
+                <a:cs typeface="Urbanist"/>
+                <a:sym typeface="Urbanist"/>
+              </a:rPr>
+              <a:t>.</a:t>
             </a:r>
             <a:br>
               <a:rPr b="0" i="0" lang="en-US" sz="1800" u="none" cap="none" strike="noStrike">
@@ -15517,33 +15575,6 @@
           <p:nvPr/>
         </p:nvPicPr>
         <p:blipFill rotWithShape="1">
-          <a:blip r:embed="rId3">
-            <a:alphaModFix/>
-          </a:blip>
-          <a:srcRect b="0" l="0" r="0" t="0"/>
-          <a:stretch/>
-        </p:blipFill>
-        <p:spPr>
-          <a:xfrm>
-            <a:off x="0" y="0"/>
-            <a:ext cx="12192000" cy="6858000"/>
-          </a:xfrm>
-          <a:prstGeom prst="rect">
-            <a:avLst/>
-          </a:prstGeom>
-          <a:noFill/>
-          <a:ln>
-            <a:noFill/>
-          </a:ln>
-        </p:spPr>
-      </p:pic>
-      <p:pic>
-        <p:nvPicPr>
-          <p:cNvPr descr="image.png" id="124" name="Google Shape;124;p16"/>
-          <p:cNvPicPr preferRelativeResize="0"/>
-          <p:nvPr/>
-        </p:nvPicPr>
-        <p:blipFill rotWithShape="1">
           <a:blip r:embed="rId4">
             <a:alphaModFix/>
           </a:blip>
@@ -15552,8 +15583,8 @@
         </p:blipFill>
         <p:spPr>
           <a:xfrm>
-            <a:off x="581025" y="2190750"/>
-            <a:ext cx="3486150" cy="3619351"/>
+            <a:off x="0" y="0"/>
+            <a:ext cx="12192000" cy="6858000"/>
           </a:xfrm>
           <a:prstGeom prst="rect">
             <a:avLst/>
@@ -15566,7 +15597,7 @@
       </p:pic>
       <p:pic>
         <p:nvPicPr>
-          <p:cNvPr descr="image.png" id="125" name="Google Shape;125;p16"/>
+          <p:cNvPr descr="image.png" id="124" name="Google Shape;124;p16"/>
           <p:cNvPicPr preferRelativeResize="0"/>
           <p:nvPr/>
         </p:nvPicPr>
@@ -15579,7 +15610,7 @@
         </p:blipFill>
         <p:spPr>
           <a:xfrm>
-            <a:off x="4352925" y="2190750"/>
+            <a:off x="581025" y="2190750"/>
             <a:ext cx="3486150" cy="3619351"/>
           </a:xfrm>
           <a:prstGeom prst="rect">
@@ -15593,7 +15624,7 @@
       </p:pic>
       <p:pic>
         <p:nvPicPr>
-          <p:cNvPr descr="image.png" id="126" name="Google Shape;126;p16"/>
+          <p:cNvPr descr="image.png" id="125" name="Google Shape;125;p16"/>
           <p:cNvPicPr preferRelativeResize="0"/>
           <p:nvPr/>
         </p:nvPicPr>
@@ -15606,6 +15637,33 @@
         </p:blipFill>
         <p:spPr>
           <a:xfrm>
+            <a:off x="4352925" y="2190750"/>
+            <a:ext cx="3486150" cy="3619351"/>
+          </a:xfrm>
+          <a:prstGeom prst="rect">
+            <a:avLst/>
+          </a:prstGeom>
+          <a:noFill/>
+          <a:ln>
+            <a:noFill/>
+          </a:ln>
+        </p:spPr>
+      </p:pic>
+      <p:pic>
+        <p:nvPicPr>
+          <p:cNvPr descr="image.png" id="126" name="Google Shape;126;p16"/>
+          <p:cNvPicPr preferRelativeResize="0"/>
+          <p:nvPr/>
+        </p:nvPicPr>
+        <p:blipFill rotWithShape="1">
+          <a:blip r:embed="rId7">
+            <a:alphaModFix/>
+          </a:blip>
+          <a:srcRect b="0" l="0" r="0" t="0"/>
+          <a:stretch/>
+        </p:blipFill>
+        <p:spPr>
+          <a:xfrm>
             <a:off x="8124825" y="2190750"/>
             <a:ext cx="3486150" cy="3619351"/>
           </a:xfrm>
@@ -15625,7 +15683,7 @@
           <p:nvPr/>
         </p:nvPicPr>
         <p:blipFill rotWithShape="1">
-          <a:blip r:embed="rId7">
+          <a:blip r:embed="rId8">
             <a:alphaModFix/>
           </a:blip>
           <a:srcRect b="0" l="0" r="0" t="0"/>
@@ -15755,7 +15813,7 @@
           <p:nvPr/>
         </p:nvPicPr>
         <p:blipFill rotWithShape="1">
-          <a:blip r:embed="rId8">
+          <a:blip r:embed="rId9">
             <a:alphaModFix/>
           </a:blip>
           <a:srcRect b="0" l="0" r="0" t="0"/>
@@ -15872,7 +15930,31 @@
                 <a:cs typeface="Urbanist"/>
                 <a:sym typeface="Urbanist"/>
               </a:rPr>
-              <a:t>0–100 score with rationale. Honestly framed: presented as a contextual hint, not a definitive mathematical proof.</a:t>
+              <a:t>0–100 score with rationale. </a:t>
+            </a:r>
+            <a:r>
+              <a:rPr b="0" i="0" lang="en-US" sz="1350" u="none" cap="none" strike="noStrike">
+                <a:solidFill>
+                  <a:srgbClr val="A3A3A3"/>
+                </a:solidFill>
+                <a:latin typeface="Urbanist"/>
+                <a:ea typeface="Urbanist"/>
+                <a:cs typeface="Urbanist"/>
+                <a:sym typeface="Urbanist"/>
+              </a:rPr>
+              <a:t>Honestly </a:t>
+            </a:r>
+            <a:r>
+              <a:rPr b="0" i="0" lang="en-US" sz="1350" u="none" cap="none" strike="noStrike">
+                <a:solidFill>
+                  <a:srgbClr val="A3A3A3"/>
+                </a:solidFill>
+                <a:latin typeface="Urbanist"/>
+                <a:ea typeface="Urbanist"/>
+                <a:cs typeface="Urbanist"/>
+                <a:sym typeface="Urbanist"/>
+              </a:rPr>
+              <a:t>framed: presented as a contextual hint, not a definitive mathematical proof.</a:t>
             </a:r>
             <a:endParaRPr/>
           </a:p>
@@ -15885,7 +15967,7 @@
           <p:nvPr/>
         </p:nvPicPr>
         <p:blipFill rotWithShape="1">
-          <a:blip r:embed="rId9">
+          <a:blip r:embed="rId10">
             <a:alphaModFix/>
           </a:blip>
           <a:srcRect b="0" l="0" r="0" t="0"/>
@@ -16015,7 +16097,7 @@
           <p:nvPr/>
         </p:nvPicPr>
         <p:blipFill rotWithShape="1">
-          <a:blip r:embed="rId10">
+          <a:blip r:embed="rId11">
             <a:alphaModFix/>
           </a:blip>
           <a:srcRect b="0" l="0" r="0" t="0"/>
@@ -16042,7 +16124,7 @@
           <p:nvPr/>
         </p:nvPicPr>
         <p:blipFill rotWithShape="1">
-          <a:blip r:embed="rId11">
+          <a:blip r:embed="rId12">
             <a:alphaModFix/>
           </a:blip>
           <a:srcRect b="0" l="0" r="0" t="0"/>
@@ -17795,8 +17877,8 @@
         </p:nvSpPr>
         <p:spPr>
           <a:xfrm>
-            <a:off x="962025" y="3670994"/>
-            <a:ext cx="4648200" cy="335160"/>
+            <a:off x="962025" y="3671001"/>
+            <a:ext cx="5109600" cy="254100"/>
           </a:xfrm>
           <a:prstGeom prst="rect">
             <a:avLst/>
@@ -18985,6 +19067,285 @@
 </file>
 
 <file path=ppt/theme/theme1.xml><?xml version="1.0" encoding="utf-8"?>
+<a:theme xmlns:a="http://schemas.openxmlformats.org/drawingml/2006/main" xmlns:r="http://schemas.openxmlformats.org/officeDocument/2006/relationships" name="Office Theme">
+  <a:themeElements>
+    <a:clrScheme name="Office">
+      <a:dk1>
+        <a:srgbClr val="000000"/>
+      </a:dk1>
+      <a:lt1>
+        <a:srgbClr val="FFFFFF"/>
+      </a:lt1>
+      <a:dk2>
+        <a:srgbClr val="1F497D"/>
+      </a:dk2>
+      <a:lt2>
+        <a:srgbClr val="EEECE1"/>
+      </a:lt2>
+      <a:accent1>
+        <a:srgbClr val="4F81BD"/>
+      </a:accent1>
+      <a:accent2>
+        <a:srgbClr val="C0504D"/>
+      </a:accent2>
+      <a:accent3>
+        <a:srgbClr val="9BBB59"/>
+      </a:accent3>
+      <a:accent4>
+        <a:srgbClr val="8064A2"/>
+      </a:accent4>
+      <a:accent5>
+        <a:srgbClr val="4BACC6"/>
+      </a:accent5>
+      <a:accent6>
+        <a:srgbClr val="F79646"/>
+      </a:accent6>
+      <a:hlink>
+        <a:srgbClr val="0000FF"/>
+      </a:hlink>
+      <a:folHlink>
+        <a:srgbClr val="800080"/>
+      </a:folHlink>
+    </a:clrScheme>
+    <a:fontScheme name="Office">
+      <a:majorFont>
+        <a:latin typeface="Arial"/>
+        <a:ea typeface=""/>
+        <a:cs typeface=""/>
+        <a:font script="Jpan" typeface="ＭＳ Ｐゴシック"/>
+        <a:font script="Hang" typeface="맑은 고딕"/>
+        <a:font script="Hans" typeface="宋体"/>
+        <a:font script="Hant" typeface="新細明體"/>
+        <a:font script="Arab" typeface="Times New Roman"/>
+        <a:font script="Hebr" typeface="Times New Roman"/>
+        <a:font script="Thai" typeface="Angsana New"/>
+        <a:font script="Ethi" typeface="Nyala"/>
+        <a:font script="Beng" typeface="Vrinda"/>
+        <a:font script="Gujr" typeface="Shruti"/>
+        <a:font script="Khmr" typeface="MoolBoran"/>
+        <a:font script="Knda" typeface="Tunga"/>
+        <a:font script="Guru" typeface="Raavi"/>
+        <a:font script="Cans" typeface="Euphemia"/>
+        <a:font script="Cher" typeface="Plantagenet Cherokee"/>
+        <a:font script="Yiii" typeface="Microsoft Yi Baiti"/>
+        <a:font script="Tibt" typeface="Microsoft Himalaya"/>
+        <a:font script="Thaa" typeface="MV Boli"/>
+        <a:font script="Deva" typeface="Mangal"/>
+        <a:font script="Telu" typeface="Gautami"/>
+        <a:font script="Taml" typeface="Latha"/>
+        <a:font script="Syrc" typeface="Estrangelo Edessa"/>
+        <a:font script="Orya" typeface="Kalinga"/>
+        <a:font script="Mlym" typeface="Kartika"/>
+        <a:font script="Laoo" typeface="DokChampa"/>
+        <a:font script="Sinh" typeface="Iskoola Pota"/>
+        <a:font script="Mong" typeface="Mongolian Baiti"/>
+        <a:font script="Viet" typeface="Times New Roman"/>
+        <a:font script="Uigh" typeface="Microsoft Uighur"/>
+        <a:font script="Geor" typeface="Sylfaen"/>
+      </a:majorFont>
+      <a:minorFont>
+        <a:latin typeface="Arial"/>
+        <a:ea typeface=""/>
+        <a:cs typeface=""/>
+        <a:font script="Jpan" typeface="ＭＳ Ｐゴシック"/>
+        <a:font script="Hang" typeface="맑은 고딕"/>
+        <a:font script="Hans" typeface="宋体"/>
+        <a:font script="Hant" typeface="新細明體"/>
+        <a:font script="Arab" typeface="Arial"/>
+        <a:font script="Hebr" typeface="Arial"/>
+        <a:font script="Thai" typeface="Cordia New"/>
+        <a:font script="Ethi" typeface="Nyala"/>
+        <a:font script="Beng" typeface="Vrinda"/>
+        <a:font script="Gujr" typeface="Shruti"/>
+        <a:font script="Khmr" typeface="DaunPenh"/>
+        <a:font script="Knda" typeface="Tunga"/>
+        <a:font script="Guru" typeface="Raavi"/>
+        <a:font script="Cans" typeface="Euphemia"/>
+        <a:font script="Cher" typeface="Plantagenet Cherokee"/>
+        <a:font script="Yiii" typeface="Microsoft Yi Baiti"/>
+        <a:font script="Tibt" typeface="Microsoft Himalaya"/>
+        <a:font script="Thaa" typeface="MV Boli"/>
+        <a:font script="Deva" typeface="Mangal"/>
+        <a:font script="Telu" typeface="Gautami"/>
+        <a:font script="Taml" typeface="Latha"/>
+        <a:font script="Syrc" typeface="Estrangelo Edessa"/>
+        <a:font script="Orya" typeface="Kalinga"/>
+        <a:font script="Mlym" typeface="Kartika"/>
+        <a:font script="Laoo" typeface="DokChampa"/>
+        <a:font script="Sinh" typeface="Iskoola Pota"/>
+        <a:font script="Mong" typeface="Mongolian Baiti"/>
+        <a:font script="Viet" typeface="Arial"/>
+        <a:font script="Uigh" typeface="Microsoft Uighur"/>
+        <a:font script="Geor" typeface="Sylfaen"/>
+      </a:minorFont>
+    </a:fontScheme>
+    <a:fmtScheme name="Office">
+      <a:fillStyleLst>
+        <a:solidFill>
+          <a:schemeClr val="phClr"/>
+        </a:solidFill>
+        <a:gradFill rotWithShape="1">
+          <a:gsLst>
+            <a:gs pos="0">
+              <a:schemeClr val="phClr">
+                <a:tint val="50000"/>
+                <a:satMod val="300000"/>
+              </a:schemeClr>
+            </a:gs>
+            <a:gs pos="35000">
+              <a:schemeClr val="phClr">
+                <a:tint val="37000"/>
+                <a:satMod val="300000"/>
+              </a:schemeClr>
+            </a:gs>
+            <a:gs pos="100000">
+              <a:schemeClr val="phClr">
+                <a:tint val="15000"/>
+                <a:satMod val="350000"/>
+              </a:schemeClr>
+            </a:gs>
+          </a:gsLst>
+          <a:lin ang="16200000" scaled="1"/>
+        </a:gradFill>
+        <a:gradFill rotWithShape="1">
+          <a:gsLst>
+            <a:gs pos="0">
+              <a:schemeClr val="phClr">
+                <a:tint val="100000"/>
+                <a:shade val="100000"/>
+                <a:satMod val="130000"/>
+              </a:schemeClr>
+            </a:gs>
+            <a:gs pos="100000">
+              <a:schemeClr val="phClr">
+                <a:tint val="50000"/>
+                <a:shade val="100000"/>
+                <a:satMod val="350000"/>
+              </a:schemeClr>
+            </a:gs>
+          </a:gsLst>
+          <a:lin ang="16200000" scaled="0"/>
+        </a:gradFill>
+      </a:fillStyleLst>
+      <a:lnStyleLst>
+        <a:ln w="9525" cap="flat" cmpd="sng" algn="ctr">
+          <a:solidFill>
+            <a:schemeClr val="phClr">
+              <a:shade val="95000"/>
+              <a:satMod val="105000"/>
+            </a:schemeClr>
+          </a:solidFill>
+          <a:prstDash val="solid"/>
+        </a:ln>
+        <a:ln w="25400" cap="flat" cmpd="sng" algn="ctr">
+          <a:solidFill>
+            <a:schemeClr val="phClr"/>
+          </a:solidFill>
+          <a:prstDash val="solid"/>
+        </a:ln>
+        <a:ln w="38100" cap="flat" cmpd="sng" algn="ctr">
+          <a:solidFill>
+            <a:schemeClr val="phClr"/>
+          </a:solidFill>
+          <a:prstDash val="solid"/>
+        </a:ln>
+      </a:lnStyleLst>
+      <a:effectStyleLst>
+        <a:effectStyle>
+          <a:effectLst>
+            <a:outerShdw blurRad="40000" dist="20000" dir="5400000" rotWithShape="0">
+              <a:srgbClr val="000000">
+                <a:alpha val="38000"/>
+              </a:srgbClr>
+            </a:outerShdw>
+          </a:effectLst>
+        </a:effectStyle>
+        <a:effectStyle>
+          <a:effectLst>
+            <a:outerShdw blurRad="40000" dist="23000" dir="5400000" rotWithShape="0">
+              <a:srgbClr val="000000">
+                <a:alpha val="35000"/>
+              </a:srgbClr>
+            </a:outerShdw>
+          </a:effectLst>
+        </a:effectStyle>
+        <a:effectStyle>
+          <a:effectLst>
+            <a:outerShdw blurRad="40000" dist="23000" dir="5400000" rotWithShape="0">
+              <a:srgbClr val="000000">
+                <a:alpha val="35000"/>
+              </a:srgbClr>
+            </a:outerShdw>
+          </a:effectLst>
+          <a:scene3d>
+            <a:camera prst="orthographicFront">
+              <a:rot lat="0" lon="0" rev="0"/>
+            </a:camera>
+            <a:lightRig rig="threePt" dir="t">
+              <a:rot lat="0" lon="0" rev="1200000"/>
+            </a:lightRig>
+          </a:scene3d>
+          <a:sp3d>
+            <a:bevelT w="63500" h="25400"/>
+          </a:sp3d>
+        </a:effectStyle>
+      </a:effectStyleLst>
+      <a:bgFillStyleLst>
+        <a:solidFill>
+          <a:schemeClr val="phClr"/>
+        </a:solidFill>
+        <a:gradFill rotWithShape="1">
+          <a:gsLst>
+            <a:gs pos="0">
+              <a:schemeClr val="phClr">
+                <a:tint val="40000"/>
+                <a:satMod val="350000"/>
+              </a:schemeClr>
+            </a:gs>
+            <a:gs pos="40000">
+              <a:schemeClr val="phClr">
+                <a:tint val="45000"/>
+                <a:shade val="99000"/>
+                <a:satMod val="350000"/>
+              </a:schemeClr>
+            </a:gs>
+            <a:gs pos="100000">
+              <a:schemeClr val="phClr">
+                <a:shade val="20000"/>
+                <a:satMod val="255000"/>
+              </a:schemeClr>
+            </a:gs>
+          </a:gsLst>
+          <a:path path="circle">
+            <a:fillToRect l="50000" t="-80000" r="50000" b="180000"/>
+          </a:path>
+        </a:gradFill>
+        <a:gradFill rotWithShape="1">
+          <a:gsLst>
+            <a:gs pos="0">
+              <a:schemeClr val="phClr">
+                <a:tint val="80000"/>
+                <a:satMod val="300000"/>
+              </a:schemeClr>
+            </a:gs>
+            <a:gs pos="100000">
+              <a:schemeClr val="phClr">
+                <a:shade val="30000"/>
+                <a:satMod val="200000"/>
+              </a:schemeClr>
+            </a:gs>
+          </a:gsLst>
+          <a:path path="circle">
+            <a:fillToRect l="50000" t="50000" r="50000" b="50000"/>
+          </a:path>
+        </a:gradFill>
+      </a:bgFillStyleLst>
+    </a:fmtScheme>
+  </a:themeElements>
+</a:theme>
+</file>
+
+<file path=ppt/theme/theme2.xml><?xml version="1.0" encoding="utf-8"?>
 <a:theme xmlns:a="http://schemas.openxmlformats.org/drawingml/2006/main" xmlns:r="http://schemas.openxmlformats.org/officeDocument/2006/relationships">
   <a:themeElements>
     <a:clrScheme name="Default">
@@ -19261,283 +19622,4 @@
     </a:fmtScheme>
   </a:themeElements>
 </a:theme>
-</file>
-
-<file path=ppt/theme/theme2.xml><?xml version="1.0" encoding="utf-8"?>
-<a:theme xmlns:a="http://schemas.openxmlformats.org/drawingml/2006/main" xmlns:r="http://schemas.openxmlformats.org/officeDocument/2006/relationships" name="Office Theme">
-  <a:themeElements>
-    <a:clrScheme name="Office">
-      <a:dk1>
-        <a:srgbClr val="000000"/>
-      </a:dk1>
-      <a:lt1>
-        <a:srgbClr val="FFFFFF"/>
-      </a:lt1>
-      <a:dk2>
-        <a:srgbClr val="1F497D"/>
-      </a:dk2>
-      <a:lt2>
-        <a:srgbClr val="EEECE1"/>
-      </a:lt2>
-      <a:accent1>
-        <a:srgbClr val="4F81BD"/>
-      </a:accent1>
-      <a:accent2>
-        <a:srgbClr val="C0504D"/>
-      </a:accent2>
-      <a:accent3>
-        <a:srgbClr val="9BBB59"/>
-      </a:accent3>
-      <a:accent4>
-        <a:srgbClr val="8064A2"/>
-      </a:accent4>
-      <a:accent5>
-        <a:srgbClr val="4BACC6"/>
-      </a:accent5>
-      <a:accent6>
-        <a:srgbClr val="F79646"/>
-      </a:accent6>
-      <a:hlink>
-        <a:srgbClr val="0000FF"/>
-      </a:hlink>
-      <a:folHlink>
-        <a:srgbClr val="800080"/>
-      </a:folHlink>
-    </a:clrScheme>
-    <a:fontScheme name="Office">
-      <a:majorFont>
-        <a:latin typeface="Arial"/>
-        <a:ea typeface=""/>
-        <a:cs typeface=""/>
-        <a:font script="Jpan" typeface="ＭＳ Ｐゴシック"/>
-        <a:font script="Hang" typeface="맑은 고딕"/>
-        <a:font script="Hans" typeface="宋体"/>
-        <a:font script="Hant" typeface="新細明體"/>
-        <a:font script="Arab" typeface="Times New Roman"/>
-        <a:font script="Hebr" typeface="Times New Roman"/>
-        <a:font script="Thai" typeface="Angsana New"/>
-        <a:font script="Ethi" typeface="Nyala"/>
-        <a:font script="Beng" typeface="Vrinda"/>
-        <a:font script="Gujr" typeface="Shruti"/>
-        <a:font script="Khmr" typeface="MoolBoran"/>
-        <a:font script="Knda" typeface="Tunga"/>
-        <a:font script="Guru" typeface="Raavi"/>
-        <a:font script="Cans" typeface="Euphemia"/>
-        <a:font script="Cher" typeface="Plantagenet Cherokee"/>
-        <a:font script="Yiii" typeface="Microsoft Yi Baiti"/>
-        <a:font script="Tibt" typeface="Microsoft Himalaya"/>
-        <a:font script="Thaa" typeface="MV Boli"/>
-        <a:font script="Deva" typeface="Mangal"/>
-        <a:font script="Telu" typeface="Gautami"/>
-        <a:font script="Taml" typeface="Latha"/>
-        <a:font script="Syrc" typeface="Estrangelo Edessa"/>
-        <a:font script="Orya" typeface="Kalinga"/>
-        <a:font script="Mlym" typeface="Kartika"/>
-        <a:font script="Laoo" typeface="DokChampa"/>
-        <a:font script="Sinh" typeface="Iskoola Pota"/>
-        <a:font script="Mong" typeface="Mongolian Baiti"/>
-        <a:font script="Viet" typeface="Times New Roman"/>
-        <a:font script="Uigh" typeface="Microsoft Uighur"/>
-        <a:font script="Geor" typeface="Sylfaen"/>
-      </a:majorFont>
-      <a:minorFont>
-        <a:latin typeface="Arial"/>
-        <a:ea typeface=""/>
-        <a:cs typeface=""/>
-        <a:font script="Jpan" typeface="ＭＳ Ｐゴシック"/>
-        <a:font script="Hang" typeface="맑은 고딕"/>
-        <a:font script="Hans" typeface="宋体"/>
-        <a:font script="Hant" typeface="新細明體"/>
-        <a:font script="Arab" typeface="Arial"/>
-        <a:font script="Hebr" typeface="Arial"/>
-        <a:font script="Thai" typeface="Cordia New"/>
-        <a:font script="Ethi" typeface="Nyala"/>
-        <a:font script="Beng" typeface="Vrinda"/>
-        <a:font script="Gujr" typeface="Shruti"/>
-        <a:font script="Khmr" typeface="DaunPenh"/>
-        <a:font script="Knda" typeface="Tunga"/>
-        <a:font script="Guru" typeface="Raavi"/>
-        <a:font script="Cans" typeface="Euphemia"/>
-        <a:font script="Cher" typeface="Plantagenet Cherokee"/>
-        <a:font script="Yiii" typeface="Microsoft Yi Baiti"/>
-        <a:font script="Tibt" typeface="Microsoft Himalaya"/>
-        <a:font script="Thaa" typeface="MV Boli"/>
-        <a:font script="Deva" typeface="Mangal"/>
-        <a:font script="Telu" typeface="Gautami"/>
-        <a:font script="Taml" typeface="Latha"/>
-        <a:font script="Syrc" typeface="Estrangelo Edessa"/>
-        <a:font script="Orya" typeface="Kalinga"/>
-        <a:font script="Mlym" typeface="Kartika"/>
-        <a:font script="Laoo" typeface="DokChampa"/>
-        <a:font script="Sinh" typeface="Iskoola Pota"/>
-        <a:font script="Mong" typeface="Mongolian Baiti"/>
-        <a:font script="Viet" typeface="Arial"/>
-        <a:font script="Uigh" typeface="Microsoft Uighur"/>
-        <a:font script="Geor" typeface="Sylfaen"/>
-      </a:minorFont>
-    </a:fontScheme>
-    <a:fmtScheme name="Office">
-      <a:fillStyleLst>
-        <a:solidFill>
-          <a:schemeClr val="phClr"/>
-        </a:solidFill>
-        <a:gradFill rotWithShape="1">
-          <a:gsLst>
-            <a:gs pos="0">
-              <a:schemeClr val="phClr">
-                <a:tint val="50000"/>
-                <a:satMod val="300000"/>
-              </a:schemeClr>
-            </a:gs>
-            <a:gs pos="35000">
-              <a:schemeClr val="phClr">
-                <a:tint val="37000"/>
-                <a:satMod val="300000"/>
-              </a:schemeClr>
-            </a:gs>
-            <a:gs pos="100000">
-              <a:schemeClr val="phClr">
-                <a:tint val="15000"/>
-                <a:satMod val="350000"/>
-              </a:schemeClr>
-            </a:gs>
-          </a:gsLst>
-          <a:lin ang="16200000" scaled="1"/>
-        </a:gradFill>
-        <a:gradFill rotWithShape="1">
-          <a:gsLst>
-            <a:gs pos="0">
-              <a:schemeClr val="phClr">
-                <a:tint val="100000"/>
-                <a:shade val="100000"/>
-                <a:satMod val="130000"/>
-              </a:schemeClr>
-            </a:gs>
-            <a:gs pos="100000">
-              <a:schemeClr val="phClr">
-                <a:tint val="50000"/>
-                <a:shade val="100000"/>
-                <a:satMod val="350000"/>
-              </a:schemeClr>
-            </a:gs>
-          </a:gsLst>
-          <a:lin ang="16200000" scaled="0"/>
-        </a:gradFill>
-      </a:fillStyleLst>
-      <a:lnStyleLst>
-        <a:ln w="9525" cap="flat" cmpd="sng" algn="ctr">
-          <a:solidFill>
-            <a:schemeClr val="phClr">
-              <a:shade val="95000"/>
-              <a:satMod val="105000"/>
-            </a:schemeClr>
-          </a:solidFill>
-          <a:prstDash val="solid"/>
-        </a:ln>
-        <a:ln w="25400" cap="flat" cmpd="sng" algn="ctr">
-          <a:solidFill>
-            <a:schemeClr val="phClr"/>
-          </a:solidFill>
-          <a:prstDash val="solid"/>
-        </a:ln>
-        <a:ln w="38100" cap="flat" cmpd="sng" algn="ctr">
-          <a:solidFill>
-            <a:schemeClr val="phClr"/>
-          </a:solidFill>
-          <a:prstDash val="solid"/>
-        </a:ln>
-      </a:lnStyleLst>
-      <a:effectStyleLst>
-        <a:effectStyle>
-          <a:effectLst>
-            <a:outerShdw blurRad="40000" dist="20000" dir="5400000" rotWithShape="0">
-              <a:srgbClr val="000000">
-                <a:alpha val="38000"/>
-              </a:srgbClr>
-            </a:outerShdw>
-          </a:effectLst>
-        </a:effectStyle>
-        <a:effectStyle>
-          <a:effectLst>
-            <a:outerShdw blurRad="40000" dist="23000" dir="5400000" rotWithShape="0">
-              <a:srgbClr val="000000">
-                <a:alpha val="35000"/>
-              </a:srgbClr>
-            </a:outerShdw>
-          </a:effectLst>
-        </a:effectStyle>
-        <a:effectStyle>
-          <a:effectLst>
-            <a:outerShdw blurRad="40000" dist="23000" dir="5400000" rotWithShape="0">
-              <a:srgbClr val="000000">
-                <a:alpha val="35000"/>
-              </a:srgbClr>
-            </a:outerShdw>
-          </a:effectLst>
-          <a:scene3d>
-            <a:camera prst="orthographicFront">
-              <a:rot lat="0" lon="0" rev="0"/>
-            </a:camera>
-            <a:lightRig rig="threePt" dir="t">
-              <a:rot lat="0" lon="0" rev="1200000"/>
-            </a:lightRig>
-          </a:scene3d>
-          <a:sp3d>
-            <a:bevelT w="63500" h="25400"/>
-          </a:sp3d>
-        </a:effectStyle>
-      </a:effectStyleLst>
-      <a:bgFillStyleLst>
-        <a:solidFill>
-          <a:schemeClr val="phClr"/>
-        </a:solidFill>
-        <a:gradFill rotWithShape="1">
-          <a:gsLst>
-            <a:gs pos="0">
-              <a:schemeClr val="phClr">
-                <a:tint val="40000"/>
-                <a:satMod val="350000"/>
-              </a:schemeClr>
-            </a:gs>
-            <a:gs pos="40000">
-              <a:schemeClr val="phClr">
-                <a:tint val="45000"/>
-                <a:shade val="99000"/>
-                <a:satMod val="350000"/>
-              </a:schemeClr>
-            </a:gs>
-            <a:gs pos="100000">
-              <a:schemeClr val="phClr">
-                <a:shade val="20000"/>
-                <a:satMod val="255000"/>
-              </a:schemeClr>
-            </a:gs>
-          </a:gsLst>
-          <a:path path="circle">
-            <a:fillToRect l="50000" t="-80000" r="50000" b="180000"/>
-          </a:path>
-        </a:gradFill>
-        <a:gradFill rotWithShape="1">
-          <a:gsLst>
-            <a:gs pos="0">
-              <a:schemeClr val="phClr">
-                <a:tint val="80000"/>
-                <a:satMod val="300000"/>
-              </a:schemeClr>
-            </a:gs>
-            <a:gs pos="100000">
-              <a:schemeClr val="phClr">
-                <a:shade val="30000"/>
-                <a:satMod val="200000"/>
-              </a:schemeClr>
-            </a:gs>
-          </a:gsLst>
-          <a:path path="circle">
-            <a:fillToRect l="50000" t="50000" r="50000" b="50000"/>
-          </a:path>
-        </a:gradFill>
-      </a:bgFillStyleLst>
-    </a:fmtScheme>
-  </a:themeElements>
-</a:theme>
 </file>
--- a/Drupal AI Factchecker.pptx
+++ b/Drupal AI Factchecker.pptx
@@ -18,24 +18,27 @@
     <p:sldId id="263" r:id="rId14"/>
     <p:sldId id="264" r:id="rId15"/>
     <p:sldId id="265" r:id="rId16"/>
-    <p:sldId id="266" r:id="rId17"/>
-    <p:sldId id="267" r:id="rId18"/>
   </p:sldIdLst>
   <p:sldSz cy="6858000" cx="12192000"/>
   <p:notesSz cx="6858000" cy="9144000"/>
   <p:embeddedFontLst>
     <p:embeddedFont>
       <p:font typeface="Urbanist SemiBold"/>
-      <p:regular r:id="rId19"/>
-      <p:bold r:id="rId20"/>
-      <p:italic r:id="rId21"/>
-      <p:boldItalic r:id="rId22"/>
+      <p:regular r:id="rId17"/>
+      <p:bold r:id="rId18"/>
+      <p:italic r:id="rId19"/>
+      <p:boldItalic r:id="rId20"/>
     </p:embeddedFont>
     <p:embeddedFont>
       <p:font typeface="Urbanist"/>
-      <p:regular r:id="rId23"/>
-      <p:bold r:id="rId24"/>
-      <p:italic r:id="rId25"/>
+      <p:regular r:id="rId21"/>
+      <p:bold r:id="rId22"/>
+      <p:italic r:id="rId23"/>
+      <p:boldItalic r:id="rId24"/>
+    </p:embeddedFont>
+    <p:embeddedFont>
+      <p:font typeface="Urbanist ExtraBold"/>
+      <p:bold r:id="rId25"/>
       <p:boldItalic r:id="rId26"/>
     </p:embeddedFont>
   </p:embeddedFontLst>
@@ -797,6 +800,37 @@
               <a:buNone/>
             </a:pPr>
             <a:r>
+              <a:rPr lang="en-US"/>
+              <a:t>Muy bueno !!!!!! Excelente!!!!</a:t>
+            </a:r>
+            <a:endParaRPr/>
+          </a:p>
+          <a:p>
+            <a:pPr indent="0" lvl="0" marL="0" rtl="0" algn="l">
+              <a:spcBef>
+                <a:spcPts val="0"/>
+              </a:spcBef>
+              <a:spcAft>
+                <a:spcPts val="0"/>
+              </a:spcAft>
+              <a:buNone/>
+            </a:pPr>
+            <a:r>
+              <a:t/>
+            </a:r>
+            <a:endParaRPr/>
+          </a:p>
+          <a:p>
+            <a:pPr indent="0" lvl="0" marL="0" rtl="0" algn="l">
+              <a:spcBef>
+                <a:spcPts val="0"/>
+              </a:spcBef>
+              <a:spcAft>
+                <a:spcPts val="0"/>
+              </a:spcAft>
+              <a:buNone/>
+            </a:pPr>
+            <a:r>
               <a:t/>
             </a:r>
             <a:endParaRPr/>
@@ -851,7 +885,7 @@
   <p:cSld>
     <p:spTree>
       <p:nvGrpSpPr>
-        <p:cNvPr id="225" name="Shape 225"/>
+        <p:cNvPr id="229" name="Shape 229"/>
         <p:cNvGrpSpPr/>
         <p:nvPr/>
       </p:nvGrpSpPr>
@@ -865,7 +899,7 @@
       </p:grpSpPr>
       <p:sp>
         <p:nvSpPr>
-          <p:cNvPr id="226" name="Google Shape;226;p10:notes"/>
+          <p:cNvPr id="230" name="Google Shape;230;p10:notes"/>
           <p:cNvSpPr txBox="1"/>
           <p:nvPr>
             <p:ph idx="1" type="body"/>
@@ -904,7 +938,7 @@
       </p:sp>
       <p:sp>
         <p:nvSpPr>
-          <p:cNvPr id="227" name="Google Shape;227;p10:notes"/>
+          <p:cNvPr id="231" name="Google Shape;231;p10:notes"/>
           <p:cNvSpPr/>
           <p:nvPr>
             <p:ph idx="2" type="sldImg"/>
@@ -913,205 +947,7 @@
         <p:spPr>
           <a:xfrm>
             <a:off x="1143225" y="685800"/>
-            <a:ext cx="4572225" cy="3429000"/>
-          </a:xfrm>
-          <a:custGeom>
-            <a:rect b="b" l="l" r="r" t="t"/>
-            <a:pathLst>
-              <a:path extrusionOk="0" h="120000" w="120000">
-                <a:moveTo>
-                  <a:pt x="0" y="0"/>
-                </a:moveTo>
-                <a:lnTo>
-                  <a:pt x="120000" y="0"/>
-                </a:lnTo>
-                <a:lnTo>
-                  <a:pt x="120000" y="120000"/>
-                </a:lnTo>
-                <a:lnTo>
-                  <a:pt x="0" y="120000"/>
-                </a:lnTo>
-                <a:close/>
-              </a:path>
-            </a:pathLst>
-          </a:custGeom>
-        </p:spPr>
-      </p:sp>
-    </p:spTree>
-  </p:cSld>
-  <p:clrMapOvr>
-    <a:masterClrMapping/>
-  </p:clrMapOvr>
-</p:notes>
-</file>
-
-<file path=ppt/notesSlides/notesSlide11.xml><?xml version="1.0" encoding="utf-8"?>
-<p:notes xmlns:a="http://schemas.openxmlformats.org/drawingml/2006/main" xmlns:r="http://schemas.openxmlformats.org/officeDocument/2006/relationships" xmlns:mc="http://schemas.openxmlformats.org/markup-compatibility/2006" xmlns:mv="urn:schemas-microsoft-com:mac:vml" xmlns:p="http://schemas.openxmlformats.org/presentationml/2006/main" xmlns:c="http://schemas.openxmlformats.org/drawingml/2006/chart" xmlns:dgm="http://schemas.openxmlformats.org/drawingml/2006/diagram" xmlns:o="urn:schemas-microsoft-com:office:office" xmlns:v="urn:schemas-microsoft-com:vml" xmlns:pvml="urn:schemas-microsoft-com:office:powerpoint" xmlns:com="http://schemas.openxmlformats.org/drawingml/2006/compatibility" xmlns:p14="http://schemas.microsoft.com/office/powerpoint/2010/main" xmlns:p15="http://schemas.microsoft.com/office/powerpoint/2012/main" xmlns:ahyp="http://schemas.microsoft.com/office/drawing/2018/hyperlinkcolor" showMasterPhAnim="0" showMasterSp="0">
-  <p:cSld>
-    <p:spTree>
-      <p:nvGrpSpPr>
-        <p:cNvPr id="241" name="Shape 241"/>
-        <p:cNvGrpSpPr/>
-        <p:nvPr/>
-      </p:nvGrpSpPr>
-      <p:grpSpPr>
-        <a:xfrm>
-          <a:off x="0" y="0"/>
-          <a:ext cx="0" cy="0"/>
-          <a:chOff x="0" y="0"/>
-          <a:chExt cx="0" cy="0"/>
-        </a:xfrm>
-      </p:grpSpPr>
-      <p:sp>
-        <p:nvSpPr>
-          <p:cNvPr id="242" name="Google Shape;242;p11:notes"/>
-          <p:cNvSpPr txBox="1"/>
-          <p:nvPr>
-            <p:ph idx="1" type="body"/>
-          </p:nvPr>
-        </p:nvSpPr>
-        <p:spPr>
-          <a:xfrm>
-            <a:off x="685800" y="4343400"/>
-            <a:ext cx="5486400" cy="4114800"/>
-          </a:xfrm>
-          <a:prstGeom prst="rect">
-            <a:avLst/>
-          </a:prstGeom>
-        </p:spPr>
-        <p:txBody>
-          <a:bodyPr anchorCtr="0" anchor="t" bIns="91425" lIns="91425" spcFirstLastPara="1" rIns="91425" wrap="square" tIns="91425">
-            <a:noAutofit/>
-          </a:bodyPr>
-          <a:lstStyle/>
-          <a:p>
-            <a:pPr indent="0" lvl="0" marL="0" rtl="0" algn="l">
-              <a:spcBef>
-                <a:spcPts val="0"/>
-              </a:spcBef>
-              <a:spcAft>
-                <a:spcPts val="0"/>
-              </a:spcAft>
-              <a:buNone/>
-            </a:pPr>
-            <a:r>
-              <a:t/>
-            </a:r>
-            <a:endParaRPr/>
-          </a:p>
-        </p:txBody>
-      </p:sp>
-      <p:sp>
-        <p:nvSpPr>
-          <p:cNvPr id="243" name="Google Shape;243;p11:notes"/>
-          <p:cNvSpPr/>
-          <p:nvPr>
-            <p:ph idx="2" type="sldImg"/>
-          </p:nvPr>
-        </p:nvSpPr>
-        <p:spPr>
-          <a:xfrm>
-            <a:off x="1143225" y="685800"/>
-            <a:ext cx="4572225" cy="3429000"/>
-          </a:xfrm>
-          <a:custGeom>
-            <a:rect b="b" l="l" r="r" t="t"/>
-            <a:pathLst>
-              <a:path extrusionOk="0" h="120000" w="120000">
-                <a:moveTo>
-                  <a:pt x="0" y="0"/>
-                </a:moveTo>
-                <a:lnTo>
-                  <a:pt x="120000" y="0"/>
-                </a:lnTo>
-                <a:lnTo>
-                  <a:pt x="120000" y="120000"/>
-                </a:lnTo>
-                <a:lnTo>
-                  <a:pt x="0" y="120000"/>
-                </a:lnTo>
-                <a:close/>
-              </a:path>
-            </a:pathLst>
-          </a:custGeom>
-        </p:spPr>
-      </p:sp>
-    </p:spTree>
-  </p:cSld>
-  <p:clrMapOvr>
-    <a:masterClrMapping/>
-  </p:clrMapOvr>
-</p:notes>
-</file>
-
-<file path=ppt/notesSlides/notesSlide12.xml><?xml version="1.0" encoding="utf-8"?>
-<p:notes xmlns:a="http://schemas.openxmlformats.org/drawingml/2006/main" xmlns:r="http://schemas.openxmlformats.org/officeDocument/2006/relationships" xmlns:mc="http://schemas.openxmlformats.org/markup-compatibility/2006" xmlns:mv="urn:schemas-microsoft-com:mac:vml" xmlns:p="http://schemas.openxmlformats.org/presentationml/2006/main" xmlns:c="http://schemas.openxmlformats.org/drawingml/2006/chart" xmlns:dgm="http://schemas.openxmlformats.org/drawingml/2006/diagram" xmlns:o="urn:schemas-microsoft-com:office:office" xmlns:v="urn:schemas-microsoft-com:vml" xmlns:pvml="urn:schemas-microsoft-com:office:powerpoint" xmlns:com="http://schemas.openxmlformats.org/drawingml/2006/compatibility" xmlns:p14="http://schemas.microsoft.com/office/powerpoint/2010/main" xmlns:p15="http://schemas.microsoft.com/office/powerpoint/2012/main" xmlns:ahyp="http://schemas.microsoft.com/office/drawing/2018/hyperlinkcolor" showMasterPhAnim="0" showMasterSp="0">
-  <p:cSld>
-    <p:spTree>
-      <p:nvGrpSpPr>
-        <p:cNvPr id="281" name="Shape 281"/>
-        <p:cNvGrpSpPr/>
-        <p:nvPr/>
-      </p:nvGrpSpPr>
-      <p:grpSpPr>
-        <a:xfrm>
-          <a:off x="0" y="0"/>
-          <a:ext cx="0" cy="0"/>
-          <a:chOff x="0" y="0"/>
-          <a:chExt cx="0" cy="0"/>
-        </a:xfrm>
-      </p:grpSpPr>
-      <p:sp>
-        <p:nvSpPr>
-          <p:cNvPr id="282" name="Google Shape;282;p12:notes"/>
-          <p:cNvSpPr txBox="1"/>
-          <p:nvPr>
-            <p:ph idx="1" type="body"/>
-          </p:nvPr>
-        </p:nvSpPr>
-        <p:spPr>
-          <a:xfrm>
-            <a:off x="685800" y="4343400"/>
-            <a:ext cx="5486400" cy="4114800"/>
-          </a:xfrm>
-          <a:prstGeom prst="rect">
-            <a:avLst/>
-          </a:prstGeom>
-        </p:spPr>
-        <p:txBody>
-          <a:bodyPr anchorCtr="0" anchor="t" bIns="91425" lIns="91425" spcFirstLastPara="1" rIns="91425" wrap="square" tIns="91425">
-            <a:noAutofit/>
-          </a:bodyPr>
-          <a:lstStyle/>
-          <a:p>
-            <a:pPr indent="0" lvl="0" marL="0" rtl="0" algn="l">
-              <a:spcBef>
-                <a:spcPts val="0"/>
-              </a:spcBef>
-              <a:spcAft>
-                <a:spcPts val="0"/>
-              </a:spcAft>
-              <a:buNone/>
-            </a:pPr>
-            <a:r>
-              <a:t/>
-            </a:r>
-            <a:endParaRPr/>
-          </a:p>
-        </p:txBody>
-      </p:sp>
-      <p:sp>
-        <p:nvSpPr>
-          <p:cNvPr id="283" name="Google Shape;283;p12:notes"/>
-          <p:cNvSpPr/>
-          <p:nvPr>
-            <p:ph idx="2" type="sldImg"/>
-          </p:nvPr>
-        </p:nvSpPr>
-        <p:spPr>
-          <a:xfrm>
-            <a:off x="1143225" y="685800"/>
-            <a:ext cx="4572225" cy="3429000"/>
+            <a:ext cx="4572300" cy="3429000"/>
           </a:xfrm>
           <a:custGeom>
             <a:rect b="b" l="l" r="r" t="t"/>
@@ -1606,7 +1442,7 @@
         <p:spPr>
           <a:xfrm>
             <a:off x="1143225" y="685800"/>
-            <a:ext cx="4572225" cy="3429000"/>
+            <a:ext cx="4572300" cy="3429000"/>
           </a:xfrm>
           <a:custGeom>
             <a:rect b="b" l="l" r="r" t="t"/>
@@ -1903,7 +1739,7 @@
         <p:spPr>
           <a:xfrm>
             <a:off x="1143225" y="685800"/>
-            <a:ext cx="4572225" cy="3429000"/>
+            <a:ext cx="4572300" cy="3429000"/>
           </a:xfrm>
           <a:custGeom>
             <a:rect b="b" l="l" r="r" t="t"/>
@@ -11921,7 +11757,7 @@
   <p:cSld>
     <p:spTree>
       <p:nvGrpSpPr>
-        <p:cNvPr id="228" name="Shape 228"/>
+        <p:cNvPr id="232" name="Shape 232"/>
         <p:cNvGrpSpPr/>
         <p:nvPr/>
       </p:nvGrpSpPr>
@@ -11935,7 +11771,7 @@
       </p:grpSpPr>
       <p:pic>
         <p:nvPicPr>
-          <p:cNvPr descr="image.png" id="229" name="Google Shape;229;p22"/>
+          <p:cNvPr descr="image.png" id="233" name="Google Shape;233;p22"/>
           <p:cNvPicPr preferRelativeResize="0"/>
           <p:nvPr/>
         </p:nvPicPr>
@@ -11960,43 +11796,16 @@
           </a:ln>
         </p:spPr>
       </p:pic>
-      <p:pic>
-        <p:nvPicPr>
-          <p:cNvPr descr="image.png" id="230" name="Google Shape;230;p22"/>
-          <p:cNvPicPr preferRelativeResize="0"/>
-          <p:nvPr/>
-        </p:nvPicPr>
-        <p:blipFill rotWithShape="1">
-          <a:blip r:embed="rId4">
-            <a:alphaModFix/>
-          </a:blip>
-          <a:srcRect b="0" l="0" r="0" t="0"/>
-          <a:stretch/>
-        </p:blipFill>
-        <p:spPr>
-          <a:xfrm>
-            <a:off x="3857625" y="5633888"/>
-            <a:ext cx="4476750" cy="523875"/>
-          </a:xfrm>
-          <a:prstGeom prst="rect">
-            <a:avLst/>
-          </a:prstGeom>
-          <a:noFill/>
-          <a:ln>
-            <a:noFill/>
-          </a:ln>
-        </p:spPr>
-      </p:pic>
       <p:sp>
         <p:nvSpPr>
-          <p:cNvPr id="231" name="Google Shape;231;p22"/>
+          <p:cNvPr id="234" name="Google Shape;234;p22"/>
           <p:cNvSpPr txBox="1"/>
           <p:nvPr/>
         </p:nvSpPr>
         <p:spPr>
           <a:xfrm>
-            <a:off x="305276" y="700236"/>
-            <a:ext cx="11581447" cy="819150"/>
+            <a:off x="762000" y="714375"/>
+            <a:ext cx="10668000" cy="1143000"/>
           </a:xfrm>
           <a:prstGeom prst="rect">
             <a:avLst/>
@@ -12008,11 +11817,11 @@
         </p:spPr>
         <p:txBody>
           <a:bodyPr anchorCtr="0" anchor="t" bIns="0" lIns="0" spcFirstLastPara="1" rIns="0" wrap="square" tIns="0">
-            <a:spAutoFit/>
+            <a:noAutofit/>
           </a:bodyPr>
           <a:lstStyle/>
           <a:p>
-            <a:pPr indent="0" lvl="0" marL="0" marR="0" rtl="0" algn="ctr">
+            <a:pPr indent="0" lvl="0" marL="0" rtl="0" algn="l">
               <a:spcBef>
                 <a:spcPts val="0"/>
               </a:spcBef>
@@ -12022,7 +11831,7 @@
               <a:buNone/>
             </a:pPr>
             <a:r>
-              <a:rPr b="1" i="0" lang="en-US" sz="5400" u="none" cap="none" strike="noStrike">
+              <a:rPr b="1" lang="en-US" sz="4600">
                 <a:solidFill>
                   <a:srgbClr val="ED1C24"/>
                 </a:solidFill>
@@ -12033,41 +11842,20 @@
               </a:rPr>
               <a:t>Claim-level truth.</a:t>
             </a:r>
-            <a:endParaRPr/>
+            <a:endParaRPr b="1" sz="4600">
+              <a:solidFill>
+                <a:srgbClr val="ED1C24"/>
+              </a:solidFill>
+              <a:latin typeface="Urbanist"/>
+              <a:ea typeface="Urbanist"/>
+              <a:cs typeface="Urbanist"/>
+              <a:sym typeface="Urbanist"/>
+            </a:endParaRPr>
           </a:p>
-        </p:txBody>
-      </p:sp>
-      <p:sp>
-        <p:nvSpPr>
-          <p:cNvPr id="232" name="Google Shape;232;p22"/>
-          <p:cNvSpPr txBox="1"/>
-          <p:nvPr/>
-        </p:nvSpPr>
-        <p:spPr>
-          <a:xfrm>
-            <a:off x="581025" y="1786086"/>
-            <a:ext cx="11029950" cy="426690"/>
-          </a:xfrm>
-          <a:prstGeom prst="rect">
-            <a:avLst/>
-          </a:prstGeom>
-          <a:noFill/>
-          <a:ln>
-            <a:noFill/>
-          </a:ln>
-        </p:spPr>
-        <p:txBody>
-          <a:bodyPr anchorCtr="0" anchor="t" bIns="0" lIns="0" spcFirstLastPara="1" rIns="0" wrap="square" tIns="0">
-            <a:spAutoFit/>
-          </a:bodyPr>
-          <a:lstStyle/>
           <a:p>
-            <a:pPr indent="0" lvl="0" marL="0" marR="0" rtl="0" algn="ctr">
-              <a:lnSpc>
-                <a:spcPct val="159952"/>
-              </a:lnSpc>
-              <a:spcBef>
-                <a:spcPts val="0"/>
+            <a:pPr indent="0" lvl="0" marL="0" rtl="0" algn="l">
+              <a:spcBef>
+                <a:spcPts val="750"/>
               </a:spcBef>
               <a:spcAft>
                 <a:spcPts val="0"/>
@@ -12075,7 +11863,7 @@
               <a:buNone/>
             </a:pPr>
             <a:r>
-              <a:rPr b="0" i="0" lang="en-US" sz="2100" u="none" cap="none" strike="noStrike">
+              <a:rPr b="0" lang="en-US" sz="1800">
                 <a:solidFill>
                   <a:srgbClr val="E5E5E5"/>
                 </a:solidFill>
@@ -12087,7 +11875,7 @@
               <a:t>Where the content lives, </a:t>
             </a:r>
             <a:r>
-              <a:rPr b="0" i="0" lang="en-US" sz="2100" u="none" cap="none" strike="noStrike">
+              <a:rPr b="0" lang="en-US" sz="1800">
                 <a:solidFill>
                   <a:srgbClr val="FFFFFF"/>
                 </a:solidFill>
@@ -12099,7 +11887,7 @@
               <a:t>on AMD</a:t>
             </a:r>
             <a:r>
-              <a:rPr b="0" i="0" lang="en-US" sz="2100" u="none" cap="none" strike="noStrike">
+              <a:rPr b="0" lang="en-US" sz="1800">
                 <a:solidFill>
                   <a:srgbClr val="E5E5E5"/>
                 </a:solidFill>
@@ -12110,102 +11898,161 @@
               </a:rPr>
               <a:t>.</a:t>
             </a:r>
-            <a:endParaRPr/>
+            <a:endParaRPr b="0" sz="1800">
+              <a:solidFill>
+                <a:srgbClr val="E5E5E5"/>
+              </a:solidFill>
+              <a:latin typeface="Urbanist"/>
+              <a:ea typeface="Urbanist"/>
+              <a:cs typeface="Urbanist"/>
+              <a:sym typeface="Urbanist"/>
+            </a:endParaRPr>
           </a:p>
         </p:txBody>
       </p:sp>
-      <p:sp>
-        <p:nvSpPr>
-          <p:cNvPr id="233" name="Google Shape;233;p22"/>
-          <p:cNvSpPr txBox="1"/>
+      <p:grpSp>
+        <p:nvGrpSpPr>
+          <p:cNvPr id="235" name="Google Shape;235;p22"/>
+          <p:cNvGrpSpPr/>
           <p:nvPr/>
-        </p:nvSpPr>
-        <p:spPr>
-          <a:xfrm>
-            <a:off x="581025" y="2593776"/>
-            <a:ext cx="11029950" cy="304800"/>
-          </a:xfrm>
-          <a:prstGeom prst="rect">
-            <a:avLst/>
-          </a:prstGeom>
-          <a:noFill/>
-          <a:ln>
+        </p:nvGrpSpPr>
+        <p:grpSpPr>
+          <a:xfrm>
+            <a:off x="762000" y="2190750"/>
+            <a:ext cx="3333900" cy="2857500"/>
+            <a:chOff x="0" y="0"/>
+            <a:chExt cx="3333900" cy="2857500"/>
+          </a:xfrm>
+        </p:grpSpPr>
+        <p:sp>
+          <p:nvSpPr>
+            <p:cNvPr id="236" name="Google Shape;236;p22"/>
+            <p:cNvSpPr/>
+            <p:nvPr/>
+          </p:nvSpPr>
+          <p:spPr>
+            <a:xfrm>
+              <a:off x="0" y="0"/>
+              <a:ext cx="3333900" cy="2857500"/>
+            </a:xfrm>
+            <a:prstGeom prst="roundRect">
+              <a:avLst>
+                <a:gd fmla="val 5333" name="adj"/>
+              </a:avLst>
+            </a:prstGeom>
+            <a:solidFill>
+              <a:srgbClr val="141414"/>
+            </a:solidFill>
+            <a:ln cap="flat" cmpd="sng" w="14300">
+              <a:solidFill>
+                <a:srgbClr val="262626"/>
+              </a:solidFill>
+              <a:prstDash val="solid"/>
+              <a:round/>
+              <a:headEnd len="sm" w="sm" type="none"/>
+              <a:tailEnd len="sm" w="sm" type="none"/>
+            </a:ln>
+          </p:spPr>
+          <p:txBody>
+            <a:bodyPr anchorCtr="0" anchor="ctr" bIns="0" lIns="0" spcFirstLastPara="1" rIns="0" wrap="square" tIns="0">
+              <a:noAutofit/>
+            </a:bodyPr>
+            <a:lstStyle/>
+            <a:p>
+              <a:pPr indent="0" lvl="0" marL="0" rtl="0" algn="l">
+                <a:spcBef>
+                  <a:spcPts val="0"/>
+                </a:spcBef>
+                <a:spcAft>
+                  <a:spcPts val="0"/>
+                </a:spcAft>
+                <a:buNone/>
+              </a:pPr>
+              <a:r>
+                <a:t/>
+              </a:r>
+              <a:endParaRPr/>
+            </a:p>
+          </p:txBody>
+        </p:sp>
+        <p:pic>
+          <p:nvPicPr>
+            <p:cNvPr id="237" name="Google Shape;237;p22"/>
+            <p:cNvPicPr preferRelativeResize="0"/>
+            <p:nvPr/>
+          </p:nvPicPr>
+          <p:blipFill rotWithShape="1">
+            <a:blip r:embed="rId4">
+              <a:alphaModFix/>
+            </a:blip>
+            <a:srcRect b="4002" l="0" r="0" t="4002"/>
+            <a:stretch/>
+          </p:blipFill>
+          <p:spPr>
+            <a:xfrm>
+              <a:off x="285750" y="285750"/>
+              <a:ext cx="304800" cy="304800"/>
+            </a:xfrm>
+            <a:prstGeom prst="rect">
+              <a:avLst/>
+            </a:prstGeom>
             <a:noFill/>
-          </a:ln>
-        </p:spPr>
-        <p:txBody>
-          <a:bodyPr anchorCtr="0" anchor="t" bIns="0" lIns="0" spcFirstLastPara="1" rIns="0" wrap="square" tIns="0">
-            <a:spAutoFit/>
-          </a:bodyPr>
-          <a:lstStyle/>
-          <a:p>
-            <a:pPr indent="0" lvl="0" marL="0" marR="0" rtl="0" algn="ctr">
-              <a:lnSpc>
-                <a:spcPct val="160000"/>
-              </a:lnSpc>
-              <a:spcBef>
-                <a:spcPts val="0"/>
-              </a:spcBef>
-              <a:spcAft>
-                <a:spcPts val="0"/>
-              </a:spcAft>
-              <a:buNone/>
-            </a:pPr>
-            <a:r>
-              <a:rPr b="0" i="0" lang="en-US" sz="1500" u="none" cap="none" strike="noStrike">
-                <a:solidFill>
-                  <a:srgbClr val="A3A3A3"/>
-                </a:solidFill>
-                <a:latin typeface="Urbanist"/>
-                <a:ea typeface="Urbanist"/>
-                <a:cs typeface="Urbanist"/>
-                <a:sym typeface="Urbanist"/>
-              </a:rPr>
-              <a:t>Explore the project:</a:t>
-            </a:r>
-            <a:endParaRPr/>
-          </a:p>
-        </p:txBody>
-      </p:sp>
-      <p:sp>
-        <p:nvSpPr>
-          <p:cNvPr id="234" name="Google Shape;234;p22"/>
-          <p:cNvSpPr txBox="1"/>
-          <p:nvPr/>
-        </p:nvSpPr>
-        <p:spPr>
-          <a:xfrm>
-            <a:off x="581025" y="3127176"/>
-            <a:ext cx="11029950" cy="365670"/>
-          </a:xfrm>
-          <a:prstGeom prst="rect">
-            <a:avLst/>
-          </a:prstGeom>
-          <a:noFill/>
-          <a:ln>
-            <a:noFill/>
-          </a:ln>
-        </p:spPr>
-        <p:txBody>
-          <a:bodyPr anchorCtr="0" anchor="t" bIns="0" lIns="314325" spcFirstLastPara="1" rIns="0" wrap="square" tIns="0">
-            <a:spAutoFit/>
-          </a:bodyPr>
-          <a:lstStyle/>
-          <a:p>
-            <a:pPr indent="0" lvl="0" marL="0" marR="0" rtl="0" algn="ctr">
-              <a:lnSpc>
-                <a:spcPct val="159944"/>
-              </a:lnSpc>
-              <a:spcBef>
-                <a:spcPts val="0"/>
-              </a:spcBef>
-              <a:spcAft>
-                <a:spcPts val="0"/>
-              </a:spcAft>
-              <a:buNone/>
-            </a:pPr>
-            <a:r>
-              <a:rPr b="0" i="0" lang="en-US" sz="1800" u="none" cap="none" strike="noStrike">
+            <a:ln>
+              <a:noFill/>
+            </a:ln>
+          </p:spPr>
+        </p:pic>
+        <p:sp>
+          <p:nvSpPr>
+            <p:cNvPr id="238" name="Google Shape;238;p22"/>
+            <p:cNvSpPr txBox="1"/>
+            <p:nvPr/>
+          </p:nvSpPr>
+          <p:spPr>
+            <a:xfrm>
+              <a:off x="285750" y="809625"/>
+              <a:ext cx="2762400" cy="1809600"/>
+            </a:xfrm>
+            <a:prstGeom prst="rect">
+              <a:avLst/>
+            </a:prstGeom>
+            <a:solidFill>
+              <a:srgbClr val="000000">
+                <a:alpha val="0"/>
+              </a:srgbClr>
+            </a:solidFill>
+            <a:ln>
+              <a:noFill/>
+            </a:ln>
+          </p:spPr>
+          <p:txBody>
+            <a:bodyPr anchorCtr="0" anchor="t" bIns="0" lIns="0" spcFirstLastPara="1" rIns="0" wrap="square" tIns="0">
+              <a:noAutofit/>
+            </a:bodyPr>
+            <a:lstStyle/>
+            <a:p>
+              <a:pPr indent="0" lvl="0" marL="0" rtl="0" algn="l">
+                <a:spcBef>
+                  <a:spcPts val="0"/>
+                </a:spcBef>
+                <a:spcAft>
+                  <a:spcPts val="0"/>
+                </a:spcAft>
+                <a:buNone/>
+              </a:pPr>
+              <a:r>
+                <a:rPr b="1" lang="en-US" sz="1600">
+                  <a:solidFill>
+                    <a:srgbClr val="FFFFFF"/>
+                  </a:solidFill>
+                  <a:latin typeface="Urbanist"/>
+                  <a:ea typeface="Urbanist"/>
+                  <a:cs typeface="Urbanist"/>
+                  <a:sym typeface="Urbanist"/>
+                </a:rPr>
+                <a:t>GitHub Repo &amp; Demos</a:t>
+              </a:r>
+              <a:endParaRPr b="1" sz="1600">
                 <a:solidFill>
                   <a:srgbClr val="FFFFFF"/>
                 </a:solidFill>
@@ -12213,52 +12060,85 @@
                 <a:ea typeface="Urbanist"/>
                 <a:cs typeface="Urbanist"/>
                 <a:sym typeface="Urbanist"/>
-              </a:rPr>
-              <a:t> GitHub Repo &amp; Demos</a:t>
-            </a:r>
-            <a:endParaRPr/>
-          </a:p>
-        </p:txBody>
-      </p:sp>
-      <p:sp>
-        <p:nvSpPr>
-          <p:cNvPr id="235" name="Google Shape;235;p22"/>
-          <p:cNvSpPr txBox="1"/>
-          <p:nvPr/>
-        </p:nvSpPr>
-        <p:spPr>
-          <a:xfrm>
-            <a:off x="581025" y="3721447"/>
-            <a:ext cx="11029950" cy="365670"/>
-          </a:xfrm>
-          <a:prstGeom prst="rect">
-            <a:avLst/>
-          </a:prstGeom>
-          <a:noFill/>
-          <a:ln>
-            <a:noFill/>
-          </a:ln>
-        </p:spPr>
-        <p:txBody>
-          <a:bodyPr anchorCtr="0" anchor="t" bIns="0" lIns="266700" spcFirstLastPara="1" rIns="0" wrap="square" tIns="0">
-            <a:spAutoFit/>
-          </a:bodyPr>
-          <a:lstStyle/>
-          <a:p>
-            <a:pPr indent="0" lvl="0" marL="0" marR="0" rtl="0" algn="ctr">
-              <a:lnSpc>
-                <a:spcPct val="159944"/>
-              </a:lnSpc>
-              <a:spcBef>
-                <a:spcPts val="0"/>
-              </a:spcBef>
-              <a:spcAft>
-                <a:spcPts val="0"/>
-              </a:spcAft>
-              <a:buNone/>
-            </a:pPr>
-            <a:r>
-              <a:rPr b="0" i="0" lang="en-US" sz="1800" u="none" cap="none" strike="noStrike">
+              </a:endParaRPr>
+            </a:p>
+            <a:p>
+              <a:pPr indent="0" lvl="0" marL="0" rtl="0" algn="l">
+                <a:spcBef>
+                  <a:spcPts val="1125"/>
+                </a:spcBef>
+                <a:spcAft>
+                  <a:spcPts val="0"/>
+                </a:spcAft>
+                <a:buNone/>
+              </a:pPr>
+              <a:r>
+                <a:rPr b="0" lang="en-US" sz="1000">
+                  <a:solidFill>
+                    <a:srgbClr val="ED1C24"/>
+                  </a:solidFill>
+                  <a:uFill>
+                    <a:noFill/>
+                  </a:uFill>
+                  <a:latin typeface="Arial"/>
+                  <a:ea typeface="Arial"/>
+                  <a:cs typeface="Arial"/>
+                  <a:sym typeface="Arial"/>
+                  <a:hlinkClick r:id="rId5">
+                    <a:extLst>
+                      <a:ext uri="{A12FA001-AC4F-418D-AE19-62706E023703}">
+                        <ahyp:hlinkClr val="tx"/>
+                      </a:ext>
+                    </a:extLst>
+                  </a:hlinkClick>
+                </a:rPr>
+                <a:t>https://github.com/leofishman/amd-hackathon</a:t>
+              </a:r>
+              <a:br>
+                <a:rPr b="1" lang="en-US" sz="1000">
+                  <a:solidFill>
+                    <a:srgbClr val="FFFFFF"/>
+                  </a:solidFill>
+                  <a:latin typeface="Urbanist"/>
+                  <a:ea typeface="Urbanist"/>
+                  <a:cs typeface="Urbanist"/>
+                  <a:sym typeface="Urbanist"/>
+                </a:rPr>
+              </a:br>
+              <a:br>
+                <a:rPr b="1" lang="en-US" sz="1000">
+                  <a:solidFill>
+                    <a:srgbClr val="FFFFFF"/>
+                  </a:solidFill>
+                  <a:latin typeface="Urbanist"/>
+                  <a:ea typeface="Urbanist"/>
+                  <a:cs typeface="Urbanist"/>
+                  <a:sym typeface="Urbanist"/>
+                </a:rPr>
+              </a:br>
+              <a:r>
+                <a:rPr b="0" lang="en-US" sz="1000">
+                  <a:solidFill>
+                    <a:srgbClr val="ED1C24"/>
+                  </a:solidFill>
+                  <a:uFill>
+                    <a:noFill/>
+                  </a:uFill>
+                  <a:latin typeface="Arial"/>
+                  <a:ea typeface="Arial"/>
+                  <a:cs typeface="Arial"/>
+                  <a:sym typeface="Arial"/>
+                  <a:hlinkClick r:id="rId6">
+                    <a:extLst>
+                      <a:ext uri="{A12FA001-AC4F-418D-AE19-62706E023703}">
+                        <ahyp:hlinkClr val="tx"/>
+                      </a:ext>
+                    </a:extLst>
+                  </a:hlinkClick>
+                </a:rPr>
+                <a:t>https://amd-hackathon.fishman.work/</a:t>
+              </a:r>
+              <a:endParaRPr b="1" sz="1000">
                 <a:solidFill>
                   <a:srgbClr val="FFFFFF"/>
                 </a:solidFill>
@@ -12266,52 +12146,154 @@
                 <a:ea typeface="Urbanist"/>
                 <a:cs typeface="Urbanist"/>
                 <a:sym typeface="Urbanist"/>
-              </a:rPr>
-              <a:t>Demo Video Link</a:t>
-            </a:r>
-            <a:endParaRPr/>
-          </a:p>
-        </p:txBody>
-      </p:sp>
-      <p:sp>
-        <p:nvSpPr>
-          <p:cNvPr id="236" name="Google Shape;236;p22"/>
-          <p:cNvSpPr txBox="1"/>
+              </a:endParaRPr>
+            </a:p>
+          </p:txBody>
+        </p:sp>
+      </p:grpSp>
+      <p:grpSp>
+        <p:nvGrpSpPr>
+          <p:cNvPr id="239" name="Google Shape;239;p22"/>
+          <p:cNvGrpSpPr/>
           <p:nvPr/>
-        </p:nvSpPr>
-        <p:spPr>
-          <a:xfrm>
-            <a:off x="581025" y="4315717"/>
-            <a:ext cx="11029950" cy="365670"/>
-          </a:xfrm>
-          <a:prstGeom prst="rect">
-            <a:avLst/>
-          </a:prstGeom>
-          <a:noFill/>
-          <a:ln>
+        </p:nvGrpSpPr>
+        <p:grpSpPr>
+          <a:xfrm>
+            <a:off x="4378921" y="2190750"/>
+            <a:ext cx="3333900" cy="2857500"/>
+            <a:chOff x="0" y="0"/>
+            <a:chExt cx="3333900" cy="2857500"/>
+          </a:xfrm>
+        </p:grpSpPr>
+        <p:sp>
+          <p:nvSpPr>
+            <p:cNvPr id="240" name="Google Shape;240;p22"/>
+            <p:cNvSpPr/>
+            <p:nvPr/>
+          </p:nvSpPr>
+          <p:spPr>
+            <a:xfrm>
+              <a:off x="0" y="0"/>
+              <a:ext cx="3333900" cy="2857500"/>
+            </a:xfrm>
+            <a:prstGeom prst="roundRect">
+              <a:avLst>
+                <a:gd fmla="val 5333" name="adj"/>
+              </a:avLst>
+            </a:prstGeom>
+            <a:solidFill>
+              <a:srgbClr val="141414"/>
+            </a:solidFill>
+            <a:ln cap="flat" cmpd="sng" w="14300">
+              <a:solidFill>
+                <a:srgbClr val="262626"/>
+              </a:solidFill>
+              <a:prstDash val="solid"/>
+              <a:round/>
+              <a:headEnd len="sm" w="sm" type="none"/>
+              <a:tailEnd len="sm" w="sm" type="none"/>
+            </a:ln>
+          </p:spPr>
+          <p:txBody>
+            <a:bodyPr anchorCtr="0" anchor="ctr" bIns="0" lIns="0" spcFirstLastPara="1" rIns="0" wrap="square" tIns="0">
+              <a:noAutofit/>
+            </a:bodyPr>
+            <a:lstStyle/>
+            <a:p>
+              <a:pPr indent="0" lvl="0" marL="0" rtl="0" algn="l">
+                <a:spcBef>
+                  <a:spcPts val="0"/>
+                </a:spcBef>
+                <a:spcAft>
+                  <a:spcPts val="0"/>
+                </a:spcAft>
+                <a:buNone/>
+              </a:pPr>
+              <a:r>
+                <a:t/>
+              </a:r>
+              <a:endParaRPr/>
+            </a:p>
+          </p:txBody>
+        </p:sp>
+        <p:pic>
+          <p:nvPicPr>
+            <p:cNvPr id="241" name="Google Shape;241;p22"/>
+            <p:cNvPicPr preferRelativeResize="0"/>
+            <p:nvPr/>
+          </p:nvPicPr>
+          <p:blipFill rotWithShape="1">
+            <a:blip r:embed="rId7">
+              <a:alphaModFix/>
+            </a:blip>
+            <a:srcRect b="2006" l="0" r="0" t="1997"/>
+            <a:stretch/>
+          </p:blipFill>
+          <p:spPr>
+            <a:xfrm>
+              <a:off x="285750" y="285750"/>
+              <a:ext cx="228600" cy="304800"/>
+            </a:xfrm>
+            <a:prstGeom prst="rect">
+              <a:avLst/>
+            </a:prstGeom>
             <a:noFill/>
-          </a:ln>
-        </p:spPr>
-        <p:txBody>
-          <a:bodyPr anchorCtr="0" anchor="t" bIns="0" lIns="295275" spcFirstLastPara="1" rIns="0" wrap="square" tIns="0">
-            <a:spAutoFit/>
-          </a:bodyPr>
-          <a:lstStyle/>
-          <a:p>
-            <a:pPr indent="0" lvl="0" marL="0" marR="0" rtl="0" algn="ctr">
-              <a:lnSpc>
-                <a:spcPct val="159944"/>
-              </a:lnSpc>
-              <a:spcBef>
-                <a:spcPts val="0"/>
-              </a:spcBef>
-              <a:spcAft>
-                <a:spcPts val="0"/>
-              </a:spcAft>
-              <a:buNone/>
-            </a:pPr>
-            <a:r>
-              <a:rPr b="0" i="0" lang="en-US" sz="1800" u="none" cap="none" strike="noStrike">
+            <a:ln>
+              <a:noFill/>
+            </a:ln>
+          </p:spPr>
+        </p:pic>
+        <p:sp>
+          <p:nvSpPr>
+            <p:cNvPr id="242" name="Google Shape;242;p22"/>
+            <p:cNvSpPr txBox="1"/>
+            <p:nvPr/>
+          </p:nvSpPr>
+          <p:spPr>
+            <a:xfrm>
+              <a:off x="285750" y="809625"/>
+              <a:ext cx="2927700" cy="1809600"/>
+            </a:xfrm>
+            <a:prstGeom prst="rect">
+              <a:avLst/>
+            </a:prstGeom>
+            <a:solidFill>
+              <a:srgbClr val="000000">
+                <a:alpha val="0"/>
+              </a:srgbClr>
+            </a:solidFill>
+            <a:ln>
+              <a:noFill/>
+            </a:ln>
+          </p:spPr>
+          <p:txBody>
+            <a:bodyPr anchorCtr="0" anchor="t" bIns="0" lIns="0" spcFirstLastPara="1" rIns="0" wrap="square" tIns="0">
+              <a:noAutofit/>
+            </a:bodyPr>
+            <a:lstStyle/>
+            <a:p>
+              <a:pPr indent="0" lvl="0" marL="0" rtl="0" algn="l">
+                <a:spcBef>
+                  <a:spcPts val="0"/>
+                </a:spcBef>
+                <a:spcAft>
+                  <a:spcPts val="0"/>
+                </a:spcAft>
+                <a:buNone/>
+              </a:pPr>
+              <a:r>
+                <a:rPr b="1" lang="en-US" sz="1369">
+                  <a:solidFill>
+                    <a:srgbClr val="FFFFFF"/>
+                  </a:solidFill>
+                  <a:latin typeface="Urbanist"/>
+                  <a:ea typeface="Urbanist"/>
+                  <a:cs typeface="Urbanist"/>
+                  <a:sym typeface="Urbanist"/>
+                </a:rPr>
+                <a:t>Demo Video Link</a:t>
+              </a:r>
+              <a:endParaRPr b="1" sz="1369">
                 <a:solidFill>
                   <a:srgbClr val="FFFFFF"/>
                 </a:solidFill>
@@ -12319,80 +12301,267 @@
                 <a:ea typeface="Urbanist"/>
                 <a:cs typeface="Urbanist"/>
                 <a:sym typeface="Urbanist"/>
-              </a:rPr>
-              <a:t> drupal.org Project Page</a:t>
-            </a:r>
-            <a:endParaRPr/>
-          </a:p>
-        </p:txBody>
-      </p:sp>
-      <p:sp>
-        <p:nvSpPr>
-          <p:cNvPr id="237" name="Google Shape;237;p22"/>
-          <p:cNvSpPr txBox="1"/>
-          <p:nvPr/>
-        </p:nvSpPr>
-        <p:spPr>
-          <a:xfrm>
-            <a:off x="3857625" y="5929163"/>
-            <a:ext cx="1428750" cy="228600"/>
-          </a:xfrm>
-          <a:prstGeom prst="rect">
-            <a:avLst/>
-          </a:prstGeom>
-          <a:noFill/>
-          <a:ln>
-            <a:noFill/>
-          </a:ln>
-        </p:spPr>
-        <p:txBody>
-          <a:bodyPr anchorCtr="0" anchor="t" bIns="0" lIns="0" spcFirstLastPara="1" rIns="0" wrap="square" tIns="0">
-            <a:spAutoFit/>
-          </a:bodyPr>
-          <a:lstStyle/>
-          <a:p>
-            <a:pPr indent="0" lvl="0" marL="0" marR="0" rtl="0" algn="ctr">
-              <a:spcBef>
-                <a:spcPts val="0"/>
-              </a:spcBef>
-              <a:spcAft>
-                <a:spcPts val="0"/>
-              </a:spcAft>
-              <a:buNone/>
-            </a:pPr>
-            <a:r>
-              <a:rPr b="1" i="0" lang="en-US" sz="1500" u="none" cap="none" strike="noStrike">
+              </a:endParaRPr>
+            </a:p>
+            <a:p>
+              <a:pPr indent="0" lvl="0" marL="0" rtl="0" algn="l">
+                <a:spcBef>
+                  <a:spcPts val="1125"/>
+                </a:spcBef>
+                <a:spcAft>
+                  <a:spcPts val="0"/>
+                </a:spcAft>
+                <a:buNone/>
+              </a:pPr>
+              <a:r>
+                <a:rPr b="0" lang="en-US" sz="1025">
+                  <a:solidFill>
+                    <a:srgbClr val="ED1C24"/>
+                  </a:solidFill>
+                  <a:uFill>
+                    <a:noFill/>
+                  </a:uFill>
+                  <a:latin typeface="Arial"/>
+                  <a:ea typeface="Arial"/>
+                  <a:cs typeface="Arial"/>
+                  <a:sym typeface="Arial"/>
+                  <a:hlinkClick r:id="rId8">
+                    <a:extLst>
+                      <a:ext uri="{A12FA001-AC4F-418D-AE19-62706E023703}">
+                        <ahyp:hlinkClr val="tx"/>
+                      </a:ext>
+                    </a:extLst>
+                  </a:hlinkClick>
+                </a:rPr>
+                <a:t>https://www.youtube.com/watch?v=WqwtFhDbv20</a:t>
+              </a:r>
+              <a:endParaRPr b="1" sz="1025">
                 <a:solidFill>
-                  <a:srgbClr val="737373"/>
+                  <a:srgbClr val="FFFFFF"/>
                 </a:solidFill>
                 <a:latin typeface="Urbanist"/>
                 <a:ea typeface="Urbanist"/>
                 <a:cs typeface="Urbanist"/>
                 <a:sym typeface="Urbanist"/>
-              </a:rPr>
-              <a:t>Drupal AI Router</a:t>
-            </a:r>
-            <a:endParaRPr/>
-          </a:p>
-        </p:txBody>
-      </p:sp>
+              </a:endParaRPr>
+            </a:p>
+          </p:txBody>
+        </p:sp>
+      </p:grpSp>
+      <p:grpSp>
+        <p:nvGrpSpPr>
+          <p:cNvPr id="243" name="Google Shape;243;p22"/>
+          <p:cNvGrpSpPr/>
+          <p:nvPr/>
+        </p:nvGrpSpPr>
+        <p:grpSpPr>
+          <a:xfrm>
+            <a:off x="7963975" y="2190750"/>
+            <a:ext cx="3466256" cy="2857500"/>
+            <a:chOff x="0" y="0"/>
+            <a:chExt cx="3333900" cy="2857500"/>
+          </a:xfrm>
+        </p:grpSpPr>
+        <p:sp>
+          <p:nvSpPr>
+            <p:cNvPr id="244" name="Google Shape;244;p22"/>
+            <p:cNvSpPr/>
+            <p:nvPr/>
+          </p:nvSpPr>
+          <p:spPr>
+            <a:xfrm>
+              <a:off x="0" y="0"/>
+              <a:ext cx="3333900" cy="2857500"/>
+            </a:xfrm>
+            <a:prstGeom prst="roundRect">
+              <a:avLst>
+                <a:gd fmla="val 5333" name="adj"/>
+              </a:avLst>
+            </a:prstGeom>
+            <a:solidFill>
+              <a:srgbClr val="141414"/>
+            </a:solidFill>
+            <a:ln cap="flat" cmpd="sng" w="14300">
+              <a:solidFill>
+                <a:srgbClr val="262626"/>
+              </a:solidFill>
+              <a:prstDash val="solid"/>
+              <a:round/>
+              <a:headEnd len="sm" w="sm" type="none"/>
+              <a:tailEnd len="sm" w="sm" type="none"/>
+            </a:ln>
+          </p:spPr>
+          <p:txBody>
+            <a:bodyPr anchorCtr="0" anchor="ctr" bIns="0" lIns="0" spcFirstLastPara="1" rIns="0" wrap="square" tIns="0">
+              <a:noAutofit/>
+            </a:bodyPr>
+            <a:lstStyle/>
+            <a:p>
+              <a:pPr indent="0" lvl="0" marL="0" rtl="0" algn="l">
+                <a:spcBef>
+                  <a:spcPts val="0"/>
+                </a:spcBef>
+                <a:spcAft>
+                  <a:spcPts val="0"/>
+                </a:spcAft>
+                <a:buNone/>
+              </a:pPr>
+              <a:r>
+                <a:t/>
+              </a:r>
+              <a:endParaRPr/>
+            </a:p>
+          </p:txBody>
+        </p:sp>
+        <p:pic>
+          <p:nvPicPr>
+            <p:cNvPr id="245" name="Google Shape;245;p22"/>
+            <p:cNvPicPr preferRelativeResize="0"/>
+            <p:nvPr/>
+          </p:nvPicPr>
+          <p:blipFill rotWithShape="1">
+            <a:blip r:embed="rId9">
+              <a:alphaModFix/>
+            </a:blip>
+            <a:srcRect b="0" l="288" r="278" t="0"/>
+            <a:stretch/>
+          </p:blipFill>
+          <p:spPr>
+            <a:xfrm>
+              <a:off x="285750" y="285750"/>
+              <a:ext cx="266700" cy="304800"/>
+            </a:xfrm>
+            <a:prstGeom prst="rect">
+              <a:avLst/>
+            </a:prstGeom>
+            <a:noFill/>
+            <a:ln>
+              <a:noFill/>
+            </a:ln>
+          </p:spPr>
+        </p:pic>
+        <p:sp>
+          <p:nvSpPr>
+            <p:cNvPr id="246" name="Google Shape;246;p22"/>
+            <p:cNvSpPr txBox="1"/>
+            <p:nvPr/>
+          </p:nvSpPr>
+          <p:spPr>
+            <a:xfrm>
+              <a:off x="285756" y="852225"/>
+              <a:ext cx="3048000" cy="1767000"/>
+            </a:xfrm>
+            <a:prstGeom prst="rect">
+              <a:avLst/>
+            </a:prstGeom>
+            <a:solidFill>
+              <a:srgbClr val="000000">
+                <a:alpha val="0"/>
+              </a:srgbClr>
+            </a:solidFill>
+            <a:ln>
+              <a:noFill/>
+            </a:ln>
+          </p:spPr>
+          <p:txBody>
+            <a:bodyPr anchorCtr="0" anchor="t" bIns="0" lIns="0" spcFirstLastPara="1" rIns="0" wrap="square" tIns="0">
+              <a:noAutofit/>
+            </a:bodyPr>
+            <a:lstStyle/>
+            <a:p>
+              <a:pPr indent="0" lvl="0" marL="0" rtl="0" algn="l">
+                <a:spcBef>
+                  <a:spcPts val="0"/>
+                </a:spcBef>
+                <a:spcAft>
+                  <a:spcPts val="0"/>
+                </a:spcAft>
+                <a:buNone/>
+              </a:pPr>
+              <a:r>
+                <a:rPr b="1" lang="en-US" sz="1258">
+                  <a:solidFill>
+                    <a:srgbClr val="FFFFFF"/>
+                  </a:solidFill>
+                  <a:latin typeface="Urbanist"/>
+                  <a:ea typeface="Urbanist"/>
+                  <a:cs typeface="Urbanist"/>
+                  <a:sym typeface="Urbanist"/>
+                </a:rPr>
+                <a:t>drupal.org Project Page</a:t>
+              </a:r>
+              <a:endParaRPr b="1" sz="1258">
+                <a:solidFill>
+                  <a:srgbClr val="FFFFFF"/>
+                </a:solidFill>
+                <a:latin typeface="Urbanist"/>
+                <a:ea typeface="Urbanist"/>
+                <a:cs typeface="Urbanist"/>
+                <a:sym typeface="Urbanist"/>
+              </a:endParaRPr>
+            </a:p>
+            <a:p>
+              <a:pPr indent="0" lvl="0" marL="0" rtl="0" algn="l">
+                <a:spcBef>
+                  <a:spcPts val="1125"/>
+                </a:spcBef>
+                <a:spcAft>
+                  <a:spcPts val="0"/>
+                </a:spcAft>
+                <a:buNone/>
+              </a:pPr>
+              <a:r>
+                <a:rPr b="0" lang="en-US" sz="1025">
+                  <a:solidFill>
+                    <a:srgbClr val="ED1C24"/>
+                  </a:solidFill>
+                  <a:uFill>
+                    <a:noFill/>
+                  </a:uFill>
+                  <a:latin typeface="Arial"/>
+                  <a:ea typeface="Arial"/>
+                  <a:cs typeface="Arial"/>
+                  <a:sym typeface="Arial"/>
+                  <a:hlinkClick r:id="rId10">
+                    <a:extLst>
+                      <a:ext uri="{A12FA001-AC4F-418D-AE19-62706E023703}">
+                        <ahyp:hlinkClr val="tx"/>
+                      </a:ext>
+                    </a:extLst>
+                  </a:hlinkClick>
+                </a:rPr>
+                <a:t>https://www.drupal.org/project/ai_provider_universal</a:t>
+              </a:r>
+              <a:endParaRPr b="1" sz="1025">
+                <a:solidFill>
+                  <a:srgbClr val="FFFFFF"/>
+                </a:solidFill>
+                <a:latin typeface="Urbanist"/>
+                <a:ea typeface="Urbanist"/>
+                <a:cs typeface="Urbanist"/>
+                <a:sym typeface="Urbanist"/>
+              </a:endParaRPr>
+            </a:p>
+          </p:txBody>
+        </p:sp>
+      </p:grpSp>
       <p:pic>
         <p:nvPicPr>
-          <p:cNvPr descr="image.png" id="238" name="Google Shape;238;p22"/>
+          <p:cNvPr id="247" name="Google Shape;247;p22"/>
           <p:cNvPicPr preferRelativeResize="0"/>
           <p:nvPr/>
         </p:nvPicPr>
         <p:blipFill rotWithShape="1">
-          <a:blip r:embed="rId5">
+          <a:blip r:embed="rId11">
             <a:alphaModFix/>
           </a:blip>
-          <a:srcRect b="0" l="0" r="0" t="0"/>
+          <a:srcRect b="894" l="0" r="0" t="894"/>
           <a:stretch/>
         </p:blipFill>
         <p:spPr>
           <a:xfrm>
-            <a:off x="4800600" y="3184326"/>
-            <a:ext cx="219075" cy="228600"/>
+            <a:off x="762000" y="5524500"/>
+            <a:ext cx="4476900" cy="523800"/>
           </a:xfrm>
           <a:prstGeom prst="rect">
             <a:avLst/>
@@ -12403,2136 +12572,6 @@
           </a:ln>
         </p:spPr>
       </p:pic>
-      <p:pic>
-        <p:nvPicPr>
-          <p:cNvPr descr="image.png" id="239" name="Google Shape;239;p22"/>
-          <p:cNvPicPr preferRelativeResize="0"/>
-          <p:nvPr/>
-        </p:nvPicPr>
-        <p:blipFill rotWithShape="1">
-          <a:blip r:embed="rId6">
-            <a:alphaModFix/>
-          </a:blip>
-          <a:srcRect b="0" l="0" r="0" t="0"/>
-          <a:stretch/>
-        </p:blipFill>
-        <p:spPr>
-          <a:xfrm>
-            <a:off x="5095875" y="3778597"/>
-            <a:ext cx="171450" cy="228600"/>
-          </a:xfrm>
-          <a:prstGeom prst="rect">
-            <a:avLst/>
-          </a:prstGeom>
-          <a:noFill/>
-          <a:ln>
-            <a:noFill/>
-          </a:ln>
-        </p:spPr>
-      </p:pic>
-      <p:pic>
-        <p:nvPicPr>
-          <p:cNvPr descr="image.png" id="240" name="Google Shape;240;p22"/>
-          <p:cNvPicPr preferRelativeResize="0"/>
-          <p:nvPr/>
-        </p:nvPicPr>
-        <p:blipFill rotWithShape="1">
-          <a:blip r:embed="rId7">
-            <a:alphaModFix/>
-          </a:blip>
-          <a:srcRect b="0" l="0" r="0" t="0"/>
-          <a:stretch/>
-        </p:blipFill>
-        <p:spPr>
-          <a:xfrm>
-            <a:off x="4757737" y="4372867"/>
-            <a:ext cx="200025" cy="228600"/>
-          </a:xfrm>
-          <a:prstGeom prst="rect">
-            <a:avLst/>
-          </a:prstGeom>
-          <a:noFill/>
-          <a:ln>
-            <a:noFill/>
-          </a:ln>
-        </p:spPr>
-      </p:pic>
-    </p:spTree>
-  </p:cSld>
-  <p:clrMapOvr>
-    <a:masterClrMapping/>
-  </p:clrMapOvr>
-</p:sld>
-</file>
-
-<file path=ppt/slides/slide11.xml><?xml version="1.0" encoding="utf-8"?>
-<p:sld xmlns:a="http://schemas.openxmlformats.org/drawingml/2006/main" xmlns:r="http://schemas.openxmlformats.org/officeDocument/2006/relationships" xmlns:mc="http://schemas.openxmlformats.org/markup-compatibility/2006" xmlns:mv="urn:schemas-microsoft-com:mac:vml" xmlns:p="http://schemas.openxmlformats.org/presentationml/2006/main" xmlns:c="http://schemas.openxmlformats.org/drawingml/2006/chart" xmlns:dgm="http://schemas.openxmlformats.org/drawingml/2006/diagram" xmlns:o="urn:schemas-microsoft-com:office:office" xmlns:v="urn:schemas-microsoft-com:vml" xmlns:pvml="urn:schemas-microsoft-com:office:powerpoint" xmlns:com="http://schemas.openxmlformats.org/drawingml/2006/compatibility" xmlns:p14="http://schemas.microsoft.com/office/powerpoint/2010/main" xmlns:p15="http://schemas.microsoft.com/office/powerpoint/2012/main" xmlns:ahyp="http://schemas.microsoft.com/office/drawing/2018/hyperlinkcolor">
-  <p:cSld>
-    <p:spTree>
-      <p:nvGrpSpPr>
-        <p:cNvPr id="244" name="Shape 244"/>
-        <p:cNvGrpSpPr/>
-        <p:nvPr/>
-      </p:nvGrpSpPr>
-      <p:grpSpPr>
-        <a:xfrm>
-          <a:off x="0" y="0"/>
-          <a:ext cx="0" cy="0"/>
-          <a:chOff x="0" y="0"/>
-          <a:chExt cx="0" cy="0"/>
-        </a:xfrm>
-      </p:grpSpPr>
-      <p:pic>
-        <p:nvPicPr>
-          <p:cNvPr descr="image.png" id="245" name="Google Shape;245;p23"/>
-          <p:cNvPicPr preferRelativeResize="0"/>
-          <p:nvPr/>
-        </p:nvPicPr>
-        <p:blipFill rotWithShape="1">
-          <a:blip r:embed="rId3">
-            <a:alphaModFix/>
-          </a:blip>
-          <a:srcRect b="0" l="0" r="0" t="0"/>
-          <a:stretch/>
-        </p:blipFill>
-        <p:spPr>
-          <a:xfrm>
-            <a:off x="0" y="0"/>
-            <a:ext cx="12192000" cy="6858000"/>
-          </a:xfrm>
-          <a:prstGeom prst="rect">
-            <a:avLst/>
-          </a:prstGeom>
-          <a:noFill/>
-          <a:ln>
-            <a:noFill/>
-          </a:ln>
-        </p:spPr>
-      </p:pic>
-      <p:sp>
-        <p:nvSpPr>
-          <p:cNvPr id="246" name="Google Shape;246;p23"/>
-          <p:cNvSpPr/>
-          <p:nvPr/>
-        </p:nvSpPr>
-        <p:spPr>
-          <a:xfrm>
-            <a:off x="581025" y="1551979"/>
-            <a:ext cx="11029950" cy="982860"/>
-          </a:xfrm>
-          <a:prstGeom prst="rect">
-            <a:avLst/>
-          </a:prstGeom>
-          <a:noFill/>
-          <a:ln>
-            <a:noFill/>
-          </a:ln>
-        </p:spPr>
-        <p:txBody>
-          <a:bodyPr anchorCtr="0" anchor="ctr" bIns="45700" lIns="91425" spcFirstLastPara="1" rIns="91425" wrap="square" tIns="45700">
-            <a:noAutofit/>
-          </a:bodyPr>
-          <a:lstStyle/>
-          <a:p>
-            <a:pPr indent="0" lvl="0" marL="0" marR="0" rtl="0" algn="ctr">
-              <a:spcBef>
-                <a:spcPts val="0"/>
-              </a:spcBef>
-              <a:spcAft>
-                <a:spcPts val="0"/>
-              </a:spcAft>
-              <a:buNone/>
-            </a:pPr>
-            <a:r>
-              <a:t/>
-            </a:r>
-            <a:endParaRPr b="0" i="0" sz="1800" u="none" cap="none" strike="noStrike">
-              <a:solidFill>
-                <a:schemeClr val="dk1"/>
-              </a:solidFill>
-              <a:latin typeface="Calibri"/>
-              <a:ea typeface="Calibri"/>
-              <a:cs typeface="Calibri"/>
-              <a:sym typeface="Calibri"/>
-            </a:endParaRPr>
-          </a:p>
-        </p:txBody>
-      </p:sp>
-      <p:sp>
-        <p:nvSpPr>
-          <p:cNvPr id="247" name="Google Shape;247;p23"/>
-          <p:cNvSpPr/>
-          <p:nvPr/>
-        </p:nvSpPr>
-        <p:spPr>
-          <a:xfrm>
-            <a:off x="581025" y="2534840"/>
-            <a:ext cx="11029950" cy="784770"/>
-          </a:xfrm>
-          <a:prstGeom prst="rect">
-            <a:avLst/>
-          </a:prstGeom>
-          <a:noFill/>
-          <a:ln>
-            <a:noFill/>
-          </a:ln>
-        </p:spPr>
-        <p:txBody>
-          <a:bodyPr anchorCtr="0" anchor="ctr" bIns="45700" lIns="91425" spcFirstLastPara="1" rIns="91425" wrap="square" tIns="45700">
-            <a:noAutofit/>
-          </a:bodyPr>
-          <a:lstStyle/>
-          <a:p>
-            <a:pPr indent="0" lvl="0" marL="0" marR="0" rtl="0" algn="ctr">
-              <a:spcBef>
-                <a:spcPts val="0"/>
-              </a:spcBef>
-              <a:spcAft>
-                <a:spcPts val="0"/>
-              </a:spcAft>
-              <a:buNone/>
-            </a:pPr>
-            <a:r>
-              <a:t/>
-            </a:r>
-            <a:endParaRPr b="0" i="0" sz="1800" u="none" cap="none" strike="noStrike">
-              <a:solidFill>
-                <a:schemeClr val="dk1"/>
-              </a:solidFill>
-              <a:latin typeface="Calibri"/>
-              <a:ea typeface="Calibri"/>
-              <a:cs typeface="Calibri"/>
-              <a:sym typeface="Calibri"/>
-            </a:endParaRPr>
-          </a:p>
-        </p:txBody>
-      </p:sp>
-      <p:sp>
-        <p:nvSpPr>
-          <p:cNvPr id="248" name="Google Shape;248;p23"/>
-          <p:cNvSpPr/>
-          <p:nvPr/>
-        </p:nvSpPr>
-        <p:spPr>
-          <a:xfrm>
-            <a:off x="581025" y="3319611"/>
-            <a:ext cx="11029950" cy="784770"/>
-          </a:xfrm>
-          <a:prstGeom prst="rect">
-            <a:avLst/>
-          </a:prstGeom>
-          <a:noFill/>
-          <a:ln>
-            <a:noFill/>
-          </a:ln>
-        </p:spPr>
-        <p:txBody>
-          <a:bodyPr anchorCtr="0" anchor="ctr" bIns="45700" lIns="91425" spcFirstLastPara="1" rIns="91425" wrap="square" tIns="45700">
-            <a:noAutofit/>
-          </a:bodyPr>
-          <a:lstStyle/>
-          <a:p>
-            <a:pPr indent="0" lvl="0" marL="0" marR="0" rtl="0" algn="ctr">
-              <a:spcBef>
-                <a:spcPts val="0"/>
-              </a:spcBef>
-              <a:spcAft>
-                <a:spcPts val="0"/>
-              </a:spcAft>
-              <a:buNone/>
-            </a:pPr>
-            <a:r>
-              <a:t/>
-            </a:r>
-            <a:endParaRPr b="0" i="0" sz="1800" u="none" cap="none" strike="noStrike">
-              <a:solidFill>
-                <a:schemeClr val="dk1"/>
-              </a:solidFill>
-              <a:latin typeface="Calibri"/>
-              <a:ea typeface="Calibri"/>
-              <a:cs typeface="Calibri"/>
-              <a:sym typeface="Calibri"/>
-            </a:endParaRPr>
-          </a:p>
-        </p:txBody>
-      </p:sp>
-      <p:sp>
-        <p:nvSpPr>
-          <p:cNvPr id="249" name="Google Shape;249;p23"/>
-          <p:cNvSpPr/>
-          <p:nvPr/>
-        </p:nvSpPr>
-        <p:spPr>
-          <a:xfrm>
-            <a:off x="581025" y="4104382"/>
-            <a:ext cx="11029950" cy="784770"/>
-          </a:xfrm>
-          <a:prstGeom prst="rect">
-            <a:avLst/>
-          </a:prstGeom>
-          <a:noFill/>
-          <a:ln>
-            <a:noFill/>
-          </a:ln>
-        </p:spPr>
-        <p:txBody>
-          <a:bodyPr anchorCtr="0" anchor="ctr" bIns="45700" lIns="91425" spcFirstLastPara="1" rIns="91425" wrap="square" tIns="45700">
-            <a:noAutofit/>
-          </a:bodyPr>
-          <a:lstStyle/>
-          <a:p>
-            <a:pPr indent="0" lvl="0" marL="0" marR="0" rtl="0" algn="ctr">
-              <a:spcBef>
-                <a:spcPts val="0"/>
-              </a:spcBef>
-              <a:spcAft>
-                <a:spcPts val="0"/>
-              </a:spcAft>
-              <a:buNone/>
-            </a:pPr>
-            <a:r>
-              <a:t/>
-            </a:r>
-            <a:endParaRPr b="0" i="0" sz="1800" u="none" cap="none" strike="noStrike">
-              <a:solidFill>
-                <a:schemeClr val="dk1"/>
-              </a:solidFill>
-              <a:latin typeface="Calibri"/>
-              <a:ea typeface="Calibri"/>
-              <a:cs typeface="Calibri"/>
-              <a:sym typeface="Calibri"/>
-            </a:endParaRPr>
-          </a:p>
-        </p:txBody>
-      </p:sp>
-      <p:sp>
-        <p:nvSpPr>
-          <p:cNvPr id="250" name="Google Shape;250;p23"/>
-          <p:cNvSpPr/>
-          <p:nvPr/>
-        </p:nvSpPr>
-        <p:spPr>
-          <a:xfrm>
-            <a:off x="581025" y="4889152"/>
-            <a:ext cx="11029950" cy="784770"/>
-          </a:xfrm>
-          <a:prstGeom prst="rect">
-            <a:avLst/>
-          </a:prstGeom>
-          <a:noFill/>
-          <a:ln>
-            <a:noFill/>
-          </a:ln>
-        </p:spPr>
-        <p:txBody>
-          <a:bodyPr anchorCtr="0" anchor="ctr" bIns="45700" lIns="91425" spcFirstLastPara="1" rIns="91425" wrap="square" tIns="45700">
-            <a:noAutofit/>
-          </a:bodyPr>
-          <a:lstStyle/>
-          <a:p>
-            <a:pPr indent="0" lvl="0" marL="0" marR="0" rtl="0" algn="ctr">
-              <a:spcBef>
-                <a:spcPts val="0"/>
-              </a:spcBef>
-              <a:spcAft>
-                <a:spcPts val="0"/>
-              </a:spcAft>
-              <a:buNone/>
-            </a:pPr>
-            <a:r>
-              <a:t/>
-            </a:r>
-            <a:endParaRPr b="0" i="0" sz="1800" u="none" cap="none" strike="noStrike">
-              <a:solidFill>
-                <a:schemeClr val="dk1"/>
-              </a:solidFill>
-              <a:latin typeface="Calibri"/>
-              <a:ea typeface="Calibri"/>
-              <a:cs typeface="Calibri"/>
-              <a:sym typeface="Calibri"/>
-            </a:endParaRPr>
-          </a:p>
-        </p:txBody>
-      </p:sp>
-      <p:sp>
-        <p:nvSpPr>
-          <p:cNvPr id="251" name="Google Shape;251;p23"/>
-          <p:cNvSpPr/>
-          <p:nvPr/>
-        </p:nvSpPr>
-        <p:spPr>
-          <a:xfrm>
-            <a:off x="581025" y="2525315"/>
-            <a:ext cx="11029950" cy="9525"/>
-          </a:xfrm>
-          <a:prstGeom prst="rect">
-            <a:avLst/>
-          </a:prstGeom>
-          <a:solidFill>
-            <a:srgbClr val="757575"/>
-          </a:solidFill>
-          <a:ln>
-            <a:noFill/>
-          </a:ln>
-        </p:spPr>
-        <p:txBody>
-          <a:bodyPr anchorCtr="0" anchor="ctr" bIns="45700" lIns="91425" spcFirstLastPara="1" rIns="91425" wrap="square" tIns="45700">
-            <a:noAutofit/>
-          </a:bodyPr>
-          <a:lstStyle/>
-          <a:p>
-            <a:pPr indent="0" lvl="0" marL="0" marR="0" rtl="0" algn="ctr">
-              <a:spcBef>
-                <a:spcPts val="0"/>
-              </a:spcBef>
-              <a:spcAft>
-                <a:spcPts val="0"/>
-              </a:spcAft>
-              <a:buNone/>
-            </a:pPr>
-            <a:r>
-              <a:t/>
-            </a:r>
-            <a:endParaRPr b="0" i="0" sz="1800" u="none" cap="none" strike="noStrike">
-              <a:solidFill>
-                <a:schemeClr val="dk1"/>
-              </a:solidFill>
-              <a:latin typeface="Calibri"/>
-              <a:ea typeface="Calibri"/>
-              <a:cs typeface="Calibri"/>
-              <a:sym typeface="Calibri"/>
-            </a:endParaRPr>
-          </a:p>
-        </p:txBody>
-      </p:sp>
-      <p:sp>
-        <p:nvSpPr>
-          <p:cNvPr id="252" name="Google Shape;252;p23"/>
-          <p:cNvSpPr/>
-          <p:nvPr/>
-        </p:nvSpPr>
-        <p:spPr>
-          <a:xfrm>
-            <a:off x="581025" y="2525315"/>
-            <a:ext cx="11029950" cy="9525"/>
-          </a:xfrm>
-          <a:prstGeom prst="rect">
-            <a:avLst/>
-          </a:prstGeom>
-          <a:solidFill>
-            <a:srgbClr val="757575"/>
-          </a:solidFill>
-          <a:ln>
-            <a:noFill/>
-          </a:ln>
-        </p:spPr>
-        <p:txBody>
-          <a:bodyPr anchorCtr="0" anchor="ctr" bIns="45700" lIns="91425" spcFirstLastPara="1" rIns="91425" wrap="square" tIns="45700">
-            <a:noAutofit/>
-          </a:bodyPr>
-          <a:lstStyle/>
-          <a:p>
-            <a:pPr indent="0" lvl="0" marL="0" marR="0" rtl="0" algn="ctr">
-              <a:spcBef>
-                <a:spcPts val="0"/>
-              </a:spcBef>
-              <a:spcAft>
-                <a:spcPts val="0"/>
-              </a:spcAft>
-              <a:buNone/>
-            </a:pPr>
-            <a:r>
-              <a:t/>
-            </a:r>
-            <a:endParaRPr b="0" i="0" sz="1800" u="none" cap="none" strike="noStrike">
-              <a:solidFill>
-                <a:schemeClr val="dk1"/>
-              </a:solidFill>
-              <a:latin typeface="Calibri"/>
-              <a:ea typeface="Calibri"/>
-              <a:cs typeface="Calibri"/>
-              <a:sym typeface="Calibri"/>
-            </a:endParaRPr>
-          </a:p>
-        </p:txBody>
-      </p:sp>
-      <p:sp>
-        <p:nvSpPr>
-          <p:cNvPr id="253" name="Google Shape;253;p23"/>
-          <p:cNvSpPr/>
-          <p:nvPr/>
-        </p:nvSpPr>
-        <p:spPr>
-          <a:xfrm>
-            <a:off x="581025" y="3310086"/>
-            <a:ext cx="11029950" cy="9525"/>
-          </a:xfrm>
-          <a:prstGeom prst="rect">
-            <a:avLst/>
-          </a:prstGeom>
-          <a:solidFill>
-            <a:srgbClr val="757575"/>
-          </a:solidFill>
-          <a:ln>
-            <a:noFill/>
-          </a:ln>
-        </p:spPr>
-        <p:txBody>
-          <a:bodyPr anchorCtr="0" anchor="ctr" bIns="45700" lIns="91425" spcFirstLastPara="1" rIns="91425" wrap="square" tIns="45700">
-            <a:noAutofit/>
-          </a:bodyPr>
-          <a:lstStyle/>
-          <a:p>
-            <a:pPr indent="0" lvl="0" marL="0" marR="0" rtl="0" algn="ctr">
-              <a:spcBef>
-                <a:spcPts val="0"/>
-              </a:spcBef>
-              <a:spcAft>
-                <a:spcPts val="0"/>
-              </a:spcAft>
-              <a:buNone/>
-            </a:pPr>
-            <a:r>
-              <a:t/>
-            </a:r>
-            <a:endParaRPr b="0" i="0" sz="1800" u="none" cap="none" strike="noStrike">
-              <a:solidFill>
-                <a:schemeClr val="dk1"/>
-              </a:solidFill>
-              <a:latin typeface="Calibri"/>
-              <a:ea typeface="Calibri"/>
-              <a:cs typeface="Calibri"/>
-              <a:sym typeface="Calibri"/>
-            </a:endParaRPr>
-          </a:p>
-        </p:txBody>
-      </p:sp>
-      <p:sp>
-        <p:nvSpPr>
-          <p:cNvPr id="254" name="Google Shape;254;p23"/>
-          <p:cNvSpPr/>
-          <p:nvPr/>
-        </p:nvSpPr>
-        <p:spPr>
-          <a:xfrm>
-            <a:off x="581025" y="3310086"/>
-            <a:ext cx="11029950" cy="9525"/>
-          </a:xfrm>
-          <a:prstGeom prst="rect">
-            <a:avLst/>
-          </a:prstGeom>
-          <a:solidFill>
-            <a:srgbClr val="757575"/>
-          </a:solidFill>
-          <a:ln>
-            <a:noFill/>
-          </a:ln>
-        </p:spPr>
-        <p:txBody>
-          <a:bodyPr anchorCtr="0" anchor="ctr" bIns="45700" lIns="91425" spcFirstLastPara="1" rIns="91425" wrap="square" tIns="45700">
-            <a:noAutofit/>
-          </a:bodyPr>
-          <a:lstStyle/>
-          <a:p>
-            <a:pPr indent="0" lvl="0" marL="0" marR="0" rtl="0" algn="ctr">
-              <a:spcBef>
-                <a:spcPts val="0"/>
-              </a:spcBef>
-              <a:spcAft>
-                <a:spcPts val="0"/>
-              </a:spcAft>
-              <a:buNone/>
-            </a:pPr>
-            <a:r>
-              <a:t/>
-            </a:r>
-            <a:endParaRPr b="0" i="0" sz="1800" u="none" cap="none" strike="noStrike">
-              <a:solidFill>
-                <a:schemeClr val="dk1"/>
-              </a:solidFill>
-              <a:latin typeface="Calibri"/>
-              <a:ea typeface="Calibri"/>
-              <a:cs typeface="Calibri"/>
-              <a:sym typeface="Calibri"/>
-            </a:endParaRPr>
-          </a:p>
-        </p:txBody>
-      </p:sp>
-      <p:sp>
-        <p:nvSpPr>
-          <p:cNvPr id="255" name="Google Shape;255;p23"/>
-          <p:cNvSpPr/>
-          <p:nvPr/>
-        </p:nvSpPr>
-        <p:spPr>
-          <a:xfrm>
-            <a:off x="581025" y="4094857"/>
-            <a:ext cx="11029950" cy="9525"/>
-          </a:xfrm>
-          <a:prstGeom prst="rect">
-            <a:avLst/>
-          </a:prstGeom>
-          <a:solidFill>
-            <a:srgbClr val="757575"/>
-          </a:solidFill>
-          <a:ln>
-            <a:noFill/>
-          </a:ln>
-        </p:spPr>
-        <p:txBody>
-          <a:bodyPr anchorCtr="0" anchor="ctr" bIns="45700" lIns="91425" spcFirstLastPara="1" rIns="91425" wrap="square" tIns="45700">
-            <a:noAutofit/>
-          </a:bodyPr>
-          <a:lstStyle/>
-          <a:p>
-            <a:pPr indent="0" lvl="0" marL="0" marR="0" rtl="0" algn="ctr">
-              <a:spcBef>
-                <a:spcPts val="0"/>
-              </a:spcBef>
-              <a:spcAft>
-                <a:spcPts val="0"/>
-              </a:spcAft>
-              <a:buNone/>
-            </a:pPr>
-            <a:r>
-              <a:t/>
-            </a:r>
-            <a:endParaRPr b="0" i="0" sz="1800" u="none" cap="none" strike="noStrike">
-              <a:solidFill>
-                <a:schemeClr val="dk1"/>
-              </a:solidFill>
-              <a:latin typeface="Calibri"/>
-              <a:ea typeface="Calibri"/>
-              <a:cs typeface="Calibri"/>
-              <a:sym typeface="Calibri"/>
-            </a:endParaRPr>
-          </a:p>
-        </p:txBody>
-      </p:sp>
-      <p:sp>
-        <p:nvSpPr>
-          <p:cNvPr id="256" name="Google Shape;256;p23"/>
-          <p:cNvSpPr/>
-          <p:nvPr/>
-        </p:nvSpPr>
-        <p:spPr>
-          <a:xfrm>
-            <a:off x="581025" y="4094857"/>
-            <a:ext cx="11029950" cy="9525"/>
-          </a:xfrm>
-          <a:prstGeom prst="rect">
-            <a:avLst/>
-          </a:prstGeom>
-          <a:solidFill>
-            <a:srgbClr val="757575"/>
-          </a:solidFill>
-          <a:ln>
-            <a:noFill/>
-          </a:ln>
-        </p:spPr>
-        <p:txBody>
-          <a:bodyPr anchorCtr="0" anchor="ctr" bIns="45700" lIns="91425" spcFirstLastPara="1" rIns="91425" wrap="square" tIns="45700">
-            <a:noAutofit/>
-          </a:bodyPr>
-          <a:lstStyle/>
-          <a:p>
-            <a:pPr indent="0" lvl="0" marL="0" marR="0" rtl="0" algn="ctr">
-              <a:spcBef>
-                <a:spcPts val="0"/>
-              </a:spcBef>
-              <a:spcAft>
-                <a:spcPts val="0"/>
-              </a:spcAft>
-              <a:buNone/>
-            </a:pPr>
-            <a:r>
-              <a:t/>
-            </a:r>
-            <a:endParaRPr b="0" i="0" sz="1800" u="none" cap="none" strike="noStrike">
-              <a:solidFill>
-                <a:schemeClr val="dk1"/>
-              </a:solidFill>
-              <a:latin typeface="Calibri"/>
-              <a:ea typeface="Calibri"/>
-              <a:cs typeface="Calibri"/>
-              <a:sym typeface="Calibri"/>
-            </a:endParaRPr>
-          </a:p>
-        </p:txBody>
-      </p:sp>
-      <p:sp>
-        <p:nvSpPr>
-          <p:cNvPr id="257" name="Google Shape;257;p23"/>
-          <p:cNvSpPr/>
-          <p:nvPr/>
-        </p:nvSpPr>
-        <p:spPr>
-          <a:xfrm>
-            <a:off x="581025" y="4879627"/>
-            <a:ext cx="11029950" cy="9525"/>
-          </a:xfrm>
-          <a:prstGeom prst="rect">
-            <a:avLst/>
-          </a:prstGeom>
-          <a:solidFill>
-            <a:srgbClr val="757575"/>
-          </a:solidFill>
-          <a:ln>
-            <a:noFill/>
-          </a:ln>
-        </p:spPr>
-        <p:txBody>
-          <a:bodyPr anchorCtr="0" anchor="ctr" bIns="45700" lIns="91425" spcFirstLastPara="1" rIns="91425" wrap="square" tIns="45700">
-            <a:noAutofit/>
-          </a:bodyPr>
-          <a:lstStyle/>
-          <a:p>
-            <a:pPr indent="0" lvl="0" marL="0" marR="0" rtl="0" algn="ctr">
-              <a:spcBef>
-                <a:spcPts val="0"/>
-              </a:spcBef>
-              <a:spcAft>
-                <a:spcPts val="0"/>
-              </a:spcAft>
-              <a:buNone/>
-            </a:pPr>
-            <a:r>
-              <a:t/>
-            </a:r>
-            <a:endParaRPr b="0" i="0" sz="1800" u="none" cap="none" strike="noStrike">
-              <a:solidFill>
-                <a:schemeClr val="dk1"/>
-              </a:solidFill>
-              <a:latin typeface="Calibri"/>
-              <a:ea typeface="Calibri"/>
-              <a:cs typeface="Calibri"/>
-              <a:sym typeface="Calibri"/>
-            </a:endParaRPr>
-          </a:p>
-        </p:txBody>
-      </p:sp>
-      <p:sp>
-        <p:nvSpPr>
-          <p:cNvPr id="258" name="Google Shape;258;p23"/>
-          <p:cNvSpPr/>
-          <p:nvPr/>
-        </p:nvSpPr>
-        <p:spPr>
-          <a:xfrm>
-            <a:off x="581025" y="4879627"/>
-            <a:ext cx="11029950" cy="9525"/>
-          </a:xfrm>
-          <a:prstGeom prst="rect">
-            <a:avLst/>
-          </a:prstGeom>
-          <a:solidFill>
-            <a:srgbClr val="757575"/>
-          </a:solidFill>
-          <a:ln>
-            <a:noFill/>
-          </a:ln>
-        </p:spPr>
-        <p:txBody>
-          <a:bodyPr anchorCtr="0" anchor="ctr" bIns="45700" lIns="91425" spcFirstLastPara="1" rIns="91425" wrap="square" tIns="45700">
-            <a:noAutofit/>
-          </a:bodyPr>
-          <a:lstStyle/>
-          <a:p>
-            <a:pPr indent="0" lvl="0" marL="0" marR="0" rtl="0" algn="ctr">
-              <a:spcBef>
-                <a:spcPts val="0"/>
-              </a:spcBef>
-              <a:spcAft>
-                <a:spcPts val="0"/>
-              </a:spcAft>
-              <a:buNone/>
-            </a:pPr>
-            <a:r>
-              <a:t/>
-            </a:r>
-            <a:endParaRPr b="0" i="0" sz="1800" u="none" cap="none" strike="noStrike">
-              <a:solidFill>
-                <a:schemeClr val="dk1"/>
-              </a:solidFill>
-              <a:latin typeface="Calibri"/>
-              <a:ea typeface="Calibri"/>
-              <a:cs typeface="Calibri"/>
-              <a:sym typeface="Calibri"/>
-            </a:endParaRPr>
-          </a:p>
-        </p:txBody>
-      </p:sp>
-      <p:sp>
-        <p:nvSpPr>
-          <p:cNvPr id="259" name="Google Shape;259;p23"/>
-          <p:cNvSpPr/>
-          <p:nvPr/>
-        </p:nvSpPr>
-        <p:spPr>
-          <a:xfrm>
-            <a:off x="581025" y="5664398"/>
-            <a:ext cx="11029950" cy="9525"/>
-          </a:xfrm>
-          <a:prstGeom prst="rect">
-            <a:avLst/>
-          </a:prstGeom>
-          <a:solidFill>
-            <a:srgbClr val="757575"/>
-          </a:solidFill>
-          <a:ln>
-            <a:noFill/>
-          </a:ln>
-        </p:spPr>
-        <p:txBody>
-          <a:bodyPr anchorCtr="0" anchor="ctr" bIns="45700" lIns="91425" spcFirstLastPara="1" rIns="91425" wrap="square" tIns="45700">
-            <a:noAutofit/>
-          </a:bodyPr>
-          <a:lstStyle/>
-          <a:p>
-            <a:pPr indent="0" lvl="0" marL="0" marR="0" rtl="0" algn="ctr">
-              <a:spcBef>
-                <a:spcPts val="0"/>
-              </a:spcBef>
-              <a:spcAft>
-                <a:spcPts val="0"/>
-              </a:spcAft>
-              <a:buNone/>
-            </a:pPr>
-            <a:r>
-              <a:t/>
-            </a:r>
-            <a:endParaRPr b="0" i="0" sz="1800" u="none" cap="none" strike="noStrike">
-              <a:solidFill>
-                <a:schemeClr val="dk1"/>
-              </a:solidFill>
-              <a:latin typeface="Calibri"/>
-              <a:ea typeface="Calibri"/>
-              <a:cs typeface="Calibri"/>
-              <a:sym typeface="Calibri"/>
-            </a:endParaRPr>
-          </a:p>
-        </p:txBody>
-      </p:sp>
-      <p:sp>
-        <p:nvSpPr>
-          <p:cNvPr id="260" name="Google Shape;260;p23"/>
-          <p:cNvSpPr/>
-          <p:nvPr/>
-        </p:nvSpPr>
-        <p:spPr>
-          <a:xfrm>
-            <a:off x="581025" y="5664398"/>
-            <a:ext cx="11029950" cy="9525"/>
-          </a:xfrm>
-          <a:prstGeom prst="rect">
-            <a:avLst/>
-          </a:prstGeom>
-          <a:solidFill>
-            <a:srgbClr val="757575"/>
-          </a:solidFill>
-          <a:ln>
-            <a:noFill/>
-          </a:ln>
-        </p:spPr>
-        <p:txBody>
-          <a:bodyPr anchorCtr="0" anchor="ctr" bIns="45700" lIns="91425" spcFirstLastPara="1" rIns="91425" wrap="square" tIns="45700">
-            <a:noAutofit/>
-          </a:bodyPr>
-          <a:lstStyle/>
-          <a:p>
-            <a:pPr indent="0" lvl="0" marL="0" marR="0" rtl="0" algn="ctr">
-              <a:spcBef>
-                <a:spcPts val="0"/>
-              </a:spcBef>
-              <a:spcAft>
-                <a:spcPts val="0"/>
-              </a:spcAft>
-              <a:buNone/>
-            </a:pPr>
-            <a:r>
-              <a:t/>
-            </a:r>
-            <a:endParaRPr b="0" i="0" sz="1800" u="none" cap="none" strike="noStrike">
-              <a:solidFill>
-                <a:schemeClr val="dk1"/>
-              </a:solidFill>
-              <a:latin typeface="Calibri"/>
-              <a:ea typeface="Calibri"/>
-              <a:cs typeface="Calibri"/>
-              <a:sym typeface="Calibri"/>
-            </a:endParaRPr>
-          </a:p>
-        </p:txBody>
-      </p:sp>
-      <p:pic>
-        <p:nvPicPr>
-          <p:cNvPr descr="image.png" id="261" name="Google Shape;261;p23"/>
-          <p:cNvPicPr preferRelativeResize="0"/>
-          <p:nvPr/>
-        </p:nvPicPr>
-        <p:blipFill rotWithShape="1">
-          <a:blip r:embed="rId4">
-            <a:alphaModFix/>
-          </a:blip>
-          <a:srcRect b="0" l="0" r="0" t="0"/>
-          <a:stretch/>
-        </p:blipFill>
-        <p:spPr>
-          <a:xfrm>
-            <a:off x="581025" y="1800522"/>
-            <a:ext cx="857250" cy="476250"/>
-          </a:xfrm>
-          <a:prstGeom prst="rect">
-            <a:avLst/>
-          </a:prstGeom>
-          <a:noFill/>
-          <a:ln>
-            <a:noFill/>
-          </a:ln>
-        </p:spPr>
-      </p:pic>
-      <p:sp>
-        <p:nvSpPr>
-          <p:cNvPr id="262" name="Google Shape;262;p23"/>
-          <p:cNvSpPr txBox="1"/>
-          <p:nvPr/>
-        </p:nvSpPr>
-        <p:spPr>
-          <a:xfrm>
-            <a:off x="1676400" y="1694854"/>
-            <a:ext cx="9934575" cy="396180"/>
-          </a:xfrm>
-          <a:prstGeom prst="rect">
-            <a:avLst/>
-          </a:prstGeom>
-          <a:noFill/>
-          <a:ln>
-            <a:noFill/>
-          </a:ln>
-        </p:spPr>
-        <p:txBody>
-          <a:bodyPr anchorCtr="0" anchor="t" bIns="0" lIns="0" spcFirstLastPara="1" rIns="0" wrap="square" tIns="0">
-            <a:spAutoFit/>
-          </a:bodyPr>
-          <a:lstStyle/>
-          <a:p>
-            <a:pPr indent="0" lvl="0" marL="0" marR="0" rtl="0" algn="l">
-              <a:lnSpc>
-                <a:spcPct val="160000"/>
-              </a:lnSpc>
-              <a:spcBef>
-                <a:spcPts val="0"/>
-              </a:spcBef>
-              <a:spcAft>
-                <a:spcPts val="0"/>
-              </a:spcAft>
-              <a:buNone/>
-            </a:pPr>
-            <a:r>
-              <a:rPr b="0" i="0" lang="en-US" sz="975" u="none" cap="none" strike="noStrike">
-                <a:solidFill>
-                  <a:srgbClr val="A3A3A3"/>
-                </a:solidFill>
-                <a:latin typeface="Urbanist"/>
-                <a:ea typeface="Urbanist"/>
-                <a:cs typeface="Urbanist"/>
-                <a:sym typeface="Urbanist"/>
-              </a:rPr>
-              <a:t>https://media.istockphoto.com/id/1351817308/vector/cyber-network-vision-digital-communication-cloud.jpg?s=612x612&amp;w=0&amp;k=20&amp;c=gvc7_G0DTcU5ulKRA54cBJ7fymmXlMddWGqpi8RKdok=</a:t>
-            </a:r>
-            <a:endParaRPr/>
-          </a:p>
-        </p:txBody>
-      </p:sp>
-      <p:sp>
-        <p:nvSpPr>
-          <p:cNvPr id="263" name="Google Shape;263;p23"/>
-          <p:cNvSpPr txBox="1"/>
-          <p:nvPr/>
-        </p:nvSpPr>
-        <p:spPr>
-          <a:xfrm>
-            <a:off x="1676400" y="2138660"/>
-            <a:ext cx="9934575" cy="243780"/>
-          </a:xfrm>
-          <a:prstGeom prst="rect">
-            <a:avLst/>
-          </a:prstGeom>
-          <a:noFill/>
-          <a:ln>
-            <a:noFill/>
-          </a:ln>
-        </p:spPr>
-        <p:txBody>
-          <a:bodyPr anchorCtr="0" anchor="t" bIns="0" lIns="0" spcFirstLastPara="1" rIns="0" wrap="square" tIns="0">
-            <a:spAutoFit/>
-          </a:bodyPr>
-          <a:lstStyle/>
-          <a:p>
-            <a:pPr indent="0" lvl="0" marL="0" marR="0" rtl="0" algn="l">
-              <a:lnSpc>
-                <a:spcPct val="160000"/>
-              </a:lnSpc>
-              <a:spcBef>
-                <a:spcPts val="0"/>
-              </a:spcBef>
-              <a:spcAft>
-                <a:spcPts val="0"/>
-              </a:spcAft>
-              <a:buNone/>
-            </a:pPr>
-            <a:r>
-              <a:rPr b="0" i="0" lang="en-US" sz="1200" u="none" cap="none" strike="noStrike">
-                <a:solidFill>
-                  <a:srgbClr val="A3A3A3"/>
-                </a:solidFill>
-                <a:latin typeface="Urbanist"/>
-                <a:ea typeface="Urbanist"/>
-                <a:cs typeface="Urbanist"/>
-                <a:sym typeface="Urbanist"/>
-              </a:rPr>
-              <a:t>Source: </a:t>
-            </a:r>
-            <a:r>
-              <a:rPr b="0" i="0" lang="en-US" sz="1200" u="none" cap="none" strike="noStrike">
-                <a:solidFill>
-                  <a:srgbClr val="4F46E5"/>
-                </a:solidFill>
-                <a:latin typeface="Urbanist"/>
-                <a:ea typeface="Urbanist"/>
-                <a:cs typeface="Urbanist"/>
-                <a:sym typeface="Urbanist"/>
-              </a:rPr>
-              <a:t>www.istockphoto.com</a:t>
-            </a:r>
-            <a:endParaRPr/>
-          </a:p>
-        </p:txBody>
-      </p:sp>
-      <p:pic>
-        <p:nvPicPr>
-          <p:cNvPr descr="image.png" id="264" name="Google Shape;264;p23"/>
-          <p:cNvPicPr preferRelativeResize="0"/>
-          <p:nvPr/>
-        </p:nvPicPr>
-        <p:blipFill rotWithShape="1">
-          <a:blip r:embed="rId5">
-            <a:alphaModFix/>
-          </a:blip>
-          <a:srcRect b="0" l="0" r="0" t="0"/>
-          <a:stretch/>
-        </p:blipFill>
-        <p:spPr>
-          <a:xfrm>
-            <a:off x="581025" y="2684264"/>
-            <a:ext cx="857250" cy="476250"/>
-          </a:xfrm>
-          <a:prstGeom prst="rect">
-            <a:avLst/>
-          </a:prstGeom>
-          <a:noFill/>
-          <a:ln>
-            <a:noFill/>
-          </a:ln>
-        </p:spPr>
-      </p:pic>
-      <p:sp>
-        <p:nvSpPr>
-          <p:cNvPr id="265" name="Google Shape;265;p23"/>
-          <p:cNvSpPr txBox="1"/>
-          <p:nvPr/>
-        </p:nvSpPr>
-        <p:spPr>
-          <a:xfrm>
-            <a:off x="1676400" y="2677715"/>
-            <a:ext cx="9934575" cy="198090"/>
-          </a:xfrm>
-          <a:prstGeom prst="rect">
-            <a:avLst/>
-          </a:prstGeom>
-          <a:noFill/>
-          <a:ln>
-            <a:noFill/>
-          </a:ln>
-        </p:spPr>
-        <p:txBody>
-          <a:bodyPr anchorCtr="0" anchor="t" bIns="0" lIns="0" spcFirstLastPara="1" rIns="0" wrap="square" tIns="0">
-            <a:spAutoFit/>
-          </a:bodyPr>
-          <a:lstStyle/>
-          <a:p>
-            <a:pPr indent="0" lvl="0" marL="0" marR="0" rtl="0" algn="l">
-              <a:lnSpc>
-                <a:spcPct val="160000"/>
-              </a:lnSpc>
-              <a:spcBef>
-                <a:spcPts val="0"/>
-              </a:spcBef>
-              <a:spcAft>
-                <a:spcPts val="0"/>
-              </a:spcAft>
-              <a:buNone/>
-            </a:pPr>
-            <a:r>
-              <a:rPr b="0" i="0" lang="en-US" sz="975" u="none" cap="none" strike="noStrike">
-                <a:solidFill>
-                  <a:srgbClr val="A3A3A3"/>
-                </a:solidFill>
-                <a:latin typeface="Urbanist"/>
-                <a:ea typeface="Urbanist"/>
-                <a:cs typeface="Urbanist"/>
-                <a:sym typeface="Urbanist"/>
-              </a:rPr>
-              <a:t>https://static1.gensler.com/uploads/image/106927/1779399209087/project-convergence-hall-1024x576.jpg</a:t>
-            </a:r>
-            <a:endParaRPr/>
-          </a:p>
-        </p:txBody>
-      </p:sp>
-      <p:sp>
-        <p:nvSpPr>
-          <p:cNvPr id="266" name="Google Shape;266;p23"/>
-          <p:cNvSpPr txBox="1"/>
-          <p:nvPr/>
-        </p:nvSpPr>
-        <p:spPr>
-          <a:xfrm>
-            <a:off x="1676400" y="2923430"/>
-            <a:ext cx="9934575" cy="243780"/>
-          </a:xfrm>
-          <a:prstGeom prst="rect">
-            <a:avLst/>
-          </a:prstGeom>
-          <a:noFill/>
-          <a:ln>
-            <a:noFill/>
-          </a:ln>
-        </p:spPr>
-        <p:txBody>
-          <a:bodyPr anchorCtr="0" anchor="t" bIns="0" lIns="0" spcFirstLastPara="1" rIns="0" wrap="square" tIns="0">
-            <a:spAutoFit/>
-          </a:bodyPr>
-          <a:lstStyle/>
-          <a:p>
-            <a:pPr indent="0" lvl="0" marL="0" marR="0" rtl="0" algn="l">
-              <a:lnSpc>
-                <a:spcPct val="160000"/>
-              </a:lnSpc>
-              <a:spcBef>
-                <a:spcPts val="0"/>
-              </a:spcBef>
-              <a:spcAft>
-                <a:spcPts val="0"/>
-              </a:spcAft>
-              <a:buNone/>
-            </a:pPr>
-            <a:r>
-              <a:rPr b="0" i="0" lang="en-US" sz="1200" u="none" cap="none" strike="noStrike">
-                <a:solidFill>
-                  <a:srgbClr val="A3A3A3"/>
-                </a:solidFill>
-                <a:latin typeface="Urbanist"/>
-                <a:ea typeface="Urbanist"/>
-                <a:cs typeface="Urbanist"/>
-                <a:sym typeface="Urbanist"/>
-              </a:rPr>
-              <a:t>Source: </a:t>
-            </a:r>
-            <a:r>
-              <a:rPr b="0" i="0" lang="en-US" sz="1200" u="none" cap="none" strike="noStrike">
-                <a:solidFill>
-                  <a:srgbClr val="4F46E5"/>
-                </a:solidFill>
-                <a:latin typeface="Urbanist"/>
-                <a:ea typeface="Urbanist"/>
-                <a:cs typeface="Urbanist"/>
-                <a:sym typeface="Urbanist"/>
-              </a:rPr>
-              <a:t>www.gensler.com</a:t>
-            </a:r>
-            <a:endParaRPr/>
-          </a:p>
-        </p:txBody>
-      </p:sp>
-      <p:pic>
-        <p:nvPicPr>
-          <p:cNvPr descr="image.png" id="267" name="Google Shape;267;p23"/>
-          <p:cNvPicPr preferRelativeResize="0"/>
-          <p:nvPr/>
-        </p:nvPicPr>
-        <p:blipFill rotWithShape="1">
-          <a:blip r:embed="rId6">
-            <a:alphaModFix/>
-          </a:blip>
-          <a:srcRect b="0" l="0" r="0" t="0"/>
-          <a:stretch/>
-        </p:blipFill>
-        <p:spPr>
-          <a:xfrm>
-            <a:off x="581025" y="3469034"/>
-            <a:ext cx="857250" cy="476250"/>
-          </a:xfrm>
-          <a:prstGeom prst="rect">
-            <a:avLst/>
-          </a:prstGeom>
-          <a:noFill/>
-          <a:ln>
-            <a:noFill/>
-          </a:ln>
-        </p:spPr>
-      </p:pic>
-      <p:sp>
-        <p:nvSpPr>
-          <p:cNvPr id="268" name="Google Shape;268;p23"/>
-          <p:cNvSpPr txBox="1"/>
-          <p:nvPr/>
-        </p:nvSpPr>
-        <p:spPr>
-          <a:xfrm>
-            <a:off x="1676400" y="3462486"/>
-            <a:ext cx="9934575" cy="198090"/>
-          </a:xfrm>
-          <a:prstGeom prst="rect">
-            <a:avLst/>
-          </a:prstGeom>
-          <a:noFill/>
-          <a:ln>
-            <a:noFill/>
-          </a:ln>
-        </p:spPr>
-        <p:txBody>
-          <a:bodyPr anchorCtr="0" anchor="t" bIns="0" lIns="0" spcFirstLastPara="1" rIns="0" wrap="square" tIns="0">
-            <a:spAutoFit/>
-          </a:bodyPr>
-          <a:lstStyle/>
-          <a:p>
-            <a:pPr indent="0" lvl="0" marL="0" marR="0" rtl="0" algn="l">
-              <a:lnSpc>
-                <a:spcPct val="160000"/>
-              </a:lnSpc>
-              <a:spcBef>
-                <a:spcPts val="0"/>
-              </a:spcBef>
-              <a:spcAft>
-                <a:spcPts val="0"/>
-              </a:spcAft>
-              <a:buNone/>
-            </a:pPr>
-            <a:r>
-              <a:rPr b="0" i="0" lang="en-US" sz="975" u="none" cap="none" strike="noStrike">
-                <a:solidFill>
-                  <a:srgbClr val="A3A3A3"/>
-                </a:solidFill>
-                <a:latin typeface="Urbanist"/>
-                <a:ea typeface="Urbanist"/>
-                <a:cs typeface="Urbanist"/>
-                <a:sym typeface="Urbanist"/>
-              </a:rPr>
-              <a:t>https://miro.medium.com/v2/resize:fit:1400/1*OP2wAD2SIoZzk0T9S5wUkA.png</a:t>
-            </a:r>
-            <a:endParaRPr/>
-          </a:p>
-        </p:txBody>
-      </p:sp>
-      <p:sp>
-        <p:nvSpPr>
-          <p:cNvPr id="269" name="Google Shape;269;p23"/>
-          <p:cNvSpPr txBox="1"/>
-          <p:nvPr/>
-        </p:nvSpPr>
-        <p:spPr>
-          <a:xfrm>
-            <a:off x="1676400" y="3708201"/>
-            <a:ext cx="9934575" cy="243780"/>
-          </a:xfrm>
-          <a:prstGeom prst="rect">
-            <a:avLst/>
-          </a:prstGeom>
-          <a:noFill/>
-          <a:ln>
-            <a:noFill/>
-          </a:ln>
-        </p:spPr>
-        <p:txBody>
-          <a:bodyPr anchorCtr="0" anchor="t" bIns="0" lIns="0" spcFirstLastPara="1" rIns="0" wrap="square" tIns="0">
-            <a:spAutoFit/>
-          </a:bodyPr>
-          <a:lstStyle/>
-          <a:p>
-            <a:pPr indent="0" lvl="0" marL="0" marR="0" rtl="0" algn="l">
-              <a:lnSpc>
-                <a:spcPct val="160000"/>
-              </a:lnSpc>
-              <a:spcBef>
-                <a:spcPts val="0"/>
-              </a:spcBef>
-              <a:spcAft>
-                <a:spcPts val="0"/>
-              </a:spcAft>
-              <a:buNone/>
-            </a:pPr>
-            <a:r>
-              <a:rPr b="0" i="0" lang="en-US" sz="1200" u="none" cap="none" strike="noStrike">
-                <a:solidFill>
-                  <a:srgbClr val="A3A3A3"/>
-                </a:solidFill>
-                <a:latin typeface="Urbanist"/>
-                <a:ea typeface="Urbanist"/>
-                <a:cs typeface="Urbanist"/>
-                <a:sym typeface="Urbanist"/>
-              </a:rPr>
-              <a:t>Source: </a:t>
-            </a:r>
-            <a:r>
-              <a:rPr b="0" i="0" lang="en-US" sz="1200" u="none" cap="none" strike="noStrike">
-                <a:solidFill>
-                  <a:srgbClr val="4F46E5"/>
-                </a:solidFill>
-                <a:latin typeface="Urbanist"/>
-                <a:ea typeface="Urbanist"/>
-                <a:cs typeface="Urbanist"/>
-                <a:sym typeface="Urbanist"/>
-              </a:rPr>
-              <a:t>itnext.io</a:t>
-            </a:r>
-            <a:endParaRPr/>
-          </a:p>
-        </p:txBody>
-      </p:sp>
-      <p:pic>
-        <p:nvPicPr>
-          <p:cNvPr descr="image.png" id="270" name="Google Shape;270;p23"/>
-          <p:cNvPicPr preferRelativeResize="0"/>
-          <p:nvPr/>
-        </p:nvPicPr>
-        <p:blipFill rotWithShape="1">
-          <a:blip r:embed="rId7">
-            <a:alphaModFix/>
-          </a:blip>
-          <a:srcRect b="0" l="0" r="0" t="0"/>
-          <a:stretch/>
-        </p:blipFill>
-        <p:spPr>
-          <a:xfrm>
-            <a:off x="581025" y="4253805"/>
-            <a:ext cx="857250" cy="476250"/>
-          </a:xfrm>
-          <a:prstGeom prst="rect">
-            <a:avLst/>
-          </a:prstGeom>
-          <a:noFill/>
-          <a:ln>
-            <a:noFill/>
-          </a:ln>
-        </p:spPr>
-      </p:pic>
-      <p:sp>
-        <p:nvSpPr>
-          <p:cNvPr id="271" name="Google Shape;271;p23"/>
-          <p:cNvSpPr txBox="1"/>
-          <p:nvPr/>
-        </p:nvSpPr>
-        <p:spPr>
-          <a:xfrm>
-            <a:off x="1676400" y="4247257"/>
-            <a:ext cx="9934575" cy="198090"/>
-          </a:xfrm>
-          <a:prstGeom prst="rect">
-            <a:avLst/>
-          </a:prstGeom>
-          <a:noFill/>
-          <a:ln>
-            <a:noFill/>
-          </a:ln>
-        </p:spPr>
-        <p:txBody>
-          <a:bodyPr anchorCtr="0" anchor="t" bIns="0" lIns="0" spcFirstLastPara="1" rIns="0" wrap="square" tIns="0">
-            <a:spAutoFit/>
-          </a:bodyPr>
-          <a:lstStyle/>
-          <a:p>
-            <a:pPr indent="0" lvl="0" marL="0" marR="0" rtl="0" algn="l">
-              <a:lnSpc>
-                <a:spcPct val="160000"/>
-              </a:lnSpc>
-              <a:spcBef>
-                <a:spcPts val="0"/>
-              </a:spcBef>
-              <a:spcAft>
-                <a:spcPts val="0"/>
-              </a:spcAft>
-              <a:buNone/>
-            </a:pPr>
-            <a:r>
-              <a:rPr b="0" i="0" lang="en-US" sz="975" u="none" cap="none" strike="noStrike">
-                <a:solidFill>
-                  <a:srgbClr val="A3A3A3"/>
-                </a:solidFill>
-                <a:latin typeface="Urbanist"/>
-                <a:ea typeface="Urbanist"/>
-                <a:cs typeface="Urbanist"/>
-                <a:sym typeface="Urbanist"/>
-              </a:rPr>
-              <a:t>https://img.magnific.com/premium-vector/ai-workspace-dashboard-with-generative-ai-tools-analytics_624163-12275.jpg</a:t>
-            </a:r>
-            <a:endParaRPr/>
-          </a:p>
-        </p:txBody>
-      </p:sp>
-      <p:sp>
-        <p:nvSpPr>
-          <p:cNvPr id="272" name="Google Shape;272;p23"/>
-          <p:cNvSpPr txBox="1"/>
-          <p:nvPr/>
-        </p:nvSpPr>
-        <p:spPr>
-          <a:xfrm>
-            <a:off x="1676400" y="4492972"/>
-            <a:ext cx="9934575" cy="243780"/>
-          </a:xfrm>
-          <a:prstGeom prst="rect">
-            <a:avLst/>
-          </a:prstGeom>
-          <a:noFill/>
-          <a:ln>
-            <a:noFill/>
-          </a:ln>
-        </p:spPr>
-        <p:txBody>
-          <a:bodyPr anchorCtr="0" anchor="t" bIns="0" lIns="0" spcFirstLastPara="1" rIns="0" wrap="square" tIns="0">
-            <a:spAutoFit/>
-          </a:bodyPr>
-          <a:lstStyle/>
-          <a:p>
-            <a:pPr indent="0" lvl="0" marL="0" marR="0" rtl="0" algn="l">
-              <a:lnSpc>
-                <a:spcPct val="160000"/>
-              </a:lnSpc>
-              <a:spcBef>
-                <a:spcPts val="0"/>
-              </a:spcBef>
-              <a:spcAft>
-                <a:spcPts val="0"/>
-              </a:spcAft>
-              <a:buNone/>
-            </a:pPr>
-            <a:r>
-              <a:rPr b="0" i="0" lang="en-US" sz="1200" u="none" cap="none" strike="noStrike">
-                <a:solidFill>
-                  <a:srgbClr val="A3A3A3"/>
-                </a:solidFill>
-                <a:latin typeface="Urbanist"/>
-                <a:ea typeface="Urbanist"/>
-                <a:cs typeface="Urbanist"/>
-                <a:sym typeface="Urbanist"/>
-              </a:rPr>
-              <a:t>Source: </a:t>
-            </a:r>
-            <a:r>
-              <a:rPr b="0" i="0" lang="en-US" sz="1200" u="none" cap="none" strike="noStrike">
-                <a:solidFill>
-                  <a:srgbClr val="4F46E5"/>
-                </a:solidFill>
-                <a:latin typeface="Urbanist"/>
-                <a:ea typeface="Urbanist"/>
-                <a:cs typeface="Urbanist"/>
-                <a:sym typeface="Urbanist"/>
-              </a:rPr>
-              <a:t>www.magnific.com</a:t>
-            </a:r>
-            <a:endParaRPr/>
-          </a:p>
-        </p:txBody>
-      </p:sp>
-      <p:pic>
-        <p:nvPicPr>
-          <p:cNvPr descr="image.png" id="273" name="Google Shape;273;p23"/>
-          <p:cNvPicPr preferRelativeResize="0"/>
-          <p:nvPr/>
-        </p:nvPicPr>
-        <p:blipFill rotWithShape="1">
-          <a:blip r:embed="rId8">
-            <a:alphaModFix/>
-          </a:blip>
-          <a:srcRect b="0" l="0" r="0" t="0"/>
-          <a:stretch/>
-        </p:blipFill>
-        <p:spPr>
-          <a:xfrm>
-            <a:off x="581025" y="5038576"/>
-            <a:ext cx="857250" cy="476250"/>
-          </a:xfrm>
-          <a:prstGeom prst="rect">
-            <a:avLst/>
-          </a:prstGeom>
-          <a:noFill/>
-          <a:ln>
-            <a:noFill/>
-          </a:ln>
-        </p:spPr>
-      </p:pic>
-      <p:sp>
-        <p:nvSpPr>
-          <p:cNvPr id="274" name="Google Shape;274;p23"/>
-          <p:cNvSpPr txBox="1"/>
-          <p:nvPr/>
-        </p:nvSpPr>
-        <p:spPr>
-          <a:xfrm>
-            <a:off x="1676400" y="5032027"/>
-            <a:ext cx="9934575" cy="198090"/>
-          </a:xfrm>
-          <a:prstGeom prst="rect">
-            <a:avLst/>
-          </a:prstGeom>
-          <a:noFill/>
-          <a:ln>
-            <a:noFill/>
-          </a:ln>
-        </p:spPr>
-        <p:txBody>
-          <a:bodyPr anchorCtr="0" anchor="t" bIns="0" lIns="0" spcFirstLastPara="1" rIns="0" wrap="square" tIns="0">
-            <a:spAutoFit/>
-          </a:bodyPr>
-          <a:lstStyle/>
-          <a:p>
-            <a:pPr indent="0" lvl="0" marL="0" marR="0" rtl="0" algn="l">
-              <a:lnSpc>
-                <a:spcPct val="160000"/>
-              </a:lnSpc>
-              <a:spcBef>
-                <a:spcPts val="0"/>
-              </a:spcBef>
-              <a:spcAft>
-                <a:spcPts val="0"/>
-              </a:spcAft>
-              <a:buNone/>
-            </a:pPr>
-            <a:r>
-              <a:rPr b="0" i="0" lang="en-US" sz="975" u="none" cap="none" strike="noStrike">
-                <a:solidFill>
-                  <a:srgbClr val="A3A3A3"/>
-                </a:solidFill>
-                <a:latin typeface="Urbanist"/>
-                <a:ea typeface="Urbanist"/>
-                <a:cs typeface="Urbanist"/>
-                <a:sym typeface="Urbanist"/>
-              </a:rPr>
-              <a:t>https://success.outsystems.com/TK_Resource/a69efa31-8bfa-4cad-8045-987a35ad792b</a:t>
-            </a:r>
-            <a:endParaRPr/>
-          </a:p>
-        </p:txBody>
-      </p:sp>
-      <p:sp>
-        <p:nvSpPr>
-          <p:cNvPr id="275" name="Google Shape;275;p23"/>
-          <p:cNvSpPr txBox="1"/>
-          <p:nvPr/>
-        </p:nvSpPr>
-        <p:spPr>
-          <a:xfrm>
-            <a:off x="1676400" y="5277742"/>
-            <a:ext cx="9934575" cy="243780"/>
-          </a:xfrm>
-          <a:prstGeom prst="rect">
-            <a:avLst/>
-          </a:prstGeom>
-          <a:noFill/>
-          <a:ln>
-            <a:noFill/>
-          </a:ln>
-        </p:spPr>
-        <p:txBody>
-          <a:bodyPr anchorCtr="0" anchor="t" bIns="0" lIns="0" spcFirstLastPara="1" rIns="0" wrap="square" tIns="0">
-            <a:spAutoFit/>
-          </a:bodyPr>
-          <a:lstStyle/>
-          <a:p>
-            <a:pPr indent="0" lvl="0" marL="0" marR="0" rtl="0" algn="l">
-              <a:lnSpc>
-                <a:spcPct val="160000"/>
-              </a:lnSpc>
-              <a:spcBef>
-                <a:spcPts val="0"/>
-              </a:spcBef>
-              <a:spcAft>
-                <a:spcPts val="0"/>
-              </a:spcAft>
-              <a:buNone/>
-            </a:pPr>
-            <a:r>
-              <a:rPr b="0" i="0" lang="en-US" sz="1200" u="none" cap="none" strike="noStrike">
-                <a:solidFill>
-                  <a:srgbClr val="A3A3A3"/>
-                </a:solidFill>
-                <a:latin typeface="Urbanist"/>
-                <a:ea typeface="Urbanist"/>
-                <a:cs typeface="Urbanist"/>
-                <a:sym typeface="Urbanist"/>
-              </a:rPr>
-              <a:t>Source: </a:t>
-            </a:r>
-            <a:r>
-              <a:rPr b="0" i="0" lang="en-US" sz="1200" u="none" cap="none" strike="noStrike">
-                <a:solidFill>
-                  <a:srgbClr val="4F46E5"/>
-                </a:solidFill>
-                <a:latin typeface="Urbanist"/>
-                <a:ea typeface="Urbanist"/>
-                <a:cs typeface="Urbanist"/>
-                <a:sym typeface="Urbanist"/>
-              </a:rPr>
-              <a:t>success.outsystems.com</a:t>
-            </a:r>
-            <a:endParaRPr/>
-          </a:p>
-        </p:txBody>
-      </p:sp>
-      <p:pic>
-        <p:nvPicPr>
-          <p:cNvPr descr="image.png" id="276" name="Google Shape;276;p23"/>
-          <p:cNvPicPr preferRelativeResize="0"/>
-          <p:nvPr/>
-        </p:nvPicPr>
-        <p:blipFill rotWithShape="1">
-          <a:blip r:embed="rId9">
-            <a:alphaModFix/>
-          </a:blip>
-          <a:srcRect b="0" l="0" r="0" t="0"/>
-          <a:stretch/>
-        </p:blipFill>
-        <p:spPr>
-          <a:xfrm>
-            <a:off x="581025" y="5823346"/>
-            <a:ext cx="857250" cy="476250"/>
-          </a:xfrm>
-          <a:prstGeom prst="rect">
-            <a:avLst/>
-          </a:prstGeom>
-          <a:noFill/>
-          <a:ln>
-            <a:noFill/>
-          </a:ln>
-        </p:spPr>
-      </p:pic>
-      <p:sp>
-        <p:nvSpPr>
-          <p:cNvPr id="277" name="Google Shape;277;p23"/>
-          <p:cNvSpPr txBox="1"/>
-          <p:nvPr/>
-        </p:nvSpPr>
-        <p:spPr>
-          <a:xfrm>
-            <a:off x="1676400" y="5816798"/>
-            <a:ext cx="9934575" cy="198090"/>
-          </a:xfrm>
-          <a:prstGeom prst="rect">
-            <a:avLst/>
-          </a:prstGeom>
-          <a:noFill/>
-          <a:ln>
-            <a:noFill/>
-          </a:ln>
-        </p:spPr>
-        <p:txBody>
-          <a:bodyPr anchorCtr="0" anchor="t" bIns="0" lIns="0" spcFirstLastPara="1" rIns="0" wrap="square" tIns="0">
-            <a:spAutoFit/>
-          </a:bodyPr>
-          <a:lstStyle/>
-          <a:p>
-            <a:pPr indent="0" lvl="0" marL="0" marR="0" rtl="0" algn="l">
-              <a:lnSpc>
-                <a:spcPct val="160000"/>
-              </a:lnSpc>
-              <a:spcBef>
-                <a:spcPts val="0"/>
-              </a:spcBef>
-              <a:spcAft>
-                <a:spcPts val="0"/>
-              </a:spcAft>
-              <a:buNone/>
-            </a:pPr>
-            <a:r>
-              <a:rPr b="0" i="0" lang="en-US" sz="975" u="none" cap="none" strike="noStrike">
-                <a:solidFill>
-                  <a:srgbClr val="A3A3A3"/>
-                </a:solidFill>
-                <a:latin typeface="Urbanist"/>
-                <a:ea typeface="Urbanist"/>
-                <a:cs typeface="Urbanist"/>
-                <a:sym typeface="Urbanist"/>
-              </a:rPr>
-              <a:t>https://images.presentationgo.com/2025/06/interconnected-digital-network.jpg</a:t>
-            </a:r>
-            <a:endParaRPr/>
-          </a:p>
-        </p:txBody>
-      </p:sp>
-      <p:sp>
-        <p:nvSpPr>
-          <p:cNvPr id="278" name="Google Shape;278;p23"/>
-          <p:cNvSpPr txBox="1"/>
-          <p:nvPr/>
-        </p:nvSpPr>
-        <p:spPr>
-          <a:xfrm>
-            <a:off x="1676400" y="6062513"/>
-            <a:ext cx="9934575" cy="243780"/>
-          </a:xfrm>
-          <a:prstGeom prst="rect">
-            <a:avLst/>
-          </a:prstGeom>
-          <a:noFill/>
-          <a:ln>
-            <a:noFill/>
-          </a:ln>
-        </p:spPr>
-        <p:txBody>
-          <a:bodyPr anchorCtr="0" anchor="t" bIns="0" lIns="0" spcFirstLastPara="1" rIns="0" wrap="square" tIns="0">
-            <a:spAutoFit/>
-          </a:bodyPr>
-          <a:lstStyle/>
-          <a:p>
-            <a:pPr indent="0" lvl="0" marL="0" marR="0" rtl="0" algn="l">
-              <a:lnSpc>
-                <a:spcPct val="160000"/>
-              </a:lnSpc>
-              <a:spcBef>
-                <a:spcPts val="0"/>
-              </a:spcBef>
-              <a:spcAft>
-                <a:spcPts val="0"/>
-              </a:spcAft>
-              <a:buNone/>
-            </a:pPr>
-            <a:r>
-              <a:rPr b="0" i="0" lang="en-US" sz="1200" u="none" cap="none" strike="noStrike">
-                <a:solidFill>
-                  <a:srgbClr val="A3A3A3"/>
-                </a:solidFill>
-                <a:latin typeface="Urbanist"/>
-                <a:ea typeface="Urbanist"/>
-                <a:cs typeface="Urbanist"/>
-                <a:sym typeface="Urbanist"/>
-              </a:rPr>
-              <a:t>Source: </a:t>
-            </a:r>
-            <a:r>
-              <a:rPr b="0" i="0" lang="en-US" sz="1200" u="none" cap="none" strike="noStrike">
-                <a:solidFill>
-                  <a:srgbClr val="4F46E5"/>
-                </a:solidFill>
-                <a:latin typeface="Urbanist"/>
-                <a:ea typeface="Urbanist"/>
-                <a:cs typeface="Urbanist"/>
-                <a:sym typeface="Urbanist"/>
-              </a:rPr>
-              <a:t>www.presentationgo.com</a:t>
-            </a:r>
-            <a:endParaRPr/>
-          </a:p>
-        </p:txBody>
-      </p:sp>
-      <p:sp>
-        <p:nvSpPr>
-          <p:cNvPr id="279" name="Google Shape;279;p23"/>
-          <p:cNvSpPr txBox="1"/>
-          <p:nvPr/>
-        </p:nvSpPr>
-        <p:spPr>
-          <a:xfrm>
-            <a:off x="581025" y="408979"/>
-            <a:ext cx="11581447" cy="571500"/>
-          </a:xfrm>
-          <a:prstGeom prst="rect">
-            <a:avLst/>
-          </a:prstGeom>
-          <a:noFill/>
-          <a:ln>
-            <a:noFill/>
-          </a:ln>
-        </p:spPr>
-        <p:txBody>
-          <a:bodyPr anchorCtr="0" anchor="t" bIns="0" lIns="0" spcFirstLastPara="1" rIns="0" wrap="square" tIns="0">
-            <a:spAutoFit/>
-          </a:bodyPr>
-          <a:lstStyle/>
-          <a:p>
-            <a:pPr indent="0" lvl="0" marL="0" marR="0" rtl="0" algn="l">
-              <a:spcBef>
-                <a:spcPts val="0"/>
-              </a:spcBef>
-              <a:spcAft>
-                <a:spcPts val="0"/>
-              </a:spcAft>
-              <a:buNone/>
-            </a:pPr>
-            <a:r>
-              <a:rPr b="1" i="0" lang="en-US" sz="3600" u="none" cap="none" strike="noStrike">
-                <a:solidFill>
-                  <a:srgbClr val="FFFFFF"/>
-                </a:solidFill>
-                <a:latin typeface="Urbanist"/>
-                <a:ea typeface="Urbanist"/>
-                <a:cs typeface="Urbanist"/>
-                <a:sym typeface="Urbanist"/>
-              </a:rPr>
-              <a:t>Image Sources</a:t>
-            </a:r>
-            <a:endParaRPr/>
-          </a:p>
-        </p:txBody>
-      </p:sp>
-      <p:sp>
-        <p:nvSpPr>
-          <p:cNvPr id="280" name="Google Shape;280;p23"/>
-          <p:cNvSpPr/>
-          <p:nvPr/>
-        </p:nvSpPr>
-        <p:spPr>
-          <a:xfrm>
-            <a:off x="581025" y="1151929"/>
-            <a:ext cx="11029950" cy="19050"/>
-          </a:xfrm>
-          <a:prstGeom prst="rect">
-            <a:avLst/>
-          </a:prstGeom>
-          <a:solidFill>
-            <a:srgbClr val="1A1A1A"/>
-          </a:solidFill>
-          <a:ln>
-            <a:noFill/>
-          </a:ln>
-        </p:spPr>
-        <p:txBody>
-          <a:bodyPr anchorCtr="0" anchor="ctr" bIns="45700" lIns="91425" spcFirstLastPara="1" rIns="91425" wrap="square" tIns="45700">
-            <a:noAutofit/>
-          </a:bodyPr>
-          <a:lstStyle/>
-          <a:p>
-            <a:pPr indent="0" lvl="0" marL="0" marR="0" rtl="0" algn="ctr">
-              <a:spcBef>
-                <a:spcPts val="0"/>
-              </a:spcBef>
-              <a:spcAft>
-                <a:spcPts val="0"/>
-              </a:spcAft>
-              <a:buNone/>
-            </a:pPr>
-            <a:r>
-              <a:t/>
-            </a:r>
-            <a:endParaRPr b="0" i="0" sz="1800" u="none" cap="none" strike="noStrike">
-              <a:solidFill>
-                <a:schemeClr val="dk1"/>
-              </a:solidFill>
-              <a:latin typeface="Calibri"/>
-              <a:ea typeface="Calibri"/>
-              <a:cs typeface="Calibri"/>
-              <a:sym typeface="Calibri"/>
-            </a:endParaRPr>
-          </a:p>
-        </p:txBody>
-      </p:sp>
-    </p:spTree>
-  </p:cSld>
-  <p:clrMapOvr>
-    <a:masterClrMapping/>
-  </p:clrMapOvr>
-</p:sld>
-</file>
-
-<file path=ppt/slides/slide12.xml><?xml version="1.0" encoding="utf-8"?>
-<p:sld xmlns:a="http://schemas.openxmlformats.org/drawingml/2006/main" xmlns:r="http://schemas.openxmlformats.org/officeDocument/2006/relationships" xmlns:mc="http://schemas.openxmlformats.org/markup-compatibility/2006" xmlns:mv="urn:schemas-microsoft-com:mac:vml" xmlns:p="http://schemas.openxmlformats.org/presentationml/2006/main" xmlns:c="http://schemas.openxmlformats.org/drawingml/2006/chart" xmlns:dgm="http://schemas.openxmlformats.org/drawingml/2006/diagram" xmlns:o="urn:schemas-microsoft-com:office:office" xmlns:v="urn:schemas-microsoft-com:vml" xmlns:pvml="urn:schemas-microsoft-com:office:powerpoint" xmlns:com="http://schemas.openxmlformats.org/drawingml/2006/compatibility" xmlns:p14="http://schemas.microsoft.com/office/powerpoint/2010/main" xmlns:p15="http://schemas.microsoft.com/office/powerpoint/2012/main" xmlns:ahyp="http://schemas.microsoft.com/office/drawing/2018/hyperlinkcolor">
-  <p:cSld>
-    <p:spTree>
-      <p:nvGrpSpPr>
-        <p:cNvPr id="284" name="Shape 284"/>
-        <p:cNvGrpSpPr/>
-        <p:nvPr/>
-      </p:nvGrpSpPr>
-      <p:grpSpPr>
-        <a:xfrm>
-          <a:off x="0" y="0"/>
-          <a:ext cx="0" cy="0"/>
-          <a:chOff x="0" y="0"/>
-          <a:chExt cx="0" cy="0"/>
-        </a:xfrm>
-      </p:grpSpPr>
-      <p:pic>
-        <p:nvPicPr>
-          <p:cNvPr descr="image.png" id="285" name="Google Shape;285;p24"/>
-          <p:cNvPicPr preferRelativeResize="0"/>
-          <p:nvPr/>
-        </p:nvPicPr>
-        <p:blipFill rotWithShape="1">
-          <a:blip r:embed="rId3">
-            <a:alphaModFix/>
-          </a:blip>
-          <a:srcRect b="0" l="0" r="0" t="0"/>
-          <a:stretch/>
-        </p:blipFill>
-        <p:spPr>
-          <a:xfrm>
-            <a:off x="0" y="0"/>
-            <a:ext cx="12192000" cy="6858000"/>
-          </a:xfrm>
-          <a:prstGeom prst="rect">
-            <a:avLst/>
-          </a:prstGeom>
-          <a:noFill/>
-          <a:ln>
-            <a:noFill/>
-          </a:ln>
-        </p:spPr>
-      </p:pic>
-      <p:pic>
-        <p:nvPicPr>
-          <p:cNvPr descr="image.png" id="286" name="Google Shape;286;p24"/>
-          <p:cNvPicPr preferRelativeResize="0"/>
-          <p:nvPr/>
-        </p:nvPicPr>
-        <p:blipFill rotWithShape="1">
-          <a:blip r:embed="rId4">
-            <a:alphaModFix/>
-          </a:blip>
-          <a:srcRect b="0" l="0" r="0" t="0"/>
-          <a:stretch/>
-        </p:blipFill>
-        <p:spPr>
-          <a:xfrm>
-            <a:off x="2805112" y="3762226"/>
-            <a:ext cx="857250" cy="476250"/>
-          </a:xfrm>
-          <a:prstGeom prst="rect">
-            <a:avLst/>
-          </a:prstGeom>
-          <a:noFill/>
-          <a:ln>
-            <a:noFill/>
-          </a:ln>
-        </p:spPr>
-      </p:pic>
-      <p:sp>
-        <p:nvSpPr>
-          <p:cNvPr id="287" name="Google Shape;287;p24"/>
-          <p:cNvSpPr txBox="1"/>
-          <p:nvPr/>
-        </p:nvSpPr>
-        <p:spPr>
-          <a:xfrm>
-            <a:off x="3900487" y="3755677"/>
-            <a:ext cx="5486400" cy="198090"/>
-          </a:xfrm>
-          <a:prstGeom prst="rect">
-            <a:avLst/>
-          </a:prstGeom>
-          <a:noFill/>
-          <a:ln>
-            <a:noFill/>
-          </a:ln>
-        </p:spPr>
-        <p:txBody>
-          <a:bodyPr anchorCtr="0" anchor="t" bIns="0" lIns="0" spcFirstLastPara="1" rIns="0" wrap="square" tIns="0">
-            <a:spAutoFit/>
-          </a:bodyPr>
-          <a:lstStyle/>
-          <a:p>
-            <a:pPr indent="0" lvl="0" marL="0" marR="0" rtl="0" algn="l">
-              <a:lnSpc>
-                <a:spcPct val="160000"/>
-              </a:lnSpc>
-              <a:spcBef>
-                <a:spcPts val="0"/>
-              </a:spcBef>
-              <a:spcAft>
-                <a:spcPts val="0"/>
-              </a:spcAft>
-              <a:buNone/>
-            </a:pPr>
-            <a:r>
-              <a:rPr b="0" i="0" lang="en-US" sz="975" u="none" cap="none" strike="noStrike">
-                <a:solidFill>
-                  <a:srgbClr val="A3A3A3"/>
-                </a:solidFill>
-                <a:latin typeface="Urbanist"/>
-                <a:ea typeface="Urbanist"/>
-                <a:cs typeface="Urbanist"/>
-                <a:sym typeface="Urbanist"/>
-              </a:rPr>
-              <a:t>https://cdn.shopify.com/s/files/1/0668/4160/8391/files/6a03bee2b6245ba3e5ca71ea.jpg?v=1778753301</a:t>
-            </a:r>
-            <a:endParaRPr/>
-          </a:p>
-        </p:txBody>
-      </p:sp>
-      <p:sp>
-        <p:nvSpPr>
-          <p:cNvPr id="288" name="Google Shape;288;p24"/>
-          <p:cNvSpPr txBox="1"/>
-          <p:nvPr/>
-        </p:nvSpPr>
-        <p:spPr>
-          <a:xfrm>
-            <a:off x="3900487" y="4001392"/>
-            <a:ext cx="5486400" cy="243780"/>
-          </a:xfrm>
-          <a:prstGeom prst="rect">
-            <a:avLst/>
-          </a:prstGeom>
-          <a:noFill/>
-          <a:ln>
-            <a:noFill/>
-          </a:ln>
-        </p:spPr>
-        <p:txBody>
-          <a:bodyPr anchorCtr="0" anchor="t" bIns="0" lIns="0" spcFirstLastPara="1" rIns="0" wrap="square" tIns="0">
-            <a:spAutoFit/>
-          </a:bodyPr>
-          <a:lstStyle/>
-          <a:p>
-            <a:pPr indent="0" lvl="0" marL="0" marR="0" rtl="0" algn="l">
-              <a:lnSpc>
-                <a:spcPct val="160000"/>
-              </a:lnSpc>
-              <a:spcBef>
-                <a:spcPts val="0"/>
-              </a:spcBef>
-              <a:spcAft>
-                <a:spcPts val="0"/>
-              </a:spcAft>
-              <a:buNone/>
-            </a:pPr>
-            <a:r>
-              <a:rPr b="0" i="0" lang="en-US" sz="1200" u="none" cap="none" strike="noStrike">
-                <a:solidFill>
-                  <a:srgbClr val="A3A3A3"/>
-                </a:solidFill>
-                <a:latin typeface="Urbanist"/>
-                <a:ea typeface="Urbanist"/>
-                <a:cs typeface="Urbanist"/>
-                <a:sym typeface="Urbanist"/>
-              </a:rPr>
-              <a:t>Source: </a:t>
-            </a:r>
-            <a:r>
-              <a:rPr b="0" i="0" lang="en-US" sz="1200" u="none" cap="none" strike="noStrike">
-                <a:solidFill>
-                  <a:srgbClr val="4F46E5"/>
-                </a:solidFill>
-                <a:latin typeface="Urbanist"/>
-                <a:ea typeface="Urbanist"/>
-                <a:cs typeface="Urbanist"/>
-                <a:sym typeface="Urbanist"/>
-              </a:rPr>
-              <a:t>us.ktcplay.com</a:t>
-            </a:r>
-            <a:endParaRPr/>
-          </a:p>
-        </p:txBody>
-      </p:sp>
-      <p:sp>
-        <p:nvSpPr>
-          <p:cNvPr id="289" name="Google Shape;289;p24"/>
-          <p:cNvSpPr txBox="1"/>
-          <p:nvPr/>
-        </p:nvSpPr>
-        <p:spPr>
-          <a:xfrm>
-            <a:off x="581025" y="581025"/>
-            <a:ext cx="11581447" cy="571500"/>
-          </a:xfrm>
-          <a:prstGeom prst="rect">
-            <a:avLst/>
-          </a:prstGeom>
-          <a:noFill/>
-          <a:ln>
-            <a:noFill/>
-          </a:ln>
-        </p:spPr>
-        <p:txBody>
-          <a:bodyPr anchorCtr="0" anchor="t" bIns="0" lIns="0" spcFirstLastPara="1" rIns="0" wrap="square" tIns="0">
-            <a:spAutoFit/>
-          </a:bodyPr>
-          <a:lstStyle/>
-          <a:p>
-            <a:pPr indent="0" lvl="0" marL="0" marR="0" rtl="0" algn="l">
-              <a:spcBef>
-                <a:spcPts val="0"/>
-              </a:spcBef>
-              <a:spcAft>
-                <a:spcPts val="0"/>
-              </a:spcAft>
-              <a:buNone/>
-            </a:pPr>
-            <a:r>
-              <a:rPr b="1" i="0" lang="en-US" sz="3600" u="none" cap="none" strike="noStrike">
-                <a:solidFill>
-                  <a:srgbClr val="FFFFFF"/>
-                </a:solidFill>
-                <a:latin typeface="Urbanist"/>
-                <a:ea typeface="Urbanist"/>
-                <a:cs typeface="Urbanist"/>
-                <a:sym typeface="Urbanist"/>
-              </a:rPr>
-              <a:t>Image Sources</a:t>
-            </a:r>
-            <a:endParaRPr/>
-          </a:p>
-        </p:txBody>
-      </p:sp>
-      <p:sp>
-        <p:nvSpPr>
-          <p:cNvPr id="290" name="Google Shape;290;p24"/>
-          <p:cNvSpPr/>
-          <p:nvPr/>
-        </p:nvSpPr>
-        <p:spPr>
-          <a:xfrm>
-            <a:off x="581025" y="1323975"/>
-            <a:ext cx="11029950" cy="19050"/>
-          </a:xfrm>
-          <a:prstGeom prst="rect">
-            <a:avLst/>
-          </a:prstGeom>
-          <a:solidFill>
-            <a:srgbClr val="1A1A1A"/>
-          </a:solidFill>
-          <a:ln>
-            <a:noFill/>
-          </a:ln>
-        </p:spPr>
-        <p:txBody>
-          <a:bodyPr anchorCtr="0" anchor="ctr" bIns="45700" lIns="91425" spcFirstLastPara="1" rIns="91425" wrap="square" tIns="45700">
-            <a:noAutofit/>
-          </a:bodyPr>
-          <a:lstStyle/>
-          <a:p>
-            <a:pPr indent="0" lvl="0" marL="0" marR="0" rtl="0" algn="ctr">
-              <a:spcBef>
-                <a:spcPts val="0"/>
-              </a:spcBef>
-              <a:spcAft>
-                <a:spcPts val="0"/>
-              </a:spcAft>
-              <a:buNone/>
-            </a:pPr>
-            <a:r>
-              <a:t/>
-            </a:r>
-            <a:endParaRPr b="0" i="0" sz="1800" u="none" cap="none" strike="noStrike">
-              <a:solidFill>
-                <a:schemeClr val="dk1"/>
-              </a:solidFill>
-              <a:latin typeface="Calibri"/>
-              <a:ea typeface="Calibri"/>
-              <a:cs typeface="Calibri"/>
-              <a:sym typeface="Calibri"/>
-            </a:endParaRPr>
-          </a:p>
-        </p:txBody>
-      </p:sp>
     </p:spTree>
   </p:cSld>
   <p:clrMapOvr>
@@ -17002,23 +15041,16 @@
           </a:ln>
         </p:spPr>
       </p:pic>
-      <p:pic>
-        <p:nvPicPr>
-          <p:cNvPr descr="image.png" id="167" name="Google Shape;167;p18"/>
-          <p:cNvPicPr preferRelativeResize="0"/>
+      <p:sp>
+        <p:nvSpPr>
+          <p:cNvPr id="167" name="Google Shape;167;p18"/>
+          <p:cNvSpPr txBox="1"/>
           <p:nvPr/>
-        </p:nvPicPr>
-        <p:blipFill rotWithShape="1">
-          <a:blip r:embed="rId4">
-            <a:alphaModFix/>
-          </a:blip>
-          <a:srcRect b="0" l="0" r="0" t="0"/>
-          <a:stretch/>
-        </p:blipFill>
+        </p:nvSpPr>
         <p:spPr>
           <a:xfrm>
-            <a:off x="581025" y="2773560"/>
-            <a:ext cx="3549699" cy="3619500"/>
+            <a:off x="581025" y="1143000"/>
+            <a:ext cx="11030100" cy="571500"/>
           </a:xfrm>
           <a:prstGeom prst="rect">
             <a:avLst/>
@@ -17028,71 +15060,510 @@
             <a:noFill/>
           </a:ln>
         </p:spPr>
-      </p:pic>
-      <p:pic>
-        <p:nvPicPr>
-          <p:cNvPr descr="image.png" id="168" name="Google Shape;168;p18"/>
-          <p:cNvPicPr preferRelativeResize="0"/>
+        <p:txBody>
+          <a:bodyPr anchorCtr="0" anchor="ctr" bIns="0" lIns="0" spcFirstLastPara="1" rIns="0" wrap="square" tIns="0">
+            <a:noAutofit/>
+          </a:bodyPr>
+          <a:lstStyle/>
+          <a:p>
+            <a:pPr indent="0" lvl="0" marL="0" rtl="0" algn="l">
+              <a:spcBef>
+                <a:spcPts val="0"/>
+              </a:spcBef>
+              <a:spcAft>
+                <a:spcPts val="0"/>
+              </a:spcAft>
+              <a:buNone/>
+            </a:pPr>
+            <a:r>
+              <a:rPr b="0" lang="en-US" sz="1500">
+                <a:solidFill>
+                  <a:srgbClr val="A3A3A3"/>
+                </a:solidFill>
+                <a:latin typeface="Urbanist"/>
+                <a:ea typeface="Urbanist"/>
+                <a:cs typeface="Urbanist"/>
+                <a:sym typeface="Urbanist"/>
+              </a:rPr>
+              <a:t>All inference (claim extraction + verification) runs on an </a:t>
+            </a:r>
+            <a:r>
+              <a:rPr b="1" lang="en-US" sz="1500">
+                <a:solidFill>
+                  <a:srgbClr val="FFFFFF"/>
+                </a:solidFill>
+                <a:latin typeface="Urbanist"/>
+                <a:ea typeface="Urbanist"/>
+                <a:cs typeface="Urbanist"/>
+                <a:sym typeface="Urbanist"/>
+              </a:rPr>
+              <a:t>AMD Instinct GPU</a:t>
+            </a:r>
+            <a:r>
+              <a:rPr b="0" lang="en-US" sz="1500">
+                <a:solidFill>
+                  <a:srgbClr val="A3A3A3"/>
+                </a:solidFill>
+                <a:latin typeface="Urbanist"/>
+                <a:ea typeface="Urbanist"/>
+                <a:cs typeface="Urbanist"/>
+                <a:sym typeface="Urbanist"/>
+              </a:rPr>
+              <a:t>: ROCm 7.2 + vLLM 0.16 serving Gemma.</a:t>
+            </a:r>
+            <a:endParaRPr b="0" sz="1500">
+              <a:solidFill>
+                <a:srgbClr val="A3A3A3"/>
+              </a:solidFill>
+              <a:latin typeface="Urbanist"/>
+              <a:ea typeface="Urbanist"/>
+              <a:cs typeface="Urbanist"/>
+              <a:sym typeface="Urbanist"/>
+            </a:endParaRPr>
+          </a:p>
+          <a:p>
+            <a:pPr indent="0" lvl="0" marL="0" rtl="0" algn="l">
+              <a:spcBef>
+                <a:spcPts val="300"/>
+              </a:spcBef>
+              <a:spcAft>
+                <a:spcPts val="0"/>
+              </a:spcAft>
+              <a:buNone/>
+            </a:pPr>
+            <a:r>
+              <a:rPr b="0" lang="en-US" sz="1500">
+                <a:solidFill>
+                  <a:srgbClr val="ED1C24"/>
+                </a:solidFill>
+                <a:latin typeface="Urbanist SemiBold"/>
+                <a:ea typeface="Urbanist SemiBold"/>
+                <a:cs typeface="Urbanist SemiBold"/>
+                <a:sym typeface="Urbanist SemiBold"/>
+              </a:rPr>
+              <a:t>Student work NEVER leaves institution-controlled hardware.</a:t>
+            </a:r>
+            <a:endParaRPr b="0" sz="1500">
+              <a:solidFill>
+                <a:srgbClr val="ED1C24"/>
+              </a:solidFill>
+              <a:latin typeface="Urbanist SemiBold"/>
+              <a:ea typeface="Urbanist SemiBold"/>
+              <a:cs typeface="Urbanist SemiBold"/>
+              <a:sym typeface="Urbanist SemiBold"/>
+            </a:endParaRPr>
+          </a:p>
+        </p:txBody>
+      </p:sp>
+      <p:grpSp>
+        <p:nvGrpSpPr>
+          <p:cNvPr id="168" name="Google Shape;168;p18"/>
+          <p:cNvGrpSpPr/>
           <p:nvPr/>
-        </p:nvPicPr>
-        <p:blipFill rotWithShape="1">
-          <a:blip r:embed="rId5">
-            <a:alphaModFix/>
-          </a:blip>
-          <a:srcRect b="0" l="0" r="0" t="0"/>
-          <a:stretch/>
-        </p:blipFill>
-        <p:spPr>
-          <a:xfrm>
-            <a:off x="4321224" y="2773560"/>
-            <a:ext cx="3549699" cy="3619500"/>
-          </a:xfrm>
-          <a:prstGeom prst="rect">
-            <a:avLst/>
-          </a:prstGeom>
-          <a:noFill/>
-          <a:ln>
+        </p:nvGrpSpPr>
+        <p:grpSpPr>
+          <a:xfrm>
+            <a:off x="581025" y="1857375"/>
+            <a:ext cx="5315100" cy="4429200"/>
+            <a:chOff x="0" y="0"/>
+            <a:chExt cx="5315100" cy="4429200"/>
+          </a:xfrm>
+        </p:grpSpPr>
+        <p:sp>
+          <p:nvSpPr>
+            <p:cNvPr id="169" name="Google Shape;169;p18"/>
+            <p:cNvSpPr/>
+            <p:nvPr/>
+          </p:nvSpPr>
+          <p:spPr>
+            <a:xfrm>
+              <a:off x="0" y="0"/>
+              <a:ext cx="5315100" cy="4429200"/>
+            </a:xfrm>
+            <a:prstGeom prst="roundRect">
+              <a:avLst>
+                <a:gd fmla="val 3440" name="adj"/>
+              </a:avLst>
+            </a:prstGeom>
+            <a:solidFill>
+              <a:srgbClr val="151515"/>
+            </a:solidFill>
+            <a:ln cap="flat" cmpd="sng" w="14300">
+              <a:solidFill>
+                <a:srgbClr val="252525"/>
+              </a:solidFill>
+              <a:prstDash val="solid"/>
+              <a:round/>
+              <a:headEnd len="sm" w="sm" type="none"/>
+              <a:tailEnd len="sm" w="sm" type="none"/>
+            </a:ln>
+          </p:spPr>
+          <p:txBody>
+            <a:bodyPr anchorCtr="0" anchor="ctr" bIns="0" lIns="0" spcFirstLastPara="1" rIns="0" wrap="square" tIns="0">
+              <a:noAutofit/>
+            </a:bodyPr>
+            <a:lstStyle/>
+            <a:p>
+              <a:pPr indent="0" lvl="0" marL="0" rtl="0" algn="l">
+                <a:spcBef>
+                  <a:spcPts val="0"/>
+                </a:spcBef>
+                <a:spcAft>
+                  <a:spcPts val="0"/>
+                </a:spcAft>
+                <a:buNone/>
+              </a:pPr>
+              <a:r>
+                <a:t/>
+              </a:r>
+              <a:endParaRPr/>
+            </a:p>
+          </p:txBody>
+        </p:sp>
+        <p:sp>
+          <p:nvSpPr>
+            <p:cNvPr id="170" name="Google Shape;170;p18"/>
+            <p:cNvSpPr txBox="1"/>
+            <p:nvPr/>
+          </p:nvSpPr>
+          <p:spPr>
+            <a:xfrm>
+              <a:off x="285750" y="228600"/>
+              <a:ext cx="4743600" cy="571500"/>
+            </a:xfrm>
+            <a:prstGeom prst="rect">
+              <a:avLst/>
+            </a:prstGeom>
             <a:noFill/>
-          </a:ln>
-        </p:spPr>
-      </p:pic>
-      <p:pic>
-        <p:nvPicPr>
-          <p:cNvPr descr="image.png" id="169" name="Google Shape;169;p18"/>
-          <p:cNvPicPr preferRelativeResize="0"/>
+            <a:ln>
+              <a:noFill/>
+            </a:ln>
+          </p:spPr>
+          <p:txBody>
+            <a:bodyPr anchorCtr="0" anchor="t" bIns="0" lIns="0" spcFirstLastPara="1" rIns="0" wrap="square" tIns="0">
+              <a:noAutofit/>
+            </a:bodyPr>
+            <a:lstStyle/>
+            <a:p>
+              <a:pPr indent="0" lvl="0" marL="0" rtl="0" algn="l">
+                <a:spcBef>
+                  <a:spcPts val="0"/>
+                </a:spcBef>
+                <a:spcAft>
+                  <a:spcPts val="0"/>
+                </a:spcAft>
+                <a:buNone/>
+              </a:pPr>
+              <a:r>
+                <a:rPr b="1" lang="en-US" sz="1800">
+                  <a:solidFill>
+                    <a:srgbClr val="FFFFFF"/>
+                  </a:solidFill>
+                  <a:latin typeface="Urbanist"/>
+                  <a:ea typeface="Urbanist"/>
+                  <a:cs typeface="Urbanist"/>
+                  <a:sym typeface="Urbanist"/>
+                </a:rPr>
+                <a:t>Local GPU Execution</a:t>
+              </a:r>
+              <a:endParaRPr b="1" sz="1800">
+                <a:solidFill>
+                  <a:srgbClr val="FFFFFF"/>
+                </a:solidFill>
+                <a:latin typeface="Urbanist"/>
+                <a:ea typeface="Urbanist"/>
+                <a:cs typeface="Urbanist"/>
+                <a:sym typeface="Urbanist"/>
+              </a:endParaRPr>
+            </a:p>
+            <a:p>
+              <a:pPr indent="0" lvl="0" marL="0" rtl="0" algn="l">
+                <a:spcBef>
+                  <a:spcPts val="300"/>
+                </a:spcBef>
+                <a:spcAft>
+                  <a:spcPts val="0"/>
+                </a:spcAft>
+                <a:buNone/>
+              </a:pPr>
+              <a:r>
+                <a:rPr b="0" lang="en-US" sz="1250">
+                  <a:solidFill>
+                    <a:srgbClr val="ED1C24"/>
+                  </a:solidFill>
+                  <a:latin typeface="Urbanist SemiBold"/>
+                  <a:ea typeface="Urbanist SemiBold"/>
+                  <a:cs typeface="Urbanist SemiBold"/>
+                  <a:sym typeface="Urbanist SemiBold"/>
+                </a:rPr>
+                <a:t>rocm-smi execution inhouse</a:t>
+              </a:r>
+              <a:endParaRPr b="0" sz="1250">
+                <a:solidFill>
+                  <a:srgbClr val="ED1C24"/>
+                </a:solidFill>
+                <a:latin typeface="Urbanist SemiBold"/>
+                <a:ea typeface="Urbanist SemiBold"/>
+                <a:cs typeface="Urbanist SemiBold"/>
+                <a:sym typeface="Urbanist SemiBold"/>
+              </a:endParaRPr>
+            </a:p>
+          </p:txBody>
+        </p:sp>
+        <p:pic>
+          <p:nvPicPr>
+            <p:cNvPr id="171" name="Google Shape;171;p18"/>
+            <p:cNvPicPr preferRelativeResize="0"/>
+            <p:nvPr/>
+          </p:nvPicPr>
+          <p:blipFill rotWithShape="1">
+            <a:blip r:embed="rId4">
+              <a:alphaModFix/>
+            </a:blip>
+            <a:srcRect b="19679" l="0" r="0" t="19679"/>
+            <a:stretch/>
+          </p:blipFill>
+          <p:spPr>
+            <a:xfrm>
+              <a:off x="285750" y="895350"/>
+              <a:ext cx="4743600" cy="2000100"/>
+            </a:xfrm>
+            <a:prstGeom prst="roundRect">
+              <a:avLst>
+                <a:gd fmla="val 3809" name="adj"/>
+              </a:avLst>
+            </a:prstGeom>
+            <a:noFill/>
+            <a:ln>
+              <a:noFill/>
+            </a:ln>
+          </p:spPr>
+        </p:pic>
+        <p:pic>
+          <p:nvPicPr>
+            <p:cNvPr id="172" name="Google Shape;172;p18"/>
+            <p:cNvPicPr preferRelativeResize="0"/>
+            <p:nvPr/>
+          </p:nvPicPr>
+          <p:blipFill rotWithShape="1">
+            <a:blip r:embed="rId5">
+              <a:alphaModFix/>
+            </a:blip>
+            <a:srcRect b="0" l="13261" r="13269" t="0"/>
+            <a:stretch/>
+          </p:blipFill>
+          <p:spPr>
+            <a:xfrm>
+              <a:off x="285750" y="3048000"/>
+              <a:ext cx="4743600" cy="1095300"/>
+            </a:xfrm>
+            <a:prstGeom prst="roundRect">
+              <a:avLst>
+                <a:gd fmla="val 6956" name="adj"/>
+              </a:avLst>
+            </a:prstGeom>
+            <a:noFill/>
+            <a:ln>
+              <a:noFill/>
+            </a:ln>
+          </p:spPr>
+        </p:pic>
+      </p:grpSp>
+      <p:grpSp>
+        <p:nvGrpSpPr>
+          <p:cNvPr id="173" name="Google Shape;173;p18"/>
+          <p:cNvGrpSpPr/>
           <p:nvPr/>
-        </p:nvPicPr>
-        <p:blipFill rotWithShape="1">
-          <a:blip r:embed="rId6">
-            <a:alphaModFix/>
-          </a:blip>
-          <a:srcRect b="0" l="0" r="0" t="0"/>
-          <a:stretch/>
-        </p:blipFill>
-        <p:spPr>
-          <a:xfrm>
-            <a:off x="8061424" y="2773560"/>
-            <a:ext cx="3549699" cy="3619500"/>
-          </a:xfrm>
-          <a:prstGeom prst="rect">
-            <a:avLst/>
-          </a:prstGeom>
-          <a:noFill/>
-          <a:ln>
+        </p:nvGrpSpPr>
+        <p:grpSpPr>
+          <a:xfrm>
+            <a:off x="6296025" y="1857375"/>
+            <a:ext cx="5315100" cy="4429200"/>
+            <a:chOff x="0" y="0"/>
+            <a:chExt cx="5315100" cy="4429200"/>
+          </a:xfrm>
+        </p:grpSpPr>
+        <p:sp>
+          <p:nvSpPr>
+            <p:cNvPr id="174" name="Google Shape;174;p18"/>
+            <p:cNvSpPr/>
+            <p:nvPr/>
+          </p:nvSpPr>
+          <p:spPr>
+            <a:xfrm>
+              <a:off x="0" y="0"/>
+              <a:ext cx="5315100" cy="4429200"/>
+            </a:xfrm>
+            <a:prstGeom prst="roundRect">
+              <a:avLst>
+                <a:gd fmla="val 3440" name="adj"/>
+              </a:avLst>
+            </a:prstGeom>
+            <a:solidFill>
+              <a:srgbClr val="151515"/>
+            </a:solidFill>
+            <a:ln cap="flat" cmpd="sng" w="14300">
+              <a:solidFill>
+                <a:srgbClr val="252525"/>
+              </a:solidFill>
+              <a:prstDash val="solid"/>
+              <a:round/>
+              <a:headEnd len="sm" w="sm" type="none"/>
+              <a:tailEnd len="sm" w="sm" type="none"/>
+            </a:ln>
+          </p:spPr>
+          <p:txBody>
+            <a:bodyPr anchorCtr="0" anchor="ctr" bIns="0" lIns="0" spcFirstLastPara="1" rIns="0" wrap="square" tIns="0">
+              <a:noAutofit/>
+            </a:bodyPr>
+            <a:lstStyle/>
+            <a:p>
+              <a:pPr indent="0" lvl="0" marL="0" rtl="0" algn="l">
+                <a:spcBef>
+                  <a:spcPts val="0"/>
+                </a:spcBef>
+                <a:spcAft>
+                  <a:spcPts val="0"/>
+                </a:spcAft>
+                <a:buNone/>
+              </a:pPr>
+              <a:r>
+                <a:t/>
+              </a:r>
+              <a:endParaRPr/>
+            </a:p>
+          </p:txBody>
+        </p:sp>
+        <p:sp>
+          <p:nvSpPr>
+            <p:cNvPr id="175" name="Google Shape;175;p18"/>
+            <p:cNvSpPr txBox="1"/>
+            <p:nvPr/>
+          </p:nvSpPr>
+          <p:spPr>
+            <a:xfrm>
+              <a:off x="285750" y="228600"/>
+              <a:ext cx="4743600" cy="571500"/>
+            </a:xfrm>
+            <a:prstGeom prst="rect">
+              <a:avLst/>
+            </a:prstGeom>
             <a:noFill/>
-          </a:ln>
-        </p:spPr>
-      </p:pic>
+            <a:ln>
+              <a:noFill/>
+            </a:ln>
+          </p:spPr>
+          <p:txBody>
+            <a:bodyPr anchorCtr="0" anchor="t" bIns="0" lIns="0" spcFirstLastPara="1" rIns="0" wrap="square" tIns="0">
+              <a:noAutofit/>
+            </a:bodyPr>
+            <a:lstStyle/>
+            <a:p>
+              <a:pPr indent="0" lvl="0" marL="0" rtl="0" algn="l">
+                <a:spcBef>
+                  <a:spcPts val="0"/>
+                </a:spcBef>
+                <a:spcAft>
+                  <a:spcPts val="0"/>
+                </a:spcAft>
+                <a:buNone/>
+              </a:pPr>
+              <a:r>
+                <a:rPr b="1" lang="en-US" sz="1800">
+                  <a:solidFill>
+                    <a:srgbClr val="FFFFFF"/>
+                  </a:solidFill>
+                  <a:latin typeface="Urbanist"/>
+                  <a:ea typeface="Urbanist"/>
+                  <a:cs typeface="Urbanist"/>
+                  <a:sym typeface="Urbanist"/>
+                </a:rPr>
+                <a:t>Drupal AI Integration</a:t>
+              </a:r>
+              <a:endParaRPr b="1" sz="1800">
+                <a:solidFill>
+                  <a:srgbClr val="FFFFFF"/>
+                </a:solidFill>
+                <a:latin typeface="Urbanist"/>
+                <a:ea typeface="Urbanist"/>
+                <a:cs typeface="Urbanist"/>
+                <a:sym typeface="Urbanist"/>
+              </a:endParaRPr>
+            </a:p>
+            <a:p>
+              <a:pPr indent="0" lvl="0" marL="0" rtl="0" algn="l">
+                <a:spcBef>
+                  <a:spcPts val="300"/>
+                </a:spcBef>
+                <a:spcAft>
+                  <a:spcPts val="0"/>
+                </a:spcAft>
+                <a:buNone/>
+              </a:pPr>
+              <a:r>
+                <a:rPr b="0" lang="en-US" sz="1250">
+                  <a:solidFill>
+                    <a:srgbClr val="ED1C24"/>
+                  </a:solidFill>
+                  <a:latin typeface="Urbanist SemiBold"/>
+                  <a:ea typeface="Urbanist SemiBold"/>
+                  <a:cs typeface="Urbanist SemiBold"/>
+                  <a:sym typeface="Urbanist SemiBold"/>
+                </a:rPr>
+                <a:t>AMD server endpoint in Drupal</a:t>
+              </a:r>
+              <a:endParaRPr b="0" sz="1250">
+                <a:solidFill>
+                  <a:srgbClr val="ED1C24"/>
+                </a:solidFill>
+                <a:latin typeface="Urbanist SemiBold"/>
+                <a:ea typeface="Urbanist SemiBold"/>
+                <a:cs typeface="Urbanist SemiBold"/>
+                <a:sym typeface="Urbanist SemiBold"/>
+              </a:endParaRPr>
+            </a:p>
+          </p:txBody>
+        </p:sp>
+        <p:pic>
+          <p:nvPicPr>
+            <p:cNvPr id="176" name="Google Shape;176;p18"/>
+            <p:cNvPicPr preferRelativeResize="0"/>
+            <p:nvPr/>
+          </p:nvPicPr>
+          <p:blipFill rotWithShape="1">
+            <a:blip r:embed="rId6">
+              <a:alphaModFix/>
+            </a:blip>
+            <a:srcRect b="3105" l="0" r="0" t="3095"/>
+            <a:stretch/>
+          </p:blipFill>
+          <p:spPr>
+            <a:xfrm>
+              <a:off x="285750" y="895350"/>
+              <a:ext cx="4743600" cy="3248100"/>
+            </a:xfrm>
+            <a:prstGeom prst="roundRect">
+              <a:avLst>
+                <a:gd fmla="val 2346" name="adj"/>
+              </a:avLst>
+            </a:prstGeom>
+            <a:noFill/>
+            <a:ln>
+              <a:noFill/>
+            </a:ln>
+          </p:spPr>
+        </p:pic>
+      </p:grpSp>
       <p:sp>
         <p:nvSpPr>
-          <p:cNvPr id="170" name="Google Shape;170;p18"/>
+          <p:cNvPr id="177" name="Google Shape;177;p18"/>
           <p:cNvSpPr txBox="1"/>
           <p:nvPr/>
         </p:nvSpPr>
         <p:spPr>
           <a:xfrm>
-            <a:off x="581025" y="1817489"/>
-            <a:ext cx="11029950" cy="670321"/>
+            <a:off x="581025" y="464939"/>
+            <a:ext cx="11581500" cy="554100"/>
           </a:xfrm>
           <a:prstGeom prst="rect">
             <a:avLst/>
@@ -17109,314 +15580,6 @@
           <a:lstStyle/>
           <a:p>
             <a:pPr indent="0" lvl="0" marL="0" marR="0" rtl="0" algn="l">
-              <a:lnSpc>
-                <a:spcPct val="160000"/>
-              </a:lnSpc>
-              <a:spcBef>
-                <a:spcPts val="0"/>
-              </a:spcBef>
-              <a:spcAft>
-                <a:spcPts val="0"/>
-              </a:spcAft>
-              <a:buNone/>
-            </a:pPr>
-            <a:r>
-              <a:rPr b="0" i="0" lang="en-US" sz="1650" u="none" cap="none" strike="noStrike">
-                <a:solidFill>
-                  <a:srgbClr val="A3A3A3"/>
-                </a:solidFill>
-                <a:latin typeface="Urbanist"/>
-                <a:ea typeface="Urbanist"/>
-                <a:cs typeface="Urbanist"/>
-                <a:sym typeface="Urbanist"/>
-              </a:rPr>
-              <a:t>All inference (claim extraction + verification) runs on an </a:t>
-            </a:r>
-            <a:r>
-              <a:rPr b="1" i="0" lang="en-US" sz="1650" u="none" cap="none" strike="noStrike">
-                <a:solidFill>
-                  <a:srgbClr val="A3A3A3"/>
-                </a:solidFill>
-                <a:latin typeface="Urbanist"/>
-                <a:ea typeface="Urbanist"/>
-                <a:cs typeface="Urbanist"/>
-                <a:sym typeface="Urbanist"/>
-              </a:rPr>
-              <a:t>AMD Instinct GPU</a:t>
-            </a:r>
-            <a:r>
-              <a:rPr b="0" i="0" lang="en-US" sz="1650" u="none" cap="none" strike="noStrike">
-                <a:solidFill>
-                  <a:srgbClr val="A3A3A3"/>
-                </a:solidFill>
-                <a:latin typeface="Urbanist"/>
-                <a:ea typeface="Urbanist"/>
-                <a:cs typeface="Urbanist"/>
-                <a:sym typeface="Urbanist"/>
-              </a:rPr>
-              <a:t>: ROCm 7.2 + vLLM 0.16 serving Gemma. Student work NEVER leaves institution-controlled hardware.</a:t>
-            </a:r>
-            <a:endParaRPr/>
-          </a:p>
-        </p:txBody>
-      </p:sp>
-      <p:sp>
-        <p:nvSpPr>
-          <p:cNvPr id="171" name="Google Shape;171;p18"/>
-          <p:cNvSpPr txBox="1"/>
-          <p:nvPr/>
-        </p:nvSpPr>
-        <p:spPr>
-          <a:xfrm>
-            <a:off x="581025" y="6545460"/>
-            <a:ext cx="3549699" cy="180975"/>
-          </a:xfrm>
-          <a:prstGeom prst="rect">
-            <a:avLst/>
-          </a:prstGeom>
-          <a:noFill/>
-          <a:ln>
-            <a:noFill/>
-          </a:ln>
-        </p:spPr>
-        <p:txBody>
-          <a:bodyPr anchorCtr="0" anchor="t" bIns="0" lIns="0" spcFirstLastPara="1" rIns="0" wrap="square" tIns="0">
-            <a:spAutoFit/>
-          </a:bodyPr>
-          <a:lstStyle/>
-          <a:p>
-            <a:pPr indent="0" lvl="0" marL="0" marR="0" rtl="0" algn="ctr">
-              <a:spcBef>
-                <a:spcPts val="0"/>
-              </a:spcBef>
-              <a:spcAft>
-                <a:spcPts val="0"/>
-              </a:spcAft>
-              <a:buNone/>
-            </a:pPr>
-            <a:r>
-              <a:rPr b="0" i="0" lang="en-US" sz="1200" u="none" cap="none" strike="noStrike">
-                <a:solidFill>
-                  <a:srgbClr val="A3A3A3"/>
-                </a:solidFill>
-                <a:latin typeface="Urbanist"/>
-                <a:ea typeface="Urbanist"/>
-                <a:cs typeface="Urbanist"/>
-                <a:sym typeface="Urbanist"/>
-              </a:rPr>
-              <a:t>rocm-smi execution output</a:t>
-            </a:r>
-            <a:endParaRPr/>
-          </a:p>
-        </p:txBody>
-      </p:sp>
-      <p:sp>
-        <p:nvSpPr>
-          <p:cNvPr id="172" name="Google Shape;172;p18"/>
-          <p:cNvSpPr txBox="1"/>
-          <p:nvPr/>
-        </p:nvSpPr>
-        <p:spPr>
-          <a:xfrm>
-            <a:off x="4321224" y="6545460"/>
-            <a:ext cx="3549699" cy="180975"/>
-          </a:xfrm>
-          <a:prstGeom prst="rect">
-            <a:avLst/>
-          </a:prstGeom>
-          <a:noFill/>
-          <a:ln>
-            <a:noFill/>
-          </a:ln>
-        </p:spPr>
-        <p:txBody>
-          <a:bodyPr anchorCtr="0" anchor="t" bIns="0" lIns="0" spcFirstLastPara="1" rIns="0" wrap="square" tIns="0">
-            <a:spAutoFit/>
-          </a:bodyPr>
-          <a:lstStyle/>
-          <a:p>
-            <a:pPr indent="0" lvl="0" marL="0" marR="0" rtl="0" algn="ctr">
-              <a:spcBef>
-                <a:spcPts val="0"/>
-              </a:spcBef>
-              <a:spcAft>
-                <a:spcPts val="0"/>
-              </a:spcAft>
-              <a:buNone/>
-            </a:pPr>
-            <a:r>
-              <a:rPr b="0" i="0" lang="en-US" sz="1200" u="none" cap="none" strike="noStrike">
-                <a:solidFill>
-                  <a:srgbClr val="A3A3A3"/>
-                </a:solidFill>
-                <a:latin typeface="Urbanist"/>
-                <a:ea typeface="Urbanist"/>
-                <a:cs typeface="Urbanist"/>
-                <a:sym typeface="Urbanist"/>
-              </a:rPr>
-              <a:t>AMD server endpoint in Drupal</a:t>
-            </a:r>
-            <a:endParaRPr/>
-          </a:p>
-        </p:txBody>
-      </p:sp>
-      <p:sp>
-        <p:nvSpPr>
-          <p:cNvPr id="173" name="Google Shape;173;p18"/>
-          <p:cNvSpPr txBox="1"/>
-          <p:nvPr/>
-        </p:nvSpPr>
-        <p:spPr>
-          <a:xfrm>
-            <a:off x="8061424" y="6545460"/>
-            <a:ext cx="3549699" cy="180975"/>
-          </a:xfrm>
-          <a:prstGeom prst="rect">
-            <a:avLst/>
-          </a:prstGeom>
-          <a:noFill/>
-          <a:ln>
-            <a:noFill/>
-          </a:ln>
-        </p:spPr>
-        <p:txBody>
-          <a:bodyPr anchorCtr="0" anchor="t" bIns="0" lIns="0" spcFirstLastPara="1" rIns="0" wrap="square" tIns="0">
-            <a:spAutoFit/>
-          </a:bodyPr>
-          <a:lstStyle/>
-          <a:p>
-            <a:pPr indent="0" lvl="0" marL="0" marR="0" rtl="0" algn="ctr">
-              <a:spcBef>
-                <a:spcPts val="0"/>
-              </a:spcBef>
-              <a:spcAft>
-                <a:spcPts val="0"/>
-              </a:spcAft>
-              <a:buNone/>
-            </a:pPr>
-            <a:r>
-              <a:rPr b="0" i="0" lang="en-US" sz="1200" u="none" cap="none" strike="noStrike">
-                <a:solidFill>
-                  <a:srgbClr val="A3A3A3"/>
-                </a:solidFill>
-                <a:latin typeface="Urbanist"/>
-                <a:ea typeface="Urbanist"/>
-                <a:cs typeface="Urbanist"/>
-                <a:sym typeface="Urbanist"/>
-              </a:rPr>
-              <a:t>Logged routing decisions</a:t>
-            </a:r>
-            <a:endParaRPr/>
-          </a:p>
-        </p:txBody>
-      </p:sp>
-      <p:pic>
-        <p:nvPicPr>
-          <p:cNvPr descr="image.png" id="174" name="Google Shape;174;p18"/>
-          <p:cNvPicPr preferRelativeResize="0"/>
-          <p:nvPr/>
-        </p:nvPicPr>
-        <p:blipFill rotWithShape="1">
-          <a:blip r:embed="rId7">
-            <a:alphaModFix/>
-          </a:blip>
-          <a:srcRect b="0" l="0" r="0" t="0"/>
-          <a:stretch/>
-        </p:blipFill>
-        <p:spPr>
-          <a:xfrm>
-            <a:off x="590550" y="2783085"/>
-            <a:ext cx="3530649" cy="3600450"/>
-          </a:xfrm>
-          <a:prstGeom prst="rect">
-            <a:avLst/>
-          </a:prstGeom>
-          <a:noFill/>
-          <a:ln>
-            <a:noFill/>
-          </a:ln>
-        </p:spPr>
-      </p:pic>
-      <p:pic>
-        <p:nvPicPr>
-          <p:cNvPr descr="image.png" id="175" name="Google Shape;175;p18"/>
-          <p:cNvPicPr preferRelativeResize="0"/>
-          <p:nvPr/>
-        </p:nvPicPr>
-        <p:blipFill rotWithShape="1">
-          <a:blip r:embed="rId8">
-            <a:alphaModFix/>
-          </a:blip>
-          <a:srcRect b="0" l="0" r="0" t="0"/>
-          <a:stretch/>
-        </p:blipFill>
-        <p:spPr>
-          <a:xfrm>
-            <a:off x="4330749" y="2783085"/>
-            <a:ext cx="3530649" cy="3600450"/>
-          </a:xfrm>
-          <a:prstGeom prst="rect">
-            <a:avLst/>
-          </a:prstGeom>
-          <a:noFill/>
-          <a:ln>
-            <a:noFill/>
-          </a:ln>
-        </p:spPr>
-      </p:pic>
-      <p:pic>
-        <p:nvPicPr>
-          <p:cNvPr descr="image.png" id="176" name="Google Shape;176;p18"/>
-          <p:cNvPicPr preferRelativeResize="0"/>
-          <p:nvPr/>
-        </p:nvPicPr>
-        <p:blipFill rotWithShape="1">
-          <a:blip r:embed="rId9">
-            <a:alphaModFix/>
-          </a:blip>
-          <a:srcRect b="0" l="0" r="0" t="0"/>
-          <a:stretch/>
-        </p:blipFill>
-        <p:spPr>
-          <a:xfrm>
-            <a:off x="8070949" y="2783085"/>
-            <a:ext cx="3530649" cy="3600450"/>
-          </a:xfrm>
-          <a:prstGeom prst="rect">
-            <a:avLst/>
-          </a:prstGeom>
-          <a:noFill/>
-          <a:ln>
-            <a:noFill/>
-          </a:ln>
-        </p:spPr>
-      </p:pic>
-      <p:sp>
-        <p:nvSpPr>
-          <p:cNvPr id="177" name="Google Shape;177;p18"/>
-          <p:cNvSpPr txBox="1"/>
-          <p:nvPr/>
-        </p:nvSpPr>
-        <p:spPr>
-          <a:xfrm>
-            <a:off x="581025" y="464939"/>
-            <a:ext cx="11581447" cy="571500"/>
-          </a:xfrm>
-          <a:prstGeom prst="rect">
-            <a:avLst/>
-          </a:prstGeom>
-          <a:noFill/>
-          <a:ln>
-            <a:noFill/>
-          </a:ln>
-        </p:spPr>
-        <p:txBody>
-          <a:bodyPr anchorCtr="0" anchor="t" bIns="0" lIns="0" spcFirstLastPara="1" rIns="0" wrap="square" tIns="0">
-            <a:spAutoFit/>
-          </a:bodyPr>
-          <a:lstStyle/>
-          <a:p>
-            <a:pPr indent="0" lvl="0" marL="0" marR="0" rtl="0" algn="l">
               <a:spcBef>
                 <a:spcPts val="0"/>
               </a:spcBef>
@@ -17435,7 +15598,7 @@
                 <a:cs typeface="Urbanist"/>
                 <a:sym typeface="Urbanist"/>
               </a:rPr>
-              <a:t>Powered by AMD Instinct</a:t>
+              <a:t>Powered by AMD Instinct &amp; Ryzen</a:t>
             </a:r>
             <a:endParaRPr/>
           </a:p>
@@ -17450,7 +15613,7 @@
         <p:spPr>
           <a:xfrm>
             <a:off x="581025" y="1207889"/>
-            <a:ext cx="11029950" cy="19050"/>
+            <a:ext cx="11030100" cy="19200"/>
           </a:xfrm>
           <a:prstGeom prst="rect">
             <a:avLst/>
@@ -18671,72 +16834,112 @@
           </a:ln>
         </p:spPr>
       </p:pic>
-      <p:pic>
-        <p:nvPicPr>
-          <p:cNvPr descr="image.png" id="217" name="Google Shape;217;p21"/>
-          <p:cNvPicPr preferRelativeResize="0"/>
+      <p:grpSp>
+        <p:nvGrpSpPr>
+          <p:cNvPr id="217" name="Google Shape;217;p21"/>
+          <p:cNvGrpSpPr/>
           <p:nvPr/>
-        </p:nvPicPr>
-        <p:blipFill rotWithShape="1">
-          <a:blip r:embed="rId4">
-            <a:alphaModFix/>
-          </a:blip>
-          <a:srcRect b="0" l="0" r="0" t="0"/>
-          <a:stretch/>
-        </p:blipFill>
-        <p:spPr>
-          <a:xfrm>
-            <a:off x="581025" y="2571750"/>
-            <a:ext cx="5229225" cy="2857500"/>
-          </a:xfrm>
-          <a:prstGeom prst="rect">
-            <a:avLst/>
-          </a:prstGeom>
-          <a:noFill/>
-          <a:ln>
+        </p:nvGrpSpPr>
+        <p:grpSpPr>
+          <a:xfrm>
+            <a:off x="762000" y="714375"/>
+            <a:ext cx="10668000" cy="1143000"/>
+            <a:chOff x="0" y="0"/>
+            <a:chExt cx="10668000" cy="1143000"/>
+          </a:xfrm>
+        </p:grpSpPr>
+        <p:sp>
+          <p:nvSpPr>
+            <p:cNvPr id="218" name="Google Shape;218;p21"/>
+            <p:cNvSpPr/>
+            <p:nvPr/>
+          </p:nvSpPr>
+          <p:spPr>
+            <a:xfrm>
+              <a:off x="0" y="0"/>
+              <a:ext cx="10668000" cy="1143000"/>
+            </a:xfrm>
+            <a:prstGeom prst="rect">
+              <a:avLst/>
+            </a:prstGeom>
+            <a:solidFill>
+              <a:srgbClr val="000000">
+                <a:alpha val="0"/>
+              </a:srgbClr>
+            </a:solidFill>
+            <a:ln>
+              <a:noFill/>
+            </a:ln>
+          </p:spPr>
+          <p:txBody>
+            <a:bodyPr anchorCtr="0" anchor="ctr" bIns="0" lIns="0" spcFirstLastPara="1" rIns="0" wrap="square" tIns="0">
+              <a:noAutofit/>
+            </a:bodyPr>
+            <a:lstStyle/>
+            <a:p>
+              <a:pPr indent="0" lvl="0" marL="0" rtl="0" algn="l">
+                <a:spcBef>
+                  <a:spcPts val="0"/>
+                </a:spcBef>
+                <a:spcAft>
+                  <a:spcPts val="0"/>
+                </a:spcAft>
+                <a:buNone/>
+              </a:pPr>
+              <a:r>
+                <a:t/>
+              </a:r>
+              <a:endParaRPr/>
+            </a:p>
+          </p:txBody>
+        </p:sp>
+        <p:sp>
+          <p:nvSpPr>
+            <p:cNvPr id="219" name="Google Shape;219;p21"/>
+            <p:cNvSpPr txBox="1"/>
+            <p:nvPr/>
+          </p:nvSpPr>
+          <p:spPr>
+            <a:xfrm>
+              <a:off x="0" y="0"/>
+              <a:ext cx="10668000" cy="1143000"/>
+            </a:xfrm>
+            <a:prstGeom prst="rect">
+              <a:avLst/>
+            </a:prstGeom>
             <a:noFill/>
-          </a:ln>
-        </p:spPr>
-      </p:pic>
-      <p:sp>
-        <p:nvSpPr>
-          <p:cNvPr id="218" name="Google Shape;218;p21"/>
-          <p:cNvSpPr txBox="1"/>
-          <p:nvPr/>
-        </p:nvSpPr>
-        <p:spPr>
-          <a:xfrm>
-            <a:off x="971550" y="2962275"/>
-            <a:ext cx="4448175" cy="1333500"/>
-          </a:xfrm>
-          <a:prstGeom prst="rect">
-            <a:avLst/>
-          </a:prstGeom>
-          <a:noFill/>
-          <a:ln>
-            <a:noFill/>
-          </a:ln>
-        </p:spPr>
-        <p:txBody>
-          <a:bodyPr anchorCtr="0" anchor="t" bIns="0" lIns="0" spcFirstLastPara="1" rIns="0" wrap="square" tIns="0">
-            <a:spAutoFit/>
-          </a:bodyPr>
-          <a:lstStyle/>
-          <a:p>
-            <a:pPr indent="0" lvl="0" marL="0" marR="0" rtl="0" algn="ctr">
-              <a:lnSpc>
-                <a:spcPct val="100000"/>
-              </a:lnSpc>
-              <a:spcBef>
-                <a:spcPts val="0"/>
-              </a:spcBef>
-              <a:spcAft>
-                <a:spcPts val="0"/>
-              </a:spcAft>
-              <a:buNone/>
-            </a:pPr>
-            <a:r>
-              <a:rPr b="1" i="0" lang="en-US" sz="10500" u="none" cap="none" strike="noStrike">
+            <a:ln>
+              <a:noFill/>
+            </a:ln>
+          </p:spPr>
+          <p:txBody>
+            <a:bodyPr anchorCtr="0" anchor="t" bIns="0" lIns="0" spcFirstLastPara="1" rIns="0" wrap="square" tIns="0">
+              <a:noAutofit/>
+            </a:bodyPr>
+            <a:lstStyle/>
+            <a:p>
+              <a:pPr indent="0" lvl="0" marL="0" rtl="0" algn="l">
+                <a:spcBef>
+                  <a:spcPts val="0"/>
+                </a:spcBef>
+                <a:spcAft>
+                  <a:spcPts val="0"/>
+                </a:spcAft>
+                <a:buNone/>
+              </a:pPr>
+              <a:r>
+                <a:rPr b="1" lang="en-US" sz="4600">
+                  <a:solidFill>
+                    <a:srgbClr val="ED1C24"/>
+                  </a:solidFill>
+                  <a:latin typeface="Urbanist"/>
+                  <a:ea typeface="Urbanist"/>
+                  <a:cs typeface="Urbanist"/>
+                  <a:sym typeface="Urbanist"/>
+                </a:rPr>
+                <a:t>Market Opportunity</a:t>
+              </a:r>
+              <a:endParaRPr b="1" sz="4600">
                 <a:solidFill>
                   <a:srgbClr val="ED1C24"/>
                 </a:solidFill>
@@ -18744,99 +16947,187 @@
                 <a:ea typeface="Urbanist"/>
                 <a:cs typeface="Urbanist"/>
                 <a:sym typeface="Urbanist"/>
-              </a:rPr>
-              <a:t>$1.2B</a:t>
-            </a:r>
-            <a:endParaRPr/>
-          </a:p>
-        </p:txBody>
-      </p:sp>
-      <p:sp>
-        <p:nvSpPr>
-          <p:cNvPr id="219" name="Google Shape;219;p21"/>
-          <p:cNvSpPr txBox="1"/>
+              </a:endParaRPr>
+            </a:p>
+            <a:p>
+              <a:pPr indent="0" lvl="0" marL="0" rtl="0" algn="l">
+                <a:spcBef>
+                  <a:spcPts val="750"/>
+                </a:spcBef>
+                <a:spcAft>
+                  <a:spcPts val="0"/>
+                </a:spcAft>
+                <a:buNone/>
+              </a:pPr>
+              <a:r>
+                <a:rPr b="0" lang="en-US" sz="1800">
+                  <a:solidFill>
+                    <a:srgbClr val="E5E5E5"/>
+                  </a:solidFill>
+                  <a:latin typeface="Urbanist"/>
+                  <a:ea typeface="Urbanist"/>
+                  <a:cs typeface="Urbanist"/>
+                  <a:sym typeface="Urbanist"/>
+                </a:rPr>
+                <a:t>Sizing the content integrity and plagiarism detection landscape.</a:t>
+              </a:r>
+              <a:endParaRPr b="0" sz="1800">
+                <a:solidFill>
+                  <a:srgbClr val="E5E5E5"/>
+                </a:solidFill>
+                <a:latin typeface="Urbanist"/>
+                <a:ea typeface="Urbanist"/>
+                <a:cs typeface="Urbanist"/>
+                <a:sym typeface="Urbanist"/>
+              </a:endParaRPr>
+            </a:p>
+          </p:txBody>
+        </p:sp>
+      </p:grpSp>
+      <p:grpSp>
+        <p:nvGrpSpPr>
+          <p:cNvPr id="220" name="Google Shape;220;p21"/>
+          <p:cNvGrpSpPr/>
           <p:nvPr/>
-        </p:nvSpPr>
-        <p:spPr>
-          <a:xfrm>
-            <a:off x="971550" y="4391025"/>
-            <a:ext cx="4448175" cy="647700"/>
-          </a:xfrm>
-          <a:prstGeom prst="rect">
-            <a:avLst/>
-          </a:prstGeom>
-          <a:noFill/>
-          <a:ln>
+        </p:nvGrpSpPr>
+        <p:grpSpPr>
+          <a:xfrm>
+            <a:off x="762000" y="2095500"/>
+            <a:ext cx="4572000" cy="4000500"/>
+            <a:chOff x="0" y="0"/>
+            <a:chExt cx="4572000" cy="4000500"/>
+          </a:xfrm>
+        </p:grpSpPr>
+        <p:sp>
+          <p:nvSpPr>
+            <p:cNvPr id="221" name="Google Shape;221;p21"/>
+            <p:cNvSpPr/>
+            <p:nvPr/>
+          </p:nvSpPr>
+          <p:spPr>
+            <a:xfrm>
+              <a:off x="0" y="0"/>
+              <a:ext cx="4572000" cy="4000500"/>
+            </a:xfrm>
+            <a:prstGeom prst="roundRect">
+              <a:avLst>
+                <a:gd fmla="val 3809" name="adj"/>
+              </a:avLst>
+            </a:prstGeom>
+            <a:solidFill>
+              <a:srgbClr val="141414"/>
+            </a:solidFill>
+            <a:ln cap="flat" cmpd="sng" w="14300">
+              <a:solidFill>
+                <a:srgbClr val="262626"/>
+              </a:solidFill>
+              <a:prstDash val="solid"/>
+              <a:round/>
+              <a:headEnd len="sm" w="sm" type="none"/>
+              <a:tailEnd len="sm" w="sm" type="none"/>
+            </a:ln>
+          </p:spPr>
+          <p:txBody>
+            <a:bodyPr anchorCtr="0" anchor="ctr" bIns="0" lIns="0" spcFirstLastPara="1" rIns="0" wrap="square" tIns="0">
+              <a:noAutofit/>
+            </a:bodyPr>
+            <a:lstStyle/>
+            <a:p>
+              <a:pPr indent="0" lvl="0" marL="0" rtl="0" algn="l">
+                <a:spcBef>
+                  <a:spcPts val="0"/>
+                </a:spcBef>
+                <a:spcAft>
+                  <a:spcPts val="0"/>
+                </a:spcAft>
+                <a:buNone/>
+              </a:pPr>
+              <a:r>
+                <a:t/>
+              </a:r>
+              <a:endParaRPr/>
+            </a:p>
+          </p:txBody>
+        </p:sp>
+        <p:sp>
+          <p:nvSpPr>
+            <p:cNvPr id="222" name="Google Shape;222;p21"/>
+            <p:cNvSpPr txBox="1"/>
+            <p:nvPr/>
+          </p:nvSpPr>
+          <p:spPr>
+            <a:xfrm>
+              <a:off x="285750" y="285750"/>
+              <a:ext cx="4000500" cy="3429000"/>
+            </a:xfrm>
+            <a:prstGeom prst="rect">
+              <a:avLst/>
+            </a:prstGeom>
             <a:noFill/>
-          </a:ln>
-        </p:spPr>
-        <p:txBody>
-          <a:bodyPr anchorCtr="0" anchor="t" bIns="0" lIns="0" spcFirstLastPara="1" rIns="0" wrap="square" tIns="0">
-            <a:spAutoFit/>
-          </a:bodyPr>
-          <a:lstStyle/>
-          <a:p>
-            <a:pPr indent="0" lvl="0" marL="0" marR="0" rtl="0" algn="ctr">
-              <a:spcBef>
-                <a:spcPts val="0"/>
-              </a:spcBef>
-              <a:spcAft>
-                <a:spcPts val="0"/>
-              </a:spcAft>
-              <a:buNone/>
-            </a:pPr>
-            <a:r>
-              <a:rPr b="0" i="0" lang="en-US" sz="2100" u="none" cap="none" strike="noStrike">
+            <a:ln>
+              <a:noFill/>
+            </a:ln>
+          </p:spPr>
+          <p:txBody>
+            <a:bodyPr anchorCtr="0" anchor="ctr" bIns="0" lIns="0" spcFirstLastPara="1" rIns="0" wrap="square" tIns="0">
+              <a:noAutofit/>
+            </a:bodyPr>
+            <a:lstStyle/>
+            <a:p>
+              <a:pPr indent="0" lvl="0" marL="0" rtl="0" algn="ctr">
+                <a:spcBef>
+                  <a:spcPts val="0"/>
+                </a:spcBef>
+                <a:spcAft>
+                  <a:spcPts val="0"/>
+                </a:spcAft>
+                <a:buNone/>
+              </a:pPr>
+              <a:r>
+                <a:rPr b="0" lang="en-US" sz="9600">
+                  <a:solidFill>
+                    <a:srgbClr val="ED1C24"/>
+                  </a:solidFill>
+                  <a:latin typeface="Urbanist ExtraBold"/>
+                  <a:ea typeface="Urbanist ExtraBold"/>
+                  <a:cs typeface="Urbanist ExtraBold"/>
+                  <a:sym typeface="Urbanist ExtraBold"/>
+                </a:rPr>
+                <a:t>$1.2B</a:t>
+              </a:r>
+              <a:endParaRPr b="0" sz="9600">
                 <a:solidFill>
-                  <a:srgbClr val="FFFFFF"/>
+                  <a:srgbClr val="ED1C24"/>
                 </a:solidFill>
-                <a:latin typeface="Urbanist SemiBold"/>
-                <a:ea typeface="Urbanist SemiBold"/>
-                <a:cs typeface="Urbanist SemiBold"/>
-                <a:sym typeface="Urbanist SemiBold"/>
-              </a:rPr>
-              <a:t>PLAGIARISM DETECTION MARKET</a:t>
-            </a:r>
-            <a:endParaRPr/>
-          </a:p>
-        </p:txBody>
-      </p:sp>
-      <p:sp>
-        <p:nvSpPr>
-          <p:cNvPr id="220" name="Google Shape;220;p21"/>
-          <p:cNvSpPr txBox="1"/>
-          <p:nvPr/>
-        </p:nvSpPr>
-        <p:spPr>
-          <a:xfrm>
-            <a:off x="6381750" y="2547342"/>
-            <a:ext cx="5490686" cy="323850"/>
-          </a:xfrm>
-          <a:prstGeom prst="rect">
-            <a:avLst/>
-          </a:prstGeom>
-          <a:noFill/>
-          <a:ln>
-            <a:noFill/>
-          </a:ln>
-        </p:spPr>
-        <p:txBody>
-          <a:bodyPr anchorCtr="0" anchor="t" bIns="0" lIns="0" spcFirstLastPara="1" rIns="0" wrap="square" tIns="0">
-            <a:spAutoFit/>
-          </a:bodyPr>
-          <a:lstStyle/>
-          <a:p>
-            <a:pPr indent="0" lvl="0" marL="0" marR="0" rtl="0" algn="l">
-              <a:spcBef>
-                <a:spcPts val="0"/>
-              </a:spcBef>
-              <a:spcAft>
-                <a:spcPts val="0"/>
-              </a:spcAft>
-              <a:buNone/>
-            </a:pPr>
-            <a:r>
-              <a:rPr b="1" i="0" lang="en-US" sz="2100" u="none" cap="none" strike="noStrike">
+                <a:latin typeface="Urbanist ExtraBold"/>
+                <a:ea typeface="Urbanist ExtraBold"/>
+                <a:cs typeface="Urbanist ExtraBold"/>
+                <a:sym typeface="Urbanist ExtraBold"/>
+              </a:endParaRPr>
+            </a:p>
+            <a:p>
+              <a:pPr indent="0" lvl="0" marL="0" rtl="0" algn="ctr">
+                <a:spcBef>
+                  <a:spcPts val="1125"/>
+                </a:spcBef>
+                <a:spcAft>
+                  <a:spcPts val="0"/>
+                </a:spcAft>
+                <a:buNone/>
+              </a:pPr>
+              <a:r>
+                <a:rPr b="1" lang="en-US" sz="1600">
+                  <a:solidFill>
+                    <a:srgbClr val="FFFFFF"/>
+                  </a:solidFill>
+                  <a:latin typeface="Urbanist"/>
+                  <a:ea typeface="Urbanist"/>
+                  <a:cs typeface="Urbanist"/>
+                  <a:sym typeface="Urbanist"/>
+                </a:rPr>
+                <a:t>PLAGIARISM DETECTION MARKET</a:t>
+              </a:r>
+              <a:endParaRPr b="1" sz="1600">
                 <a:solidFill>
                   <a:srgbClr val="FFFFFF"/>
                 </a:solidFill>
@@ -18844,52 +17135,164 @@
                 <a:ea typeface="Urbanist"/>
                 <a:cs typeface="Urbanist"/>
                 <a:sym typeface="Urbanist"/>
-              </a:rPr>
-              <a:t>Ready for Enterprise Budgets</a:t>
-            </a:r>
-            <a:endParaRPr/>
-          </a:p>
-        </p:txBody>
-      </p:sp>
-      <p:sp>
-        <p:nvSpPr>
-          <p:cNvPr id="221" name="Google Shape;221;p21"/>
-          <p:cNvSpPr txBox="1"/>
+              </a:endParaRPr>
+            </a:p>
+          </p:txBody>
+        </p:sp>
+      </p:grpSp>
+      <p:grpSp>
+        <p:nvGrpSpPr>
+          <p:cNvPr id="223" name="Google Shape;223;p21"/>
+          <p:cNvGrpSpPr/>
           <p:nvPr/>
-        </p:nvSpPr>
-        <p:spPr>
-          <a:xfrm>
-            <a:off x="6381750" y="3080742"/>
-            <a:ext cx="5229225" cy="1005482"/>
-          </a:xfrm>
-          <a:prstGeom prst="rect">
-            <a:avLst/>
-          </a:prstGeom>
-          <a:noFill/>
-          <a:ln>
+        </p:nvGrpSpPr>
+        <p:grpSpPr>
+          <a:xfrm>
+            <a:off x="5715000" y="2095500"/>
+            <a:ext cx="5715000" cy="1857300"/>
+            <a:chOff x="0" y="0"/>
+            <a:chExt cx="5715000" cy="1857300"/>
+          </a:xfrm>
+        </p:grpSpPr>
+        <p:sp>
+          <p:nvSpPr>
+            <p:cNvPr id="224" name="Google Shape;224;p21"/>
+            <p:cNvSpPr/>
+            <p:nvPr/>
+          </p:nvSpPr>
+          <p:spPr>
+            <a:xfrm>
+              <a:off x="0" y="0"/>
+              <a:ext cx="5715000" cy="1857300"/>
+            </a:xfrm>
+            <a:prstGeom prst="roundRect">
+              <a:avLst>
+                <a:gd fmla="val 8205" name="adj"/>
+              </a:avLst>
+            </a:prstGeom>
+            <a:solidFill>
+              <a:srgbClr val="141414"/>
+            </a:solidFill>
+            <a:ln cap="flat" cmpd="sng" w="14300">
+              <a:solidFill>
+                <a:srgbClr val="262626"/>
+              </a:solidFill>
+              <a:prstDash val="solid"/>
+              <a:round/>
+              <a:headEnd len="sm" w="sm" type="none"/>
+              <a:tailEnd len="sm" w="sm" type="none"/>
+            </a:ln>
+          </p:spPr>
+          <p:txBody>
+            <a:bodyPr anchorCtr="0" anchor="ctr" bIns="0" lIns="0" spcFirstLastPara="1" rIns="0" wrap="square" tIns="0">
+              <a:noAutofit/>
+            </a:bodyPr>
+            <a:lstStyle/>
+            <a:p>
+              <a:pPr indent="0" lvl="0" marL="0" rtl="0" algn="l">
+                <a:spcBef>
+                  <a:spcPts val="0"/>
+                </a:spcBef>
+                <a:spcAft>
+                  <a:spcPts val="0"/>
+                </a:spcAft>
+                <a:buNone/>
+              </a:pPr>
+              <a:r>
+                <a:t/>
+              </a:r>
+              <a:endParaRPr/>
+            </a:p>
+          </p:txBody>
+        </p:sp>
+        <p:sp>
+          <p:nvSpPr>
+            <p:cNvPr id="225" name="Google Shape;225;p21"/>
+            <p:cNvSpPr txBox="1"/>
+            <p:nvPr/>
+          </p:nvSpPr>
+          <p:spPr>
+            <a:xfrm>
+              <a:off x="285750" y="238125"/>
+              <a:ext cx="5143500" cy="1381200"/>
+            </a:xfrm>
+            <a:prstGeom prst="rect">
+              <a:avLst/>
+            </a:prstGeom>
             <a:noFill/>
-          </a:ln>
-        </p:spPr>
-        <p:txBody>
-          <a:bodyPr anchorCtr="0" anchor="t" bIns="0" lIns="0" spcFirstLastPara="1" rIns="0" wrap="square" tIns="0">
-            <a:spAutoFit/>
-          </a:bodyPr>
-          <a:lstStyle/>
-          <a:p>
-            <a:pPr indent="0" lvl="0" marL="0" marR="0" rtl="0" algn="l">
-              <a:lnSpc>
-                <a:spcPct val="160000"/>
-              </a:lnSpc>
-              <a:spcBef>
-                <a:spcPts val="0"/>
-              </a:spcBef>
-              <a:spcAft>
-                <a:spcPts val="0"/>
-              </a:spcAft>
-              <a:buNone/>
-            </a:pPr>
-            <a:r>
-              <a:rPr b="0" i="0" lang="en-US" sz="1650" u="none" cap="none" strike="noStrike">
+            <a:ln>
+              <a:noFill/>
+            </a:ln>
+          </p:spPr>
+          <p:txBody>
+            <a:bodyPr anchorCtr="0" anchor="t" bIns="0" lIns="0" spcFirstLastPara="1" rIns="0" wrap="square" tIns="0">
+              <a:noAutofit/>
+            </a:bodyPr>
+            <a:lstStyle/>
+            <a:p>
+              <a:pPr indent="0" lvl="0" marL="0" rtl="0" algn="l">
+                <a:spcBef>
+                  <a:spcPts val="0"/>
+                </a:spcBef>
+                <a:spcAft>
+                  <a:spcPts val="0"/>
+                </a:spcAft>
+                <a:buNone/>
+              </a:pPr>
+              <a:r>
+                <a:rPr lang="en-US" sz="2400">
+                  <a:solidFill>
+                    <a:srgbClr val="ED1C24"/>
+                  </a:solidFill>
+                  <a:latin typeface="Material Icons"/>
+                  <a:ea typeface="Material Icons"/>
+                  <a:cs typeface="Material Icons"/>
+                  <a:sym typeface="Material Icons"/>
+                </a:rPr>
+                <a:t>school</a:t>
+              </a:r>
+              <a:r>
+                <a:rPr b="1" lang="en-US" sz="2000">
+                  <a:solidFill>
+                    <a:srgbClr val="FFFFFF"/>
+                  </a:solidFill>
+                  <a:latin typeface="Urbanist"/>
+                  <a:ea typeface="Urbanist"/>
+                  <a:cs typeface="Urbanist"/>
+                  <a:sym typeface="Urbanist"/>
+                </a:rPr>
+                <a:t>Ready for Enterprise Budgets</a:t>
+              </a:r>
+              <a:endParaRPr>
+                <a:latin typeface="Urbanist"/>
+                <a:ea typeface="Urbanist"/>
+                <a:cs typeface="Urbanist"/>
+                <a:sym typeface="Urbanist"/>
+              </a:endParaRPr>
+            </a:p>
+            <a:p>
+              <a:pPr indent="0" lvl="0" marL="0" rtl="0" algn="l">
+                <a:spcBef>
+                  <a:spcPts val="600"/>
+                </a:spcBef>
+                <a:spcAft>
+                  <a:spcPts val="0"/>
+                </a:spcAft>
+                <a:buNone/>
+              </a:pPr>
+              <a:r>
+                <a:rPr b="0" lang="en-US" sz="1350">
+                  <a:solidFill>
+                    <a:srgbClr val="A3A3A3"/>
+                  </a:solidFill>
+                  <a:latin typeface="Urbanist"/>
+                  <a:ea typeface="Urbanist"/>
+                  <a:cs typeface="Urbanist"/>
+                  <a:sym typeface="Urbanist"/>
+                </a:rPr>
+                <a:t>Universities already allocate massive budgets for content integrity tooling. This solution slots perfectly into their existing CMS at a fraction of the cost.</a:t>
+              </a:r>
+              <a:endParaRPr b="0" sz="1350">
                 <a:solidFill>
                   <a:srgbClr val="A3A3A3"/>
                 </a:solidFill>
@@ -18897,52 +17300,188 @@
                 <a:ea typeface="Urbanist"/>
                 <a:cs typeface="Urbanist"/>
                 <a:sym typeface="Urbanist"/>
-              </a:rPr>
-              <a:t>Universities already allocate massive budgets for content integrity tooling. This solution slots perfectly into their existing CMS at a fraction of the cost.</a:t>
-            </a:r>
-            <a:endParaRPr/>
-          </a:p>
-        </p:txBody>
-      </p:sp>
-      <p:sp>
-        <p:nvSpPr>
-          <p:cNvPr id="222" name="Google Shape;222;p21"/>
-          <p:cNvSpPr txBox="1"/>
+              </a:endParaRPr>
+            </a:p>
+          </p:txBody>
+        </p:sp>
+      </p:grpSp>
+      <p:grpSp>
+        <p:nvGrpSpPr>
+          <p:cNvPr id="226" name="Google Shape;226;p21"/>
+          <p:cNvGrpSpPr/>
           <p:nvPr/>
-        </p:nvSpPr>
-        <p:spPr>
-          <a:xfrm>
-            <a:off x="6381750" y="4295775"/>
-            <a:ext cx="5229225" cy="1005482"/>
-          </a:xfrm>
-          <a:prstGeom prst="rect">
-            <a:avLst/>
-          </a:prstGeom>
-          <a:noFill/>
-          <a:ln>
+        </p:nvGrpSpPr>
+        <p:grpSpPr>
+          <a:xfrm>
+            <a:off x="5715000" y="4238625"/>
+            <a:ext cx="5715000" cy="1857300"/>
+            <a:chOff x="0" y="0"/>
+            <a:chExt cx="5715000" cy="1857300"/>
+          </a:xfrm>
+        </p:grpSpPr>
+        <p:sp>
+          <p:nvSpPr>
+            <p:cNvPr id="227" name="Google Shape;227;p21"/>
+            <p:cNvSpPr/>
+            <p:nvPr/>
+          </p:nvSpPr>
+          <p:spPr>
+            <a:xfrm>
+              <a:off x="0" y="0"/>
+              <a:ext cx="5715000" cy="1857300"/>
+            </a:xfrm>
+            <a:prstGeom prst="roundRect">
+              <a:avLst>
+                <a:gd fmla="val 8205" name="adj"/>
+              </a:avLst>
+            </a:prstGeom>
+            <a:solidFill>
+              <a:srgbClr val="141414"/>
+            </a:solidFill>
+            <a:ln cap="flat" cmpd="sng" w="14300">
+              <a:solidFill>
+                <a:srgbClr val="262626"/>
+              </a:solidFill>
+              <a:prstDash val="solid"/>
+              <a:round/>
+              <a:headEnd len="sm" w="sm" type="none"/>
+              <a:tailEnd len="sm" w="sm" type="none"/>
+            </a:ln>
+          </p:spPr>
+          <p:txBody>
+            <a:bodyPr anchorCtr="0" anchor="ctr" bIns="0" lIns="0" spcFirstLastPara="1" rIns="0" wrap="square" tIns="0">
+              <a:noAutofit/>
+            </a:bodyPr>
+            <a:lstStyle/>
+            <a:p>
+              <a:pPr indent="0" lvl="0" marL="0" rtl="0" algn="l">
+                <a:spcBef>
+                  <a:spcPts val="0"/>
+                </a:spcBef>
+                <a:spcAft>
+                  <a:spcPts val="0"/>
+                </a:spcAft>
+                <a:buNone/>
+              </a:pPr>
+              <a:r>
+                <a:t/>
+              </a:r>
+              <a:endParaRPr/>
+            </a:p>
+          </p:txBody>
+        </p:sp>
+        <p:sp>
+          <p:nvSpPr>
+            <p:cNvPr id="228" name="Google Shape;228;p21"/>
+            <p:cNvSpPr txBox="1"/>
+            <p:nvPr/>
+          </p:nvSpPr>
+          <p:spPr>
+            <a:xfrm>
+              <a:off x="285750" y="238125"/>
+              <a:ext cx="5143500" cy="1381200"/>
+            </a:xfrm>
+            <a:prstGeom prst="rect">
+              <a:avLst/>
+            </a:prstGeom>
             <a:noFill/>
-          </a:ln>
-        </p:spPr>
-        <p:txBody>
-          <a:bodyPr anchorCtr="0" anchor="t" bIns="0" lIns="0" spcFirstLastPara="1" rIns="0" wrap="square" tIns="0">
-            <a:spAutoFit/>
-          </a:bodyPr>
-          <a:lstStyle/>
-          <a:p>
-            <a:pPr indent="0" lvl="0" marL="0" marR="0" rtl="0" algn="l">
-              <a:lnSpc>
-                <a:spcPct val="160000"/>
-              </a:lnSpc>
-              <a:spcBef>
-                <a:spcPts val="0"/>
-              </a:spcBef>
-              <a:spcAft>
-                <a:spcPts val="0"/>
-              </a:spcAft>
-              <a:buNone/>
-            </a:pPr>
-            <a:r>
-              <a:rPr b="0" i="0" lang="en-US" sz="1650" u="none" cap="none" strike="noStrike">
+            <a:ln>
+              <a:noFill/>
+            </a:ln>
+          </p:spPr>
+          <p:txBody>
+            <a:bodyPr anchorCtr="0" anchor="t" bIns="0" lIns="0" spcFirstLastPara="1" rIns="0" wrap="square" tIns="0">
+              <a:noAutofit/>
+            </a:bodyPr>
+            <a:lstStyle/>
+            <a:p>
+              <a:pPr indent="0" lvl="0" marL="0" rtl="0" algn="l">
+                <a:spcBef>
+                  <a:spcPts val="0"/>
+                </a:spcBef>
+                <a:spcAft>
+                  <a:spcPts val="0"/>
+                </a:spcAft>
+                <a:buNone/>
+              </a:pPr>
+              <a:r>
+                <a:rPr lang="en-US" sz="2400">
+                  <a:solidFill>
+                    <a:srgbClr val="ED1C24"/>
+                  </a:solidFill>
+                  <a:latin typeface="Material Icons"/>
+                  <a:ea typeface="Material Icons"/>
+                  <a:cs typeface="Material Icons"/>
+                  <a:sym typeface="Material Icons"/>
+                </a:rPr>
+                <a:t>business</a:t>
+              </a:r>
+              <a:r>
+                <a:rPr b="1" lang="en-US" sz="2000">
+                  <a:solidFill>
+                    <a:srgbClr val="FFFFFF"/>
+                  </a:solidFill>
+                  <a:latin typeface="Urbanist"/>
+                  <a:ea typeface="Urbanist"/>
+                  <a:cs typeface="Urbanist"/>
+                  <a:sym typeface="Urbanist"/>
+                </a:rPr>
+                <a:t>Multi-Sector Expansion</a:t>
+              </a:r>
+              <a:endParaRPr>
+                <a:latin typeface="Urbanist"/>
+                <a:ea typeface="Urbanist"/>
+                <a:cs typeface="Urbanist"/>
+                <a:sym typeface="Urbanist"/>
+              </a:endParaRPr>
+            </a:p>
+            <a:p>
+              <a:pPr indent="0" lvl="0" marL="0" rtl="0" algn="l">
+                <a:spcBef>
+                  <a:spcPts val="600"/>
+                </a:spcBef>
+                <a:spcAft>
+                  <a:spcPts val="0"/>
+                </a:spcAft>
+                <a:buNone/>
+              </a:pPr>
+              <a:r>
+                <a:rPr b="0" lang="en-US" sz="1350">
+                  <a:solidFill>
+                    <a:srgbClr val="A3A3A3"/>
+                  </a:solidFill>
+                  <a:latin typeface="Urbanist"/>
+                  <a:ea typeface="Urbanist"/>
+                  <a:cs typeface="Urbanist"/>
+                  <a:sym typeface="Urbanist"/>
+                </a:rPr>
+                <a:t>Beyond academia, the exact same pipeline serves the urgent needs of newsrooms, investigation academies, and government content teams which mo</a:t>
+              </a:r>
+              <a:r>
+                <a:rPr lang="en-US" sz="1350">
+                  <a:solidFill>
+                    <a:srgbClr val="A3A3A3"/>
+                  </a:solidFill>
+                  <a:latin typeface="Urbanist"/>
+                  <a:ea typeface="Urbanist"/>
+                  <a:cs typeface="Urbanist"/>
+                  <a:sym typeface="Urbanist"/>
+                </a:rPr>
+                <a:t>st of them are already in Drupal</a:t>
+              </a:r>
+              <a:r>
+                <a:rPr b="0" lang="en-US" sz="1350">
+                  <a:solidFill>
+                    <a:srgbClr val="A3A3A3"/>
+                  </a:solidFill>
+                  <a:latin typeface="Urbanist"/>
+                  <a:ea typeface="Urbanist"/>
+                  <a:cs typeface="Urbanist"/>
+                  <a:sym typeface="Urbanist"/>
+                </a:rPr>
+                <a:t>.</a:t>
+              </a:r>
+              <a:endParaRPr b="0" sz="1350">
                 <a:solidFill>
                   <a:srgbClr val="A3A3A3"/>
                 </a:solidFill>
@@ -18950,114 +17489,11 @@
                 <a:ea typeface="Urbanist"/>
                 <a:cs typeface="Urbanist"/>
                 <a:sym typeface="Urbanist"/>
-              </a:rPr>
-              <a:t>Beyond academia, the exact same pipeline serves the urgent needs of newsrooms and government content teams.</a:t>
-            </a:r>
-            <a:endParaRPr/>
-          </a:p>
-        </p:txBody>
-      </p:sp>
-      <p:sp>
-        <p:nvSpPr>
-          <p:cNvPr id="223" name="Google Shape;223;p21"/>
-          <p:cNvSpPr txBox="1"/>
-          <p:nvPr/>
-        </p:nvSpPr>
-        <p:spPr>
-          <a:xfrm>
-            <a:off x="581025" y="581025"/>
-            <a:ext cx="11581447" cy="571500"/>
-          </a:xfrm>
-          <a:prstGeom prst="rect">
-            <a:avLst/>
-          </a:prstGeom>
-          <a:noFill/>
-          <a:ln>
-            <a:noFill/>
-          </a:ln>
-        </p:spPr>
-        <p:txBody>
-          <a:bodyPr anchorCtr="0" anchor="t" bIns="0" lIns="0" spcFirstLastPara="1" rIns="0" wrap="square" tIns="0">
-            <a:spAutoFit/>
-          </a:bodyPr>
-          <a:lstStyle/>
-          <a:p>
-            <a:pPr indent="0" lvl="0" marL="0" marR="0" rtl="0" algn="l">
-              <a:spcBef>
-                <a:spcPts val="0"/>
-              </a:spcBef>
-              <a:spcAft>
-                <a:spcPts val="0"/>
-              </a:spcAft>
-              <a:buNone/>
-            </a:pPr>
-            <a:r>
-              <a:rPr b="1" i="0" lang="en-US" sz="3600" u="none" cap="none" strike="noStrike">
-                <a:solidFill>
-                  <a:srgbClr val="FFFFFF"/>
-                </a:solidFill>
-                <a:latin typeface="Urbanist"/>
-                <a:ea typeface="Urbanist"/>
-                <a:cs typeface="Urbanist"/>
-                <a:sym typeface="Urbanist"/>
-              </a:rPr>
-              <a:t>Market Opportunity</a:t>
-            </a:r>
-            <a:endParaRPr/>
-          </a:p>
-        </p:txBody>
-      </p:sp>
-      <p:sp>
-        <p:nvSpPr>
-          <p:cNvPr id="224" name="Google Shape;224;p21"/>
-          <p:cNvSpPr/>
-          <p:nvPr/>
-        </p:nvSpPr>
-        <p:spPr>
-          <a:xfrm>
-            <a:off x="581025" y="1323975"/>
-            <a:ext cx="11029950" cy="19050"/>
-          </a:xfrm>
-          <a:prstGeom prst="rect">
-            <a:avLst/>
-          </a:prstGeom>
-          <a:solidFill>
-            <a:srgbClr val="1A1A1A"/>
-          </a:solidFill>
-          <a:ln>
-            <a:noFill/>
-          </a:ln>
-        </p:spPr>
-        <p:txBody>
-          <a:bodyPr anchorCtr="0" anchor="ctr" bIns="45700" lIns="91425" spcFirstLastPara="1" rIns="91425" wrap="square" tIns="45700">
-            <a:noAutofit/>
-          </a:bodyPr>
-          <a:lstStyle/>
-          <a:p>
-            <a:pPr indent="0" lvl="0" marL="0" marR="0" rtl="0" algn="ctr">
-              <a:spcBef>
-                <a:spcPts val="0"/>
-              </a:spcBef>
-              <a:spcAft>
-                <a:spcPts val="0"/>
-              </a:spcAft>
-              <a:buNone/>
-            </a:pPr>
-            <a:r>
-              <a:t/>
-            </a:r>
-            <a:endParaRPr b="0" i="0" sz="1800" u="none" cap="none" strike="noStrike">
-              <a:solidFill>
-                <a:schemeClr val="dk1"/>
-              </a:solidFill>
-              <a:latin typeface="Calibri"/>
-              <a:ea typeface="Calibri"/>
-              <a:cs typeface="Calibri"/>
-              <a:sym typeface="Calibri"/>
-            </a:endParaRPr>
-          </a:p>
-        </p:txBody>
-      </p:sp>
+              </a:endParaRPr>
+            </a:p>
+          </p:txBody>
+        </p:sp>
+      </p:grpSp>
     </p:spTree>
   </p:cSld>
   <p:clrMapOvr>
@@ -19067,6 +17503,285 @@
 </file>
 
 <file path=ppt/theme/theme1.xml><?xml version="1.0" encoding="utf-8"?>
+<a:theme xmlns:a="http://schemas.openxmlformats.org/drawingml/2006/main" xmlns:r="http://schemas.openxmlformats.org/officeDocument/2006/relationships">
+  <a:themeElements>
+    <a:clrScheme name="Default">
+      <a:dk1>
+        <a:srgbClr val="000000"/>
+      </a:dk1>
+      <a:lt1>
+        <a:srgbClr val="FFFFFF"/>
+      </a:lt1>
+      <a:dk2>
+        <a:srgbClr val="158158"/>
+      </a:dk2>
+      <a:lt2>
+        <a:srgbClr val="F3F3F3"/>
+      </a:lt2>
+      <a:accent1>
+        <a:srgbClr val="058DC7"/>
+      </a:accent1>
+      <a:accent2>
+        <a:srgbClr val="50B432"/>
+      </a:accent2>
+      <a:accent3>
+        <a:srgbClr val="ED561B"/>
+      </a:accent3>
+      <a:accent4>
+        <a:srgbClr val="EDEF00"/>
+      </a:accent4>
+      <a:accent5>
+        <a:srgbClr val="24CBE5"/>
+      </a:accent5>
+      <a:accent6>
+        <a:srgbClr val="64E572"/>
+      </a:accent6>
+      <a:hlink>
+        <a:srgbClr val="2200CC"/>
+      </a:hlink>
+      <a:folHlink>
+        <a:srgbClr val="551A8B"/>
+      </a:folHlink>
+    </a:clrScheme>
+    <a:fontScheme name="Office">
+      <a:majorFont>
+        <a:latin typeface="Arial"/>
+        <a:ea typeface=""/>
+        <a:cs typeface=""/>
+        <a:font script="Jpan" typeface="ＭＳ Ｐゴシック"/>
+        <a:font script="Hang" typeface="맑은 고딕"/>
+        <a:font script="Hans" typeface="宋体"/>
+        <a:font script="Hant" typeface="新細明體"/>
+        <a:font script="Arab" typeface="Times New Roman"/>
+        <a:font script="Hebr" typeface="Times New Roman"/>
+        <a:font script="Thai" typeface="Angsana New"/>
+        <a:font script="Ethi" typeface="Nyala"/>
+        <a:font script="Beng" typeface="Vrinda"/>
+        <a:font script="Gujr" typeface="Shruti"/>
+        <a:font script="Khmr" typeface="MoolBoran"/>
+        <a:font script="Knda" typeface="Tunga"/>
+        <a:font script="Guru" typeface="Raavi"/>
+        <a:font script="Cans" typeface="Euphemia"/>
+        <a:font script="Cher" typeface="Plantagenet Cherokee"/>
+        <a:font script="Yiii" typeface="Microsoft Yi Baiti"/>
+        <a:font script="Tibt" typeface="Microsoft Himalaya"/>
+        <a:font script="Thaa" typeface="MV Boli"/>
+        <a:font script="Deva" typeface="Mangal"/>
+        <a:font script="Telu" typeface="Gautami"/>
+        <a:font script="Taml" typeface="Latha"/>
+        <a:font script="Syrc" typeface="Estrangelo Edessa"/>
+        <a:font script="Orya" typeface="Kalinga"/>
+        <a:font script="Mlym" typeface="Kartika"/>
+        <a:font script="Laoo" typeface="DokChampa"/>
+        <a:font script="Sinh" typeface="Iskoola Pota"/>
+        <a:font script="Mong" typeface="Mongolian Baiti"/>
+        <a:font script="Viet" typeface="Times New Roman"/>
+        <a:font script="Uigh" typeface="Microsoft Uighur"/>
+        <a:font script="Geor" typeface="Sylfaen"/>
+      </a:majorFont>
+      <a:minorFont>
+        <a:latin typeface="Arial"/>
+        <a:ea typeface=""/>
+        <a:cs typeface=""/>
+        <a:font script="Jpan" typeface="ＭＳ Ｐゴシック"/>
+        <a:font script="Hang" typeface="맑은 고딕"/>
+        <a:font script="Hans" typeface="宋体"/>
+        <a:font script="Hant" typeface="新細明體"/>
+        <a:font script="Arab" typeface="Arial"/>
+        <a:font script="Hebr" typeface="Arial"/>
+        <a:font script="Thai" typeface="Cordia New"/>
+        <a:font script="Ethi" typeface="Nyala"/>
+        <a:font script="Beng" typeface="Vrinda"/>
+        <a:font script="Gujr" typeface="Shruti"/>
+        <a:font script="Khmr" typeface="DaunPenh"/>
+        <a:font script="Knda" typeface="Tunga"/>
+        <a:font script="Guru" typeface="Raavi"/>
+        <a:font script="Cans" typeface="Euphemia"/>
+        <a:font script="Cher" typeface="Plantagenet Cherokee"/>
+        <a:font script="Yiii" typeface="Microsoft Yi Baiti"/>
+        <a:font script="Tibt" typeface="Microsoft Himalaya"/>
+        <a:font script="Thaa" typeface="MV Boli"/>
+        <a:font script="Deva" typeface="Mangal"/>
+        <a:font script="Telu" typeface="Gautami"/>
+        <a:font script="Taml" typeface="Latha"/>
+        <a:font script="Syrc" typeface="Estrangelo Edessa"/>
+        <a:font script="Orya" typeface="Kalinga"/>
+        <a:font script="Mlym" typeface="Kartika"/>
+        <a:font script="Laoo" typeface="DokChampa"/>
+        <a:font script="Sinh" typeface="Iskoola Pota"/>
+        <a:font script="Mong" typeface="Mongolian Baiti"/>
+        <a:font script="Viet" typeface="Arial"/>
+        <a:font script="Uigh" typeface="Microsoft Uighur"/>
+        <a:font script="Geor" typeface="Sylfaen"/>
+      </a:minorFont>
+    </a:fontScheme>
+    <a:fmtScheme name="Office">
+      <a:fillStyleLst>
+        <a:solidFill>
+          <a:schemeClr val="phClr"/>
+        </a:solidFill>
+        <a:gradFill rotWithShape="1">
+          <a:gsLst>
+            <a:gs pos="0">
+              <a:schemeClr val="phClr">
+                <a:tint val="50000"/>
+                <a:satMod val="300000"/>
+              </a:schemeClr>
+            </a:gs>
+            <a:gs pos="35000">
+              <a:schemeClr val="phClr">
+                <a:tint val="37000"/>
+                <a:satMod val="300000"/>
+              </a:schemeClr>
+            </a:gs>
+            <a:gs pos="100000">
+              <a:schemeClr val="phClr">
+                <a:tint val="15000"/>
+                <a:satMod val="350000"/>
+              </a:schemeClr>
+            </a:gs>
+          </a:gsLst>
+          <a:lin ang="16200000" scaled="1"/>
+        </a:gradFill>
+        <a:gradFill rotWithShape="1">
+          <a:gsLst>
+            <a:gs pos="0">
+              <a:schemeClr val="phClr">
+                <a:tint val="100000"/>
+                <a:shade val="100000"/>
+                <a:satMod val="130000"/>
+              </a:schemeClr>
+            </a:gs>
+            <a:gs pos="100000">
+              <a:schemeClr val="phClr">
+                <a:tint val="50000"/>
+                <a:shade val="100000"/>
+                <a:satMod val="350000"/>
+              </a:schemeClr>
+            </a:gs>
+          </a:gsLst>
+          <a:lin ang="16200000" scaled="0"/>
+        </a:gradFill>
+      </a:fillStyleLst>
+      <a:lnStyleLst>
+        <a:ln w="9525" cap="flat" cmpd="sng" algn="ctr">
+          <a:solidFill>
+            <a:schemeClr val="phClr">
+              <a:shade val="95000"/>
+              <a:satMod val="105000"/>
+            </a:schemeClr>
+          </a:solidFill>
+          <a:prstDash val="solid"/>
+        </a:ln>
+        <a:ln w="25400" cap="flat" cmpd="sng" algn="ctr">
+          <a:solidFill>
+            <a:schemeClr val="phClr"/>
+          </a:solidFill>
+          <a:prstDash val="solid"/>
+        </a:ln>
+        <a:ln w="38100" cap="flat" cmpd="sng" algn="ctr">
+          <a:solidFill>
+            <a:schemeClr val="phClr"/>
+          </a:solidFill>
+          <a:prstDash val="solid"/>
+        </a:ln>
+      </a:lnStyleLst>
+      <a:effectStyleLst>
+        <a:effectStyle>
+          <a:effectLst>
+            <a:outerShdw blurRad="40000" dist="20000" dir="5400000" rotWithShape="0">
+              <a:srgbClr val="000000">
+                <a:alpha val="38000"/>
+              </a:srgbClr>
+            </a:outerShdw>
+          </a:effectLst>
+        </a:effectStyle>
+        <a:effectStyle>
+          <a:effectLst>
+            <a:outerShdw blurRad="40000" dist="23000" dir="5400000" rotWithShape="0">
+              <a:srgbClr val="000000">
+                <a:alpha val="35000"/>
+              </a:srgbClr>
+            </a:outerShdw>
+          </a:effectLst>
+        </a:effectStyle>
+        <a:effectStyle>
+          <a:effectLst>
+            <a:outerShdw blurRad="40000" dist="23000" dir="5400000" rotWithShape="0">
+              <a:srgbClr val="000000">
+                <a:alpha val="35000"/>
+              </a:srgbClr>
+            </a:outerShdw>
+          </a:effectLst>
+          <a:scene3d>
+            <a:camera prst="orthographicFront">
+              <a:rot lat="0" lon="0" rev="0"/>
+            </a:camera>
+            <a:lightRig rig="threePt" dir="t">
+              <a:rot lat="0" lon="0" rev="1200000"/>
+            </a:lightRig>
+          </a:scene3d>
+          <a:sp3d>
+            <a:bevelT w="63500" h="25400"/>
+          </a:sp3d>
+        </a:effectStyle>
+      </a:effectStyleLst>
+      <a:bgFillStyleLst>
+        <a:solidFill>
+          <a:schemeClr val="phClr"/>
+        </a:solidFill>
+        <a:gradFill rotWithShape="1">
+          <a:gsLst>
+            <a:gs pos="0">
+              <a:schemeClr val="phClr">
+                <a:tint val="40000"/>
+                <a:satMod val="350000"/>
+              </a:schemeClr>
+            </a:gs>
+            <a:gs pos="40000">
+              <a:schemeClr val="phClr">
+                <a:tint val="45000"/>
+                <a:shade val="99000"/>
+                <a:satMod val="350000"/>
+              </a:schemeClr>
+            </a:gs>
+            <a:gs pos="100000">
+              <a:schemeClr val="phClr">
+                <a:shade val="20000"/>
+                <a:satMod val="255000"/>
+              </a:schemeClr>
+            </a:gs>
+          </a:gsLst>
+          <a:path path="circle">
+            <a:fillToRect l="50000" t="-80000" r="50000" b="180000"/>
+          </a:path>
+        </a:gradFill>
+        <a:gradFill rotWithShape="1">
+          <a:gsLst>
+            <a:gs pos="0">
+              <a:schemeClr val="phClr">
+                <a:tint val="80000"/>
+                <a:satMod val="300000"/>
+              </a:schemeClr>
+            </a:gs>
+            <a:gs pos="100000">
+              <a:schemeClr val="phClr">
+                <a:shade val="30000"/>
+                <a:satMod val="200000"/>
+              </a:schemeClr>
+            </a:gs>
+          </a:gsLst>
+          <a:path path="circle">
+            <a:fillToRect l="50000" t="50000" r="50000" b="50000"/>
+          </a:path>
+        </a:gradFill>
+      </a:bgFillStyleLst>
+    </a:fmtScheme>
+  </a:themeElements>
+</a:theme>
+</file>
+
+<file path=ppt/theme/theme2.xml><?xml version="1.0" encoding="utf-8"?>
 <a:theme xmlns:a="http://schemas.openxmlformats.org/drawingml/2006/main" xmlns:r="http://schemas.openxmlformats.org/officeDocument/2006/relationships" name="Office Theme">
   <a:themeElements>
     <a:clrScheme name="Office">
@@ -19343,283 +18058,4 @@
     </a:fmtScheme>
   </a:themeElements>
 </a:theme>
-</file>
-
-<file path=ppt/theme/theme2.xml><?xml version="1.0" encoding="utf-8"?>
-<a:theme xmlns:a="http://schemas.openxmlformats.org/drawingml/2006/main" xmlns:r="http://schemas.openxmlformats.org/officeDocument/2006/relationships">
-  <a:themeElements>
-    <a:clrScheme name="Default">
-      <a:dk1>
-        <a:srgbClr val="000000"/>
-      </a:dk1>
-      <a:lt1>
-        <a:srgbClr val="FFFFFF"/>
-      </a:lt1>
-      <a:dk2>
-        <a:srgbClr val="158158"/>
-      </a:dk2>
-      <a:lt2>
-        <a:srgbClr val="F3F3F3"/>
-      </a:lt2>
-      <a:accent1>
-        <a:srgbClr val="058DC7"/>
-      </a:accent1>
-      <a:accent2>
-        <a:srgbClr val="50B432"/>
-      </a:accent2>
-      <a:accent3>
-        <a:srgbClr val="ED561B"/>
-      </a:accent3>
-      <a:accent4>
-        <a:srgbClr val="EDEF00"/>
-      </a:accent4>
-      <a:accent5>
-        <a:srgbClr val="24CBE5"/>
-      </a:accent5>
-      <a:accent6>
-        <a:srgbClr val="64E572"/>
-      </a:accent6>
-      <a:hlink>
-        <a:srgbClr val="2200CC"/>
-      </a:hlink>
-      <a:folHlink>
-        <a:srgbClr val="551A8B"/>
-      </a:folHlink>
-    </a:clrScheme>
-    <a:fontScheme name="Office">
-      <a:majorFont>
-        <a:latin typeface="Arial"/>
-        <a:ea typeface=""/>
-        <a:cs typeface=""/>
-        <a:font script="Jpan" typeface="ＭＳ Ｐゴシック"/>
-        <a:font script="Hang" typeface="맑은 고딕"/>
-        <a:font script="Hans" typeface="宋体"/>
-        <a:font script="Hant" typeface="新細明體"/>
-        <a:font script="Arab" typeface="Times New Roman"/>
-        <a:font script="Hebr" typeface="Times New Roman"/>
-        <a:font script="Thai" typeface="Angsana New"/>
-        <a:font script="Ethi" typeface="Nyala"/>
-        <a:font script="Beng" typeface="Vrinda"/>
-        <a:font script="Gujr" typeface="Shruti"/>
-        <a:font script="Khmr" typeface="MoolBoran"/>
-        <a:font script="Knda" typeface="Tunga"/>
-        <a:font script="Guru" typeface="Raavi"/>
-        <a:font script="Cans" typeface="Euphemia"/>
-        <a:font script="Cher" typeface="Plantagenet Cherokee"/>
-        <a:font script="Yiii" typeface="Microsoft Yi Baiti"/>
-        <a:font script="Tibt" typeface="Microsoft Himalaya"/>
-        <a:font script="Thaa" typeface="MV Boli"/>
-        <a:font script="Deva" typeface="Mangal"/>
-        <a:font script="Telu" typeface="Gautami"/>
-        <a:font script="Taml" typeface="Latha"/>
-        <a:font script="Syrc" typeface="Estrangelo Edessa"/>
-        <a:font script="Orya" typeface="Kalinga"/>
-        <a:font script="Mlym" typeface="Kartika"/>
-        <a:font script="Laoo" typeface="DokChampa"/>
-        <a:font script="Sinh" typeface="Iskoola Pota"/>
-        <a:font script="Mong" typeface="Mongolian Baiti"/>
-        <a:font script="Viet" typeface="Times New Roman"/>
-        <a:font script="Uigh" typeface="Microsoft Uighur"/>
-        <a:font script="Geor" typeface="Sylfaen"/>
-      </a:majorFont>
-      <a:minorFont>
-        <a:latin typeface="Arial"/>
-        <a:ea typeface=""/>
-        <a:cs typeface=""/>
-        <a:font script="Jpan" typeface="ＭＳ Ｐゴシック"/>
-        <a:font script="Hang" typeface="맑은 고딕"/>
-        <a:font script="Hans" typeface="宋体"/>
-        <a:font script="Hant" typeface="新細明體"/>
-        <a:font script="Arab" typeface="Arial"/>
-        <a:font script="Hebr" typeface="Arial"/>
-        <a:font script="Thai" typeface="Cordia New"/>
-        <a:font script="Ethi" typeface="Nyala"/>
-        <a:font script="Beng" typeface="Vrinda"/>
-        <a:font script="Gujr" typeface="Shruti"/>
-        <a:font script="Khmr" typeface="DaunPenh"/>
-        <a:font script="Knda" typeface="Tunga"/>
-        <a:font script="Guru" typeface="Raavi"/>
-        <a:font script="Cans" typeface="Euphemia"/>
-        <a:font script="Cher" typeface="Plantagenet Cherokee"/>
-        <a:font script="Yiii" typeface="Microsoft Yi Baiti"/>
-        <a:font script="Tibt" typeface="Microsoft Himalaya"/>
-        <a:font script="Thaa" typeface="MV Boli"/>
-        <a:font script="Deva" typeface="Mangal"/>
-        <a:font script="Telu" typeface="Gautami"/>
-        <a:font script="Taml" typeface="Latha"/>
-        <a:font script="Syrc" typeface="Estrangelo Edessa"/>
-        <a:font script="Orya" typeface="Kalinga"/>
-        <a:font script="Mlym" typeface="Kartika"/>
-        <a:font script="Laoo" typeface="DokChampa"/>
-        <a:font script="Sinh" typeface="Iskoola Pota"/>
-        <a:font script="Mong" typeface="Mongolian Baiti"/>
-        <a:font script="Viet" typeface="Arial"/>
-        <a:font script="Uigh" typeface="Microsoft Uighur"/>
-        <a:font script="Geor" typeface="Sylfaen"/>
-      </a:minorFont>
-    </a:fontScheme>
-    <a:fmtScheme name="Office">
-      <a:fillStyleLst>
-        <a:solidFill>
-          <a:schemeClr val="phClr"/>
-        </a:solidFill>
-        <a:gradFill rotWithShape="1">
-          <a:gsLst>
-            <a:gs pos="0">
-              <a:schemeClr val="phClr">
-                <a:tint val="50000"/>
-                <a:satMod val="300000"/>
-              </a:schemeClr>
-            </a:gs>
-            <a:gs pos="35000">
-              <a:schemeClr val="phClr">
-                <a:tint val="37000"/>
-                <a:satMod val="300000"/>
-              </a:schemeClr>
-            </a:gs>
-            <a:gs pos="100000">
-              <a:schemeClr val="phClr">
-                <a:tint val="15000"/>
-                <a:satMod val="350000"/>
-              </a:schemeClr>
-            </a:gs>
-          </a:gsLst>
-          <a:lin ang="16200000" scaled="1"/>
-        </a:gradFill>
-        <a:gradFill rotWithShape="1">
-          <a:gsLst>
-            <a:gs pos="0">
-              <a:schemeClr val="phClr">
-                <a:tint val="100000"/>
-                <a:shade val="100000"/>
-                <a:satMod val="130000"/>
-              </a:schemeClr>
-            </a:gs>
-            <a:gs pos="100000">
-              <a:schemeClr val="phClr">
-                <a:tint val="50000"/>
-                <a:shade val="100000"/>
-                <a:satMod val="350000"/>
-              </a:schemeClr>
-            </a:gs>
-          </a:gsLst>
-          <a:lin ang="16200000" scaled="0"/>
-        </a:gradFill>
-      </a:fillStyleLst>
-      <a:lnStyleLst>
-        <a:ln w="9525" cap="flat" cmpd="sng" algn="ctr">
-          <a:solidFill>
-            <a:schemeClr val="phClr">
-              <a:shade val="95000"/>
-              <a:satMod val="105000"/>
-            </a:schemeClr>
-          </a:solidFill>
-          <a:prstDash val="solid"/>
-        </a:ln>
-        <a:ln w="25400" cap="flat" cmpd="sng" algn="ctr">
-          <a:solidFill>
-            <a:schemeClr val="phClr"/>
-          </a:solidFill>
-          <a:prstDash val="solid"/>
-        </a:ln>
-        <a:ln w="38100" cap="flat" cmpd="sng" algn="ctr">
-          <a:solidFill>
-            <a:schemeClr val="phClr"/>
-          </a:solidFill>
-          <a:prstDash val="solid"/>
-        </a:ln>
-      </a:lnStyleLst>
-      <a:effectStyleLst>
-        <a:effectStyle>
-          <a:effectLst>
-            <a:outerShdw blurRad="40000" dist="20000" dir="5400000" rotWithShape="0">
-              <a:srgbClr val="000000">
-                <a:alpha val="38000"/>
-              </a:srgbClr>
-            </a:outerShdw>
-          </a:effectLst>
-        </a:effectStyle>
-        <a:effectStyle>
-          <a:effectLst>
-            <a:outerShdw blurRad="40000" dist="23000" dir="5400000" rotWithShape="0">
-              <a:srgbClr val="000000">
-                <a:alpha val="35000"/>
-              </a:srgbClr>
-            </a:outerShdw>
-          </a:effectLst>
-        </a:effectStyle>
-        <a:effectStyle>
-          <a:effectLst>
-            <a:outerShdw blurRad="40000" dist="23000" dir="5400000" rotWithShape="0">
-              <a:srgbClr val="000000">
-                <a:alpha val="35000"/>
-              </a:srgbClr>
-            </a:outerShdw>
-          </a:effectLst>
-          <a:scene3d>
-            <a:camera prst="orthographicFront">
-              <a:rot lat="0" lon="0" rev="0"/>
-            </a:camera>
-            <a:lightRig rig="threePt" dir="t">
-              <a:rot lat="0" lon="0" rev="1200000"/>
-            </a:lightRig>
-          </a:scene3d>
-          <a:sp3d>
-            <a:bevelT w="63500" h="25400"/>
-          </a:sp3d>
-        </a:effectStyle>
-      </a:effectStyleLst>
-      <a:bgFillStyleLst>
-        <a:solidFill>
-          <a:schemeClr val="phClr"/>
-        </a:solidFill>
-        <a:gradFill rotWithShape="1">
-          <a:gsLst>
-            <a:gs pos="0">
-              <a:schemeClr val="phClr">
-                <a:tint val="40000"/>
-                <a:satMod val="350000"/>
-              </a:schemeClr>
-            </a:gs>
-            <a:gs pos="40000">
-              <a:schemeClr val="phClr">
-                <a:tint val="45000"/>
-                <a:shade val="99000"/>
-                <a:satMod val="350000"/>
-              </a:schemeClr>
-            </a:gs>
-            <a:gs pos="100000">
-              <a:schemeClr val="phClr">
-                <a:shade val="20000"/>
-                <a:satMod val="255000"/>
-              </a:schemeClr>
-            </a:gs>
-          </a:gsLst>
-          <a:path path="circle">
-            <a:fillToRect l="50000" t="-80000" r="50000" b="180000"/>
-          </a:path>
-        </a:gradFill>
-        <a:gradFill rotWithShape="1">
-          <a:gsLst>
-            <a:gs pos="0">
-              <a:schemeClr val="phClr">
-                <a:tint val="80000"/>
-                <a:satMod val="300000"/>
-              </a:schemeClr>
-            </a:gs>
-            <a:gs pos="100000">
-              <a:schemeClr val="phClr">
-                <a:shade val="30000"/>
-                <a:satMod val="200000"/>
-              </a:schemeClr>
-            </a:gs>
-          </a:gsLst>
-          <a:path path="circle">
-            <a:fillToRect l="50000" t="50000" r="50000" b="50000"/>
-          </a:path>
-        </a:gradFill>
-      </a:bgFillStyleLst>
-    </a:fmtScheme>
-  </a:themeElements>
-</a:theme>
 </file>